--- a/Group_7_Phase1.pptx
+++ b/Group_7_Phase1.pptx
@@ -1,35 +1,35 @@
 
 <file path=ppt/presentation.xml><?xml version="1.0" encoding="utf-8"?>
-<p:presentation xmlns:a="http://schemas.openxmlformats.org/drawingml/2006/main" xmlns:r="http://schemas.openxmlformats.org/officeDocument/2006/relationships" xmlns:p="http://schemas.openxmlformats.org/presentationml/2006/main" saveSubsetFonts="1" embedTrueTypeFonts="true">
+<p:presentation xmlns:a="http://schemas.openxmlformats.org/drawingml/2006/main" xmlns:r="http://schemas.openxmlformats.org/officeDocument/2006/relationships" xmlns:p="http://schemas.openxmlformats.org/presentationml/2006/main" embedTrueTypeFonts="1" saveSubsetFonts="1">
   <p:sldMasterIdLst>
     <p:sldMasterId id="2147483648" r:id="rId1"/>
   </p:sldMasterIdLst>
   <p:sldIdLst>
-    <p:sldId id="256" r:id="rId6"/>
-    <p:sldId id="257" r:id="rId7"/>
-    <p:sldId id="258" r:id="rId8"/>
-    <p:sldId id="259" r:id="rId9"/>
-    <p:sldId id="260" r:id="rId10"/>
-    <p:sldId id="261" r:id="rId11"/>
+    <p:sldId id="256" r:id="rId2"/>
+    <p:sldId id="257" r:id="rId3"/>
+    <p:sldId id="258" r:id="rId4"/>
+    <p:sldId id="259" r:id="rId5"/>
+    <p:sldId id="260" r:id="rId6"/>
+    <p:sldId id="261" r:id="rId7"/>
   </p:sldIdLst>
   <p:sldSz cx="18288000" cy="10287000"/>
   <p:notesSz cx="6858000" cy="9144000"/>
   <p:embeddedFontLst>
     <p:embeddedFont>
-      <p:font typeface="HK Grotesk Semi-Bold" charset="1" panose="00000700000000000000"/>
-      <p:regular r:id="rId12"/>
+      <p:font typeface="HK Grotesk" panose="020B0604020202020204" charset="0"/>
+      <p:regular r:id="rId8"/>
     </p:embeddedFont>
     <p:embeddedFont>
-      <p:font typeface="HK Grotesk" charset="1" panose="00000500000000000000"/>
-      <p:regular r:id="rId13"/>
+      <p:font typeface="HK Grotesk Bold" panose="020B0604020202020204" charset="0"/>
+      <p:regular r:id="rId9"/>
     </p:embeddedFont>
     <p:embeddedFont>
-      <p:font typeface="Noto Serif Display ExtraCondensed Light" charset="1" panose="02020406080505020204"/>
-      <p:regular r:id="rId14"/>
+      <p:font typeface="HK Grotesk Semi-Bold" panose="020B0604020202020204" charset="0"/>
+      <p:regular r:id="rId10"/>
     </p:embeddedFont>
     <p:embeddedFont>
-      <p:font typeface="HK Grotesk Bold" charset="1" panose="00000800000000000000"/>
-      <p:regular r:id="rId15"/>
+      <p:font typeface="Noto Serif Display ExtraCondensed Light" panose="020B0604020202020204"/>
+      <p:regular r:id="rId11"/>
     </p:embeddedFont>
   </p:embeddedFontLst>
   <p:defaultTextStyle>
@@ -127,6 +127,22 @@
       </a:defRPr>
     </a:lvl9pPr>
   </p:defaultTextStyle>
+  <p:extLst>
+    <p:ext uri="{EFAFB233-063F-42B5-8137-9DF3F51BA10A}">
+      <p15:sldGuideLst xmlns:p15="http://schemas.microsoft.com/office/powerpoint/2012/main">
+        <p15:guide id="1" orient="horz" pos="2160">
+          <p15:clr>
+            <a:srgbClr val="A4A3A4"/>
+          </p15:clr>
+        </p15:guide>
+        <p15:guide id="2" pos="2880">
+          <p15:clr>
+            <a:srgbClr val="A4A3A4"/>
+          </p15:clr>
+        </p15:guide>
+      </p15:sldGuideLst>
+    </p:ext>
+  </p:extLst>
 </p:presentation>
 </file>
 
@@ -168,10 +184,9 @@
           <a:lstStyle/>
           <a:p>
             <a:r>
-              <a:rPr lang="en-US" smtClean="0"/>
+              <a:rPr lang="en-US"/>
               <a:t>Click to edit Master title style</a:t>
             </a:r>
-            <a:endParaRPr lang="en-US"/>
           </a:p>
         </p:txBody>
       </p:sp>
@@ -287,10 +302,9 @@
           </a:lstStyle>
           <a:p>
             <a:r>
-              <a:rPr lang="en-US" smtClean="0"/>
+              <a:rPr lang="en-US"/>
               <a:t>Click to edit Master subtitle style</a:t>
             </a:r>
-            <a:endParaRPr lang="en-US"/>
           </a:p>
         </p:txBody>
       </p:sp>
@@ -312,7 +326,7 @@
             <a:fld id="{1D8BD707-D9CF-40AE-B4C6-C98DA3205C09}" type="datetimeFigureOut">
               <a:rPr lang="en-US" smtClean="0"/>
               <a:pPr/>
-              <a:t>8/1/2011</a:t>
+              <a:t>2/6/2026</a:t>
             </a:fld>
             <a:endParaRPr lang="en-US"/>
           </a:p>
@@ -402,10 +416,9 @@
           <a:lstStyle/>
           <a:p>
             <a:r>
-              <a:rPr lang="en-US" smtClean="0"/>
+              <a:rPr lang="en-US"/>
               <a:t>Click to edit Master title style</a:t>
             </a:r>
-            <a:endParaRPr lang="en-US"/>
           </a:p>
         </p:txBody>
       </p:sp>
@@ -426,38 +439,37 @@
           <a:p>
             <a:pPr lvl="0"/>
             <a:r>
-              <a:rPr lang="en-US" smtClean="0"/>
+              <a:rPr lang="en-US"/>
               <a:t>Click to edit Master text styles</a:t>
             </a:r>
           </a:p>
           <a:p>
             <a:pPr lvl="1"/>
             <a:r>
-              <a:rPr lang="en-US" smtClean="0"/>
+              <a:rPr lang="en-US"/>
               <a:t>Second level</a:t>
             </a:r>
           </a:p>
           <a:p>
             <a:pPr lvl="2"/>
             <a:r>
-              <a:rPr lang="en-US" smtClean="0"/>
+              <a:rPr lang="en-US"/>
               <a:t>Third level</a:t>
             </a:r>
           </a:p>
           <a:p>
             <a:pPr lvl="3"/>
             <a:r>
-              <a:rPr lang="en-US" smtClean="0"/>
+              <a:rPr lang="en-US"/>
               <a:t>Fourth level</a:t>
             </a:r>
           </a:p>
           <a:p>
             <a:pPr lvl="4"/>
             <a:r>
-              <a:rPr lang="en-US" smtClean="0"/>
+              <a:rPr lang="en-US"/>
               <a:t>Fifth level</a:t>
             </a:r>
-            <a:endParaRPr lang="en-US"/>
           </a:p>
         </p:txBody>
       </p:sp>
@@ -479,7 +491,7 @@
             <a:fld id="{1D8BD707-D9CF-40AE-B4C6-C98DA3205C09}" type="datetimeFigureOut">
               <a:rPr lang="en-US" smtClean="0"/>
               <a:pPr/>
-              <a:t>8/1/2011</a:t>
+              <a:t>2/6/2026</a:t>
             </a:fld>
             <a:endParaRPr lang="en-US"/>
           </a:p>
@@ -574,10 +586,9 @@
           <a:lstStyle/>
           <a:p>
             <a:r>
-              <a:rPr lang="en-US" smtClean="0"/>
+              <a:rPr lang="en-US"/>
               <a:t>Click to edit Master title style</a:t>
             </a:r>
-            <a:endParaRPr lang="en-US"/>
           </a:p>
         </p:txBody>
       </p:sp>
@@ -603,38 +614,37 @@
           <a:p>
             <a:pPr lvl="0"/>
             <a:r>
-              <a:rPr lang="en-US" smtClean="0"/>
+              <a:rPr lang="en-US"/>
               <a:t>Click to edit Master text styles</a:t>
             </a:r>
           </a:p>
           <a:p>
             <a:pPr lvl="1"/>
             <a:r>
-              <a:rPr lang="en-US" smtClean="0"/>
+              <a:rPr lang="en-US"/>
               <a:t>Second level</a:t>
             </a:r>
           </a:p>
           <a:p>
             <a:pPr lvl="2"/>
             <a:r>
-              <a:rPr lang="en-US" smtClean="0"/>
+              <a:rPr lang="en-US"/>
               <a:t>Third level</a:t>
             </a:r>
           </a:p>
           <a:p>
             <a:pPr lvl="3"/>
             <a:r>
-              <a:rPr lang="en-US" smtClean="0"/>
+              <a:rPr lang="en-US"/>
               <a:t>Fourth level</a:t>
             </a:r>
           </a:p>
           <a:p>
             <a:pPr lvl="4"/>
             <a:r>
-              <a:rPr lang="en-US" smtClean="0"/>
+              <a:rPr lang="en-US"/>
               <a:t>Fifth level</a:t>
             </a:r>
-            <a:endParaRPr lang="en-US"/>
           </a:p>
         </p:txBody>
       </p:sp>
@@ -656,7 +666,7 @@
             <a:fld id="{1D8BD707-D9CF-40AE-B4C6-C98DA3205C09}" type="datetimeFigureOut">
               <a:rPr lang="en-US" smtClean="0"/>
               <a:pPr/>
-              <a:t>8/1/2011</a:t>
+              <a:t>2/6/2026</a:t>
             </a:fld>
             <a:endParaRPr lang="en-US"/>
           </a:p>
@@ -746,10 +756,9 @@
           <a:lstStyle/>
           <a:p>
             <a:r>
-              <a:rPr lang="en-US" smtClean="0"/>
+              <a:rPr lang="en-US"/>
               <a:t>Click to edit Master title style</a:t>
             </a:r>
-            <a:endParaRPr lang="en-US"/>
           </a:p>
         </p:txBody>
       </p:sp>
@@ -770,38 +779,37 @@
           <a:p>
             <a:pPr lvl="0"/>
             <a:r>
-              <a:rPr lang="en-US" smtClean="0"/>
+              <a:rPr lang="en-US"/>
               <a:t>Click to edit Master text styles</a:t>
             </a:r>
           </a:p>
           <a:p>
             <a:pPr lvl="1"/>
             <a:r>
-              <a:rPr lang="en-US" smtClean="0"/>
+              <a:rPr lang="en-US"/>
               <a:t>Second level</a:t>
             </a:r>
           </a:p>
           <a:p>
             <a:pPr lvl="2"/>
             <a:r>
-              <a:rPr lang="en-US" smtClean="0"/>
+              <a:rPr lang="en-US"/>
               <a:t>Third level</a:t>
             </a:r>
           </a:p>
           <a:p>
             <a:pPr lvl="3"/>
             <a:r>
-              <a:rPr lang="en-US" smtClean="0"/>
+              <a:rPr lang="en-US"/>
               <a:t>Fourth level</a:t>
             </a:r>
           </a:p>
           <a:p>
             <a:pPr lvl="4"/>
             <a:r>
-              <a:rPr lang="en-US" smtClean="0"/>
+              <a:rPr lang="en-US"/>
               <a:t>Fifth level</a:t>
             </a:r>
-            <a:endParaRPr lang="en-US"/>
           </a:p>
         </p:txBody>
       </p:sp>
@@ -823,7 +831,7 @@
             <a:fld id="{1D8BD707-D9CF-40AE-B4C6-C98DA3205C09}" type="datetimeFigureOut">
               <a:rPr lang="en-US" smtClean="0"/>
               <a:pPr/>
-              <a:t>8/1/2011</a:t>
+              <a:t>2/6/2026</a:t>
             </a:fld>
             <a:endParaRPr lang="en-US"/>
           </a:p>
@@ -922,10 +930,9 @@
           </a:lstStyle>
           <a:p>
             <a:r>
-              <a:rPr lang="en-US" smtClean="0"/>
+              <a:rPr lang="en-US"/>
               <a:t>Click to edit Master title style</a:t>
             </a:r>
-            <a:endParaRPr lang="en-US"/>
           </a:p>
         </p:txBody>
       </p:sp>
@@ -1042,7 +1049,7 @@
           <a:p>
             <a:pPr lvl="0"/>
             <a:r>
-              <a:rPr lang="en-US" smtClean="0"/>
+              <a:rPr lang="en-US"/>
               <a:t>Click to edit Master text styles</a:t>
             </a:r>
           </a:p>
@@ -1066,7 +1073,7 @@
             <a:fld id="{1D8BD707-D9CF-40AE-B4C6-C98DA3205C09}" type="datetimeFigureOut">
               <a:rPr lang="en-US" smtClean="0"/>
               <a:pPr/>
-              <a:t>8/1/2011</a:t>
+              <a:t>2/6/2026</a:t>
             </a:fld>
             <a:endParaRPr lang="en-US"/>
           </a:p>
@@ -1156,10 +1163,9 @@
           <a:lstStyle/>
           <a:p>
             <a:r>
-              <a:rPr lang="en-US" smtClean="0"/>
+              <a:rPr lang="en-US"/>
               <a:t>Click to edit Master title style</a:t>
             </a:r>
-            <a:endParaRPr lang="en-US"/>
           </a:p>
         </p:txBody>
       </p:sp>
@@ -1213,38 +1219,37 @@
           <a:p>
             <a:pPr lvl="0"/>
             <a:r>
-              <a:rPr lang="en-US" smtClean="0"/>
+              <a:rPr lang="en-US"/>
               <a:t>Click to edit Master text styles</a:t>
             </a:r>
           </a:p>
           <a:p>
             <a:pPr lvl="1"/>
             <a:r>
-              <a:rPr lang="en-US" smtClean="0"/>
+              <a:rPr lang="en-US"/>
               <a:t>Second level</a:t>
             </a:r>
           </a:p>
           <a:p>
             <a:pPr lvl="2"/>
             <a:r>
-              <a:rPr lang="en-US" smtClean="0"/>
+              <a:rPr lang="en-US"/>
               <a:t>Third level</a:t>
             </a:r>
           </a:p>
           <a:p>
             <a:pPr lvl="3"/>
             <a:r>
-              <a:rPr lang="en-US" smtClean="0"/>
+              <a:rPr lang="en-US"/>
               <a:t>Fourth level</a:t>
             </a:r>
           </a:p>
           <a:p>
             <a:pPr lvl="4"/>
             <a:r>
-              <a:rPr lang="en-US" smtClean="0"/>
+              <a:rPr lang="en-US"/>
               <a:t>Fifth level</a:t>
             </a:r>
-            <a:endParaRPr lang="en-US"/>
           </a:p>
         </p:txBody>
       </p:sp>
@@ -1298,38 +1303,37 @@
           <a:p>
             <a:pPr lvl="0"/>
             <a:r>
-              <a:rPr lang="en-US" smtClean="0"/>
+              <a:rPr lang="en-US"/>
               <a:t>Click to edit Master text styles</a:t>
             </a:r>
           </a:p>
           <a:p>
             <a:pPr lvl="1"/>
             <a:r>
-              <a:rPr lang="en-US" smtClean="0"/>
+              <a:rPr lang="en-US"/>
               <a:t>Second level</a:t>
             </a:r>
           </a:p>
           <a:p>
             <a:pPr lvl="2"/>
             <a:r>
-              <a:rPr lang="en-US" smtClean="0"/>
+              <a:rPr lang="en-US"/>
               <a:t>Third level</a:t>
             </a:r>
           </a:p>
           <a:p>
             <a:pPr lvl="3"/>
             <a:r>
-              <a:rPr lang="en-US" smtClean="0"/>
+              <a:rPr lang="en-US"/>
               <a:t>Fourth level</a:t>
             </a:r>
           </a:p>
           <a:p>
             <a:pPr lvl="4"/>
             <a:r>
-              <a:rPr lang="en-US" smtClean="0"/>
+              <a:rPr lang="en-US"/>
               <a:t>Fifth level</a:t>
             </a:r>
-            <a:endParaRPr lang="en-US"/>
           </a:p>
         </p:txBody>
       </p:sp>
@@ -1351,7 +1355,7 @@
             <a:fld id="{1D8BD707-D9CF-40AE-B4C6-C98DA3205C09}" type="datetimeFigureOut">
               <a:rPr lang="en-US" smtClean="0"/>
               <a:pPr/>
-              <a:t>8/1/2011</a:t>
+              <a:t>2/6/2026</a:t>
             </a:fld>
             <a:endParaRPr lang="en-US"/>
           </a:p>
@@ -1445,10 +1449,9 @@
           </a:lstStyle>
           <a:p>
             <a:r>
-              <a:rPr lang="en-US" smtClean="0"/>
+              <a:rPr lang="en-US"/>
               <a:t>Click to edit Master title style</a:t>
             </a:r>
-            <a:endParaRPr lang="en-US"/>
           </a:p>
         </p:txBody>
       </p:sp>
@@ -1511,7 +1514,7 @@
           <a:p>
             <a:pPr lvl="0"/>
             <a:r>
-              <a:rPr lang="en-US" smtClean="0"/>
+              <a:rPr lang="en-US"/>
               <a:t>Click to edit Master text styles</a:t>
             </a:r>
           </a:p>
@@ -1567,38 +1570,37 @@
           <a:p>
             <a:pPr lvl="0"/>
             <a:r>
-              <a:rPr lang="en-US" smtClean="0"/>
+              <a:rPr lang="en-US"/>
               <a:t>Click to edit Master text styles</a:t>
             </a:r>
           </a:p>
           <a:p>
             <a:pPr lvl="1"/>
             <a:r>
-              <a:rPr lang="en-US" smtClean="0"/>
+              <a:rPr lang="en-US"/>
               <a:t>Second level</a:t>
             </a:r>
           </a:p>
           <a:p>
             <a:pPr lvl="2"/>
             <a:r>
-              <a:rPr lang="en-US" smtClean="0"/>
+              <a:rPr lang="en-US"/>
               <a:t>Third level</a:t>
             </a:r>
           </a:p>
           <a:p>
             <a:pPr lvl="3"/>
             <a:r>
-              <a:rPr lang="en-US" smtClean="0"/>
+              <a:rPr lang="en-US"/>
               <a:t>Fourth level</a:t>
             </a:r>
           </a:p>
           <a:p>
             <a:pPr lvl="4"/>
             <a:r>
-              <a:rPr lang="en-US" smtClean="0"/>
+              <a:rPr lang="en-US"/>
               <a:t>Fifth level</a:t>
             </a:r>
-            <a:endParaRPr lang="en-US"/>
           </a:p>
         </p:txBody>
       </p:sp>
@@ -1661,7 +1663,7 @@
           <a:p>
             <a:pPr lvl="0"/>
             <a:r>
-              <a:rPr lang="en-US" smtClean="0"/>
+              <a:rPr lang="en-US"/>
               <a:t>Click to edit Master text styles</a:t>
             </a:r>
           </a:p>
@@ -1717,38 +1719,37 @@
           <a:p>
             <a:pPr lvl="0"/>
             <a:r>
-              <a:rPr lang="en-US" smtClean="0"/>
+              <a:rPr lang="en-US"/>
               <a:t>Click to edit Master text styles</a:t>
             </a:r>
           </a:p>
           <a:p>
             <a:pPr lvl="1"/>
             <a:r>
-              <a:rPr lang="en-US" smtClean="0"/>
+              <a:rPr lang="en-US"/>
               <a:t>Second level</a:t>
             </a:r>
           </a:p>
           <a:p>
             <a:pPr lvl="2"/>
             <a:r>
-              <a:rPr lang="en-US" smtClean="0"/>
+              <a:rPr lang="en-US"/>
               <a:t>Third level</a:t>
             </a:r>
           </a:p>
           <a:p>
             <a:pPr lvl="3"/>
             <a:r>
-              <a:rPr lang="en-US" smtClean="0"/>
+              <a:rPr lang="en-US"/>
               <a:t>Fourth level</a:t>
             </a:r>
           </a:p>
           <a:p>
             <a:pPr lvl="4"/>
             <a:r>
-              <a:rPr lang="en-US" smtClean="0"/>
+              <a:rPr lang="en-US"/>
               <a:t>Fifth level</a:t>
             </a:r>
-            <a:endParaRPr lang="en-US"/>
           </a:p>
         </p:txBody>
       </p:sp>
@@ -1770,7 +1771,7 @@
             <a:fld id="{1D8BD707-D9CF-40AE-B4C6-C98DA3205C09}" type="datetimeFigureOut">
               <a:rPr lang="en-US" smtClean="0"/>
               <a:pPr/>
-              <a:t>8/1/2011</a:t>
+              <a:t>2/6/2026</a:t>
             </a:fld>
             <a:endParaRPr lang="en-US"/>
           </a:p>
@@ -1860,10 +1861,9 @@
           <a:lstStyle/>
           <a:p>
             <a:r>
-              <a:rPr lang="en-US" smtClean="0"/>
+              <a:rPr lang="en-US"/>
               <a:t>Click to edit Master title style</a:t>
             </a:r>
-            <a:endParaRPr lang="en-US"/>
           </a:p>
         </p:txBody>
       </p:sp>
@@ -1885,7 +1885,7 @@
             <a:fld id="{1D8BD707-D9CF-40AE-B4C6-C98DA3205C09}" type="datetimeFigureOut">
               <a:rPr lang="en-US" smtClean="0"/>
               <a:pPr/>
-              <a:t>8/1/2011</a:t>
+              <a:t>2/6/2026</a:t>
             </a:fld>
             <a:endParaRPr lang="en-US"/>
           </a:p>
@@ -1977,7 +1977,7 @@
             <a:fld id="{1D8BD707-D9CF-40AE-B4C6-C98DA3205C09}" type="datetimeFigureOut">
               <a:rPr lang="en-US" smtClean="0"/>
               <a:pPr/>
-              <a:t>8/1/2011</a:t>
+              <a:t>2/6/2026</a:t>
             </a:fld>
             <a:endParaRPr lang="en-US"/>
           </a:p>
@@ -2076,10 +2076,9 @@
           </a:lstStyle>
           <a:p>
             <a:r>
-              <a:rPr lang="en-US" smtClean="0"/>
+              <a:rPr lang="en-US"/>
               <a:t>Click to edit Master title style</a:t>
             </a:r>
-            <a:endParaRPr lang="en-US"/>
           </a:p>
         </p:txBody>
       </p:sp>
@@ -2133,38 +2132,37 @@
           <a:p>
             <a:pPr lvl="0"/>
             <a:r>
-              <a:rPr lang="en-US" smtClean="0"/>
+              <a:rPr lang="en-US"/>
               <a:t>Click to edit Master text styles</a:t>
             </a:r>
           </a:p>
           <a:p>
             <a:pPr lvl="1"/>
             <a:r>
-              <a:rPr lang="en-US" smtClean="0"/>
+              <a:rPr lang="en-US"/>
               <a:t>Second level</a:t>
             </a:r>
           </a:p>
           <a:p>
             <a:pPr lvl="2"/>
             <a:r>
-              <a:rPr lang="en-US" smtClean="0"/>
+              <a:rPr lang="en-US"/>
               <a:t>Third level</a:t>
             </a:r>
           </a:p>
           <a:p>
             <a:pPr lvl="3"/>
             <a:r>
-              <a:rPr lang="en-US" smtClean="0"/>
+              <a:rPr lang="en-US"/>
               <a:t>Fourth level</a:t>
             </a:r>
           </a:p>
           <a:p>
             <a:pPr lvl="4"/>
             <a:r>
-              <a:rPr lang="en-US" smtClean="0"/>
+              <a:rPr lang="en-US"/>
               <a:t>Fifth level</a:t>
             </a:r>
-            <a:endParaRPr lang="en-US"/>
           </a:p>
         </p:txBody>
       </p:sp>
@@ -2227,7 +2225,7 @@
           <a:p>
             <a:pPr lvl="0"/>
             <a:r>
-              <a:rPr lang="en-US" smtClean="0"/>
+              <a:rPr lang="en-US"/>
               <a:t>Click to edit Master text styles</a:t>
             </a:r>
           </a:p>
@@ -2251,7 +2249,7 @@
             <a:fld id="{1D8BD707-D9CF-40AE-B4C6-C98DA3205C09}" type="datetimeFigureOut">
               <a:rPr lang="en-US" smtClean="0"/>
               <a:pPr/>
-              <a:t>8/1/2011</a:t>
+              <a:t>2/6/2026</a:t>
             </a:fld>
             <a:endParaRPr lang="en-US"/>
           </a:p>
@@ -2350,10 +2348,9 @@
           </a:lstStyle>
           <a:p>
             <a:r>
-              <a:rPr lang="en-US" smtClean="0"/>
+              <a:rPr lang="en-US"/>
               <a:t>Click to edit Master title style</a:t>
             </a:r>
-            <a:endParaRPr lang="en-US"/>
           </a:p>
         </p:txBody>
       </p:sp>
@@ -2477,7 +2474,7 @@
           <a:p>
             <a:pPr lvl="0"/>
             <a:r>
-              <a:rPr lang="en-US" smtClean="0"/>
+              <a:rPr lang="en-US"/>
               <a:t>Click to edit Master text styles</a:t>
             </a:r>
           </a:p>
@@ -2501,7 +2498,7 @@
             <a:fld id="{1D8BD707-D9CF-40AE-B4C6-C98DA3205C09}" type="datetimeFigureOut">
               <a:rPr lang="en-US" smtClean="0"/>
               <a:pPr/>
-              <a:t>8/1/2011</a:t>
+              <a:t>2/6/2026</a:t>
             </a:fld>
             <a:endParaRPr lang="en-US"/>
           </a:p>
@@ -2606,10 +2603,9 @@
           <a:lstStyle/>
           <a:p>
             <a:r>
-              <a:rPr lang="en-US" smtClean="0"/>
+              <a:rPr lang="en-US"/>
               <a:t>Click to edit Master title style</a:t>
             </a:r>
-            <a:endParaRPr lang="en-US"/>
           </a:p>
         </p:txBody>
       </p:sp>
@@ -2640,38 +2636,37 @@
           <a:p>
             <a:pPr lvl="0"/>
             <a:r>
-              <a:rPr lang="en-US" smtClean="0"/>
+              <a:rPr lang="en-US"/>
               <a:t>Click to edit Master text styles</a:t>
             </a:r>
           </a:p>
           <a:p>
             <a:pPr lvl="1"/>
             <a:r>
-              <a:rPr lang="en-US" smtClean="0"/>
+              <a:rPr lang="en-US"/>
               <a:t>Second level</a:t>
             </a:r>
           </a:p>
           <a:p>
             <a:pPr lvl="2"/>
             <a:r>
-              <a:rPr lang="en-US" smtClean="0"/>
+              <a:rPr lang="en-US"/>
               <a:t>Third level</a:t>
             </a:r>
           </a:p>
           <a:p>
             <a:pPr lvl="3"/>
             <a:r>
-              <a:rPr lang="en-US" smtClean="0"/>
+              <a:rPr lang="en-US"/>
               <a:t>Fourth level</a:t>
             </a:r>
           </a:p>
           <a:p>
             <a:pPr lvl="4"/>
             <a:r>
-              <a:rPr lang="en-US" smtClean="0"/>
+              <a:rPr lang="en-US"/>
               <a:t>Fifth level</a:t>
             </a:r>
-            <a:endParaRPr lang="en-US"/>
           </a:p>
         </p:txBody>
       </p:sp>
@@ -2711,7 +2706,7 @@
             <a:fld id="{1D8BD707-D9CF-40AE-B4C6-C98DA3205C09}" type="datetimeFigureOut">
               <a:rPr lang="en-US" smtClean="0"/>
               <a:pPr/>
-              <a:t>8/1/2011</a:t>
+              <a:t>2/6/2026</a:t>
             </a:fld>
             <a:endParaRPr lang="en-US"/>
           </a:p>
@@ -3066,13 +3061,14 @@
 </file>
 
 <file path=ppt/slides/slide1.xml><?xml version="1.0" encoding="utf-8"?>
-<p:sld xmlns:p="http://schemas.openxmlformats.org/presentationml/2006/main" xmlns:a="http://schemas.openxmlformats.org/drawingml/2006/main" xmlns:r="http://schemas.openxmlformats.org/officeDocument/2006/relationships">
+<p:sld xmlns:a="http://schemas.openxmlformats.org/drawingml/2006/main" xmlns:r="http://schemas.openxmlformats.org/officeDocument/2006/relationships" xmlns:p="http://schemas.openxmlformats.org/presentationml/2006/main">
   <p:cSld>
     <p:bg>
       <p:bgPr>
         <a:solidFill>
           <a:srgbClr val="111520"/>
         </a:solidFill>
+        <a:effectLst/>
       </p:bgPr>
     </p:bg>
     <p:spTree>
@@ -3091,12 +3087,12 @@
       </p:grpSpPr>
       <p:grpSp>
         <p:nvGrpSpPr>
-          <p:cNvPr name="Group 2" id="2"/>
+          <p:cNvPr id="2" name="Group 2"/>
           <p:cNvGrpSpPr/>
           <p:nvPr/>
         </p:nvGrpSpPr>
         <p:grpSpPr>
-          <a:xfrm rot="0">
+          <a:xfrm>
             <a:off x="9296400" y="0"/>
             <a:ext cx="8991600" cy="10287000"/>
             <a:chOff x="0" y="0"/>
@@ -3105,12 +3101,12 @@
         </p:grpSpPr>
         <p:sp>
           <p:nvSpPr>
-            <p:cNvPr name="Freeform 3" id="3"/>
+            <p:cNvPr id="3" name="Freeform 3"/>
             <p:cNvSpPr/>
             <p:nvPr/>
           </p:nvSpPr>
           <p:spPr>
-            <a:xfrm flipH="false" flipV="false" rot="0">
+            <a:xfrm>
               <a:off x="0" y="0"/>
               <a:ext cx="1393034" cy="1593725"/>
             </a:xfrm>
@@ -3119,9 +3115,9 @@
               <a:gdLst/>
               <a:ahLst/>
               <a:cxnLst/>
-              <a:rect r="r" b="b" t="t" l="l"/>
+              <a:rect l="l" t="t" r="r" b="b"/>
               <a:pathLst>
-                <a:path h="1593725" w="1393034">
+                <a:path w="1393034" h="1593725">
                   <a:moveTo>
                     <a:pt x="0" y="0"/>
                   </a:moveTo>
@@ -3141,20 +3137,27 @@
             <a:blipFill>
               <a:blip r:embed="rId2"/>
               <a:stretch>
-                <a:fillRect l="0" t="-378" r="0" b="-378"/>
+                <a:fillRect t="-378" b="-378"/>
               </a:stretch>
             </a:blipFill>
           </p:spPr>
+          <p:txBody>
+            <a:bodyPr/>
+            <a:lstStyle/>
+            <a:p>
+              <a:endParaRPr lang="en-AE"/>
+            </a:p>
+          </p:txBody>
         </p:sp>
       </p:grpSp>
       <p:sp>
         <p:nvSpPr>
-          <p:cNvPr name="TextBox 4" id="4"/>
-          <p:cNvSpPr txBox="true"/>
+          <p:cNvPr id="4" name="TextBox 4"/>
+          <p:cNvSpPr txBox="1"/>
           <p:nvPr/>
         </p:nvSpPr>
         <p:spPr>
-          <a:xfrm rot="0">
+          <a:xfrm>
             <a:off x="666750" y="1638300"/>
             <a:ext cx="6886575" cy="508635"/>
           </a:xfrm>
@@ -3163,18 +3166,18 @@
           </a:prstGeom>
         </p:spPr>
         <p:txBody>
-          <a:bodyPr anchor="t" rtlCol="false" tIns="0" lIns="0" bIns="0" rIns="0">
+          <a:bodyPr lIns="0" tIns="0" rIns="0" bIns="0" rtlCol="0" anchor="t">
             <a:spAutoFit/>
           </a:bodyPr>
           <a:lstStyle/>
           <a:p>
-            <a:pPr algn="l" marL="0" indent="0" lvl="0">
+            <a:pPr marL="0" lvl="0" indent="0" algn="l">
               <a:lnSpc>
                 <a:spcPts val="3899"/>
               </a:lnSpc>
             </a:pPr>
             <a:r>
-              <a:rPr lang="en-US" b="true" sz="3899" u="none">
+              <a:rPr lang="en-US" sz="3899" b="1" u="none">
                 <a:solidFill>
                   <a:srgbClr val="F0F0F0"/>
                 </a:solidFill>
@@ -3190,40 +3193,40 @@
       </p:sp>
       <p:grpSp>
         <p:nvGrpSpPr>
-          <p:cNvPr name="Group 5" id="5"/>
+          <p:cNvPr id="5" name="Group 5"/>
           <p:cNvGrpSpPr/>
           <p:nvPr/>
         </p:nvGrpSpPr>
         <p:grpSpPr>
-          <a:xfrm rot="0">
-            <a:off x="666750" y="4050030"/>
-            <a:ext cx="8044426" cy="5513070"/>
-            <a:chOff x="0" y="0"/>
-            <a:chExt cx="10725902" cy="7350760"/>
+          <a:xfrm>
+            <a:off x="533400" y="2676525"/>
+            <a:ext cx="8044426" cy="7069017"/>
+            <a:chOff x="0" y="266700"/>
+            <a:chExt cx="10725902" cy="9425356"/>
           </a:xfrm>
         </p:grpSpPr>
         <p:sp>
           <p:nvSpPr>
-            <p:cNvPr name="TextBox 6" id="6"/>
-            <p:cNvSpPr txBox="true"/>
+            <p:cNvPr id="6" name="TextBox 6"/>
+            <p:cNvSpPr txBox="1"/>
             <p:nvPr/>
           </p:nvSpPr>
           <p:spPr>
-            <a:xfrm rot="0">
+            <a:xfrm>
               <a:off x="0" y="6233160"/>
-              <a:ext cx="9182100" cy="1117600"/>
+              <a:ext cx="9182101" cy="3458896"/>
             </a:xfrm>
             <a:prstGeom prst="rect">
               <a:avLst/>
             </a:prstGeom>
           </p:spPr>
           <p:txBody>
-            <a:bodyPr anchor="t" rtlCol="false" tIns="0" lIns="0" bIns="0" rIns="0">
+            <a:bodyPr lIns="0" tIns="0" rIns="0" bIns="0" rtlCol="0" anchor="t">
               <a:spAutoFit/>
             </a:bodyPr>
             <a:lstStyle/>
             <a:p>
-              <a:pPr algn="l" marL="0" indent="0" lvl="0">
+              <a:pPr marL="0" lvl="0" indent="0" algn="ctr">
                 <a:lnSpc>
                   <a:spcPts val="3359"/>
                 </a:lnSpc>
@@ -3232,7 +3235,7 @@
                 </a:spcBef>
               </a:pPr>
               <a:r>
-                <a:rPr lang="en-US" sz="2799" u="none">
+                <a:rPr lang="en-US" sz="2799" u="none" dirty="0">
                   <a:solidFill>
                     <a:srgbClr val="F0F0F0"/>
                   </a:solidFill>
@@ -3241,19 +3244,110 @@
                   <a:cs typeface="HK Grotesk"/>
                   <a:sym typeface="HK Grotesk"/>
                 </a:rPr>
-                <a:t>ISTE 240 – Web and Mobile, Spring 2026, Group 7</a:t>
+                <a:t>ISTE 240 – Web and Mobile, Spring 2026,</a:t>
               </a:r>
+            </a:p>
+            <a:p>
+              <a:pPr algn="ctr"/>
+              <a:r>
+                <a:rPr lang="en-AE" sz="2800" b="1" dirty="0">
+                  <a:solidFill>
+                    <a:schemeClr val="bg1"/>
+                  </a:solidFill>
+                  <a:latin typeface="HK Grotesk" panose="020B0604020202020204" charset="0"/>
+                </a:rPr>
+                <a:t>Team Members:</a:t>
+              </a:r>
+              <a:endParaRPr lang="en-AE" sz="2800" dirty="0">
+                <a:solidFill>
+                  <a:schemeClr val="bg1"/>
+                </a:solidFill>
+                <a:latin typeface="HK Grotesk" panose="020B0604020202020204" charset="0"/>
+              </a:endParaRPr>
+            </a:p>
+            <a:p>
+              <a:pPr algn="ctr"/>
+              <a:r>
+                <a:rPr lang="en-AE" sz="2800" dirty="0">
+                  <a:solidFill>
+                    <a:schemeClr val="bg1"/>
+                  </a:solidFill>
+                  <a:latin typeface="HK Grotesk" panose="020B0604020202020204" charset="0"/>
+                </a:rPr>
+                <a:t>Izhan Akhtar, 421009836</a:t>
+              </a:r>
+            </a:p>
+            <a:p>
+              <a:pPr algn="ctr"/>
+              <a:r>
+                <a:rPr lang="en-AE" sz="2800" dirty="0">
+                  <a:solidFill>
+                    <a:schemeClr val="bg1"/>
+                  </a:solidFill>
+                  <a:latin typeface="HK Grotesk" panose="020B0604020202020204" charset="0"/>
+                </a:rPr>
+                <a:t>Om Singh, 751006630</a:t>
+              </a:r>
+            </a:p>
+            <a:p>
+              <a:pPr algn="ctr"/>
+              <a:r>
+                <a:rPr lang="en-AE" sz="2800" dirty="0">
+                  <a:solidFill>
+                    <a:schemeClr val="bg1"/>
+                  </a:solidFill>
+                  <a:latin typeface="HK Grotesk" panose="020B0604020202020204" charset="0"/>
+                </a:rPr>
+                <a:t>Adil </a:t>
+              </a:r>
+              <a:r>
+                <a:rPr lang="en-AE" sz="2800" dirty="0" err="1">
+                  <a:solidFill>
+                    <a:schemeClr val="bg1"/>
+                  </a:solidFill>
+                  <a:latin typeface="HK Grotesk" panose="020B0604020202020204" charset="0"/>
+                </a:rPr>
+                <a:t>Nurmagambetov</a:t>
+              </a:r>
+              <a:r>
+                <a:rPr lang="en-AE" sz="2800" dirty="0">
+                  <a:solidFill>
+                    <a:schemeClr val="bg1"/>
+                  </a:solidFill>
+                  <a:latin typeface="HK Grotesk" panose="020B0604020202020204" charset="0"/>
+                </a:rPr>
+                <a:t>, 415002457</a:t>
+              </a:r>
+            </a:p>
+            <a:p>
+              <a:pPr marL="0" lvl="0" indent="0" algn="ctr">
+                <a:lnSpc>
+                  <a:spcPts val="3359"/>
+                </a:lnSpc>
+                <a:spcBef>
+                  <a:spcPct val="0"/>
+                </a:spcBef>
+              </a:pPr>
+              <a:endParaRPr lang="en-US" sz="2799" u="none" dirty="0">
+                <a:solidFill>
+                  <a:srgbClr val="F0F0F0"/>
+                </a:solidFill>
+                <a:latin typeface="HK Grotesk"/>
+                <a:ea typeface="HK Grotesk"/>
+                <a:cs typeface="HK Grotesk"/>
+                <a:sym typeface="HK Grotesk"/>
+              </a:endParaRPr>
             </a:p>
           </p:txBody>
         </p:sp>
         <p:sp>
           <p:nvSpPr>
-            <p:cNvPr name="TextBox 7" id="7"/>
-            <p:cNvSpPr txBox="true"/>
+            <p:cNvPr id="7" name="TextBox 7"/>
+            <p:cNvSpPr txBox="1"/>
             <p:nvPr/>
           </p:nvSpPr>
           <p:spPr>
-            <a:xfrm rot="0">
+            <a:xfrm>
               <a:off x="0" y="266700"/>
               <a:ext cx="10725902" cy="5097780"/>
             </a:xfrm>
@@ -3262,18 +3356,18 @@
             </a:prstGeom>
           </p:spPr>
           <p:txBody>
-            <a:bodyPr anchor="t" rtlCol="false" tIns="0" lIns="0" bIns="0" rIns="0">
+            <a:bodyPr lIns="0" tIns="0" rIns="0" bIns="0" rtlCol="0" anchor="t">
               <a:spAutoFit/>
             </a:bodyPr>
             <a:lstStyle/>
             <a:p>
-              <a:pPr algn="l" marL="0" indent="0" lvl="0">
+              <a:pPr marL="0" lvl="0" indent="0" algn="l">
                 <a:lnSpc>
                   <a:spcPts val="14400"/>
                 </a:lnSpc>
               </a:pPr>
               <a:r>
-                <a:rPr lang="en-US" sz="14400" spc="-288">
+                <a:rPr lang="en-US" sz="14400" spc="-288" dirty="0">
                   <a:solidFill>
                     <a:srgbClr val="F0F0F0"/>
                   </a:solidFill>
@@ -3290,7 +3384,7 @@
       </p:grpSp>
       <p:sp>
         <p:nvSpPr>
-          <p:cNvPr name="AutoShape 8" id="8"/>
+          <p:cNvPr id="8" name="AutoShape 8"/>
           <p:cNvSpPr/>
           <p:nvPr/>
         </p:nvSpPr>
@@ -3302,15 +3396,22 @@
           <a:prstGeom prst="line">
             <a:avLst/>
           </a:prstGeom>
-          <a:ln cap="flat" w="19050">
+          <a:ln w="19050" cap="flat">
             <a:solidFill>
               <a:srgbClr val="F0F0F0"/>
             </a:solidFill>
             <a:prstDash val="solid"/>
-            <a:headEnd type="none" len="sm" w="sm"/>
-            <a:tailEnd type="none" len="sm" w="sm"/>
+            <a:headEnd type="none" w="sm" len="sm"/>
+            <a:tailEnd type="none" w="sm" len="sm"/>
           </a:ln>
         </p:spPr>
+        <p:txBody>
+          <a:bodyPr/>
+          <a:lstStyle/>
+          <a:p>
+            <a:endParaRPr lang="en-AE"/>
+          </a:p>
+        </p:txBody>
       </p:sp>
     </p:spTree>
   </p:cSld>
@@ -3321,13 +3422,14 @@
 </file>
 
 <file path=ppt/slides/slide2.xml><?xml version="1.0" encoding="utf-8"?>
-<p:sld xmlns:p="http://schemas.openxmlformats.org/presentationml/2006/main" xmlns:a="http://schemas.openxmlformats.org/drawingml/2006/main">
+<p:sld xmlns:a="http://schemas.openxmlformats.org/drawingml/2006/main" xmlns:r="http://schemas.openxmlformats.org/officeDocument/2006/relationships" xmlns:p="http://schemas.openxmlformats.org/presentationml/2006/main">
   <p:cSld>
     <p:bg>
       <p:bgPr>
         <a:solidFill>
           <a:srgbClr val="1B2A48"/>
         </a:solidFill>
+        <a:effectLst/>
       </p:bgPr>
     </p:bg>
     <p:spTree>
@@ -3346,12 +3448,12 @@
       </p:grpSpPr>
       <p:sp>
         <p:nvSpPr>
-          <p:cNvPr name="TextBox 2" id="2"/>
-          <p:cNvSpPr txBox="true"/>
+          <p:cNvPr id="2" name="TextBox 2"/>
+          <p:cNvSpPr txBox="1"/>
           <p:nvPr/>
         </p:nvSpPr>
         <p:spPr>
-          <a:xfrm rot="0">
+          <a:xfrm>
             <a:off x="1028700" y="4219575"/>
             <a:ext cx="16954500" cy="838200"/>
           </a:xfrm>
@@ -3360,12 +3462,12 @@
           </a:prstGeom>
         </p:spPr>
         <p:txBody>
-          <a:bodyPr anchor="t" rtlCol="false" tIns="0" lIns="0" bIns="0" rIns="0">
+          <a:bodyPr lIns="0" tIns="0" rIns="0" bIns="0" rtlCol="0" anchor="t">
             <a:spAutoFit/>
           </a:bodyPr>
           <a:lstStyle/>
           <a:p>
-            <a:pPr algn="l" marL="604519" indent="-302260" lvl="1">
+            <a:pPr marL="604519" lvl="1" indent="-302260" algn="l">
               <a:lnSpc>
                 <a:spcPts val="3359"/>
               </a:lnSpc>
@@ -3373,7 +3475,7 @@
               <a:buChar char="•"/>
             </a:pPr>
             <a:r>
-              <a:rPr lang="en-US" b="true" sz="2799">
+              <a:rPr lang="en-US" sz="2799" b="1">
                 <a:solidFill>
                   <a:srgbClr val="F0F0F0"/>
                 </a:solidFill>
@@ -3385,7 +3487,7 @@
               <a:t>Formula 1 statistics and race data are spread ac</a:t>
             </a:r>
             <a:r>
-              <a:rPr lang="en-US" b="true" sz="2799" strike="noStrike" u="none">
+              <a:rPr lang="en-US" sz="2799" b="1" u="none" strike="noStrike">
                 <a:solidFill>
                   <a:srgbClr val="F0F0F0"/>
                 </a:solidFill>
@@ -3394,247 +3496,19 @@
                 <a:cs typeface="HK Grotesk Semi-Bold"/>
                 <a:sym typeface="HK Grotesk Semi-Bold"/>
               </a:rPr>
-              <a:t>r</a:t>
-            </a:r>
-            <a:r>
-              <a:rPr lang="en-US" b="true" sz="2799" strike="noStrike" u="none">
-                <a:solidFill>
-                  <a:srgbClr val="F0F0F0"/>
-                </a:solidFill>
-                <a:latin typeface="HK Grotesk Semi-Bold"/>
-                <a:ea typeface="HK Grotesk Semi-Bold"/>
-                <a:cs typeface="HK Grotesk Semi-Bold"/>
-                <a:sym typeface="HK Grotesk Semi-Bold"/>
-              </a:rPr>
-              <a:t>oss many d</a:t>
-            </a:r>
-            <a:r>
-              <a:rPr lang="en-US" b="true" sz="2799" strike="noStrike" u="none">
-                <a:solidFill>
-                  <a:srgbClr val="F0F0F0"/>
-                </a:solidFill>
-                <a:latin typeface="HK Grotesk Semi-Bold"/>
-                <a:ea typeface="HK Grotesk Semi-Bold"/>
-                <a:cs typeface="HK Grotesk Semi-Bold"/>
-                <a:sym typeface="HK Grotesk Semi-Bold"/>
-              </a:rPr>
-              <a:t>i</a:t>
-            </a:r>
-            <a:r>
-              <a:rPr lang="en-US" b="true" sz="2799" strike="noStrike" u="none">
-                <a:solidFill>
-                  <a:srgbClr val="F0F0F0"/>
-                </a:solidFill>
-                <a:latin typeface="HK Grotesk Semi-Bold"/>
-                <a:ea typeface="HK Grotesk Semi-Bold"/>
-                <a:cs typeface="HK Grotesk Semi-Bold"/>
-                <a:sym typeface="HK Grotesk Semi-Bold"/>
-              </a:rPr>
-              <a:t>ff</a:t>
-            </a:r>
-            <a:r>
-              <a:rPr lang="en-US" b="true" sz="2799" strike="noStrike" u="none">
-                <a:solidFill>
-                  <a:srgbClr val="F0F0F0"/>
-                </a:solidFill>
-                <a:latin typeface="HK Grotesk Semi-Bold"/>
-                <a:ea typeface="HK Grotesk Semi-Bold"/>
-                <a:cs typeface="HK Grotesk Semi-Bold"/>
-                <a:sym typeface="HK Grotesk Semi-Bold"/>
-              </a:rPr>
-              <a:t>er</a:t>
-            </a:r>
-            <a:r>
-              <a:rPr lang="en-US" b="true" sz="2799" strike="noStrike" u="none">
-                <a:solidFill>
-                  <a:srgbClr val="F0F0F0"/>
-                </a:solidFill>
-                <a:latin typeface="HK Grotesk Semi-Bold"/>
-                <a:ea typeface="HK Grotesk Semi-Bold"/>
-                <a:cs typeface="HK Grotesk Semi-Bold"/>
-                <a:sym typeface="HK Grotesk Semi-Bold"/>
-              </a:rPr>
-              <a:t>ent websites,</a:t>
-            </a:r>
-            <a:r>
-              <a:rPr lang="en-US" b="true" sz="2799" strike="noStrike" u="none">
-                <a:solidFill>
-                  <a:srgbClr val="F0F0F0"/>
-                </a:solidFill>
-                <a:latin typeface="HK Grotesk Semi-Bold"/>
-                <a:ea typeface="HK Grotesk Semi-Bold"/>
-                <a:cs typeface="HK Grotesk Semi-Bold"/>
-                <a:sym typeface="HK Grotesk Semi-Bold"/>
-              </a:rPr>
-              <a:t> </a:t>
-            </a:r>
-            <a:r>
-              <a:rPr lang="en-US" b="true" sz="2799" strike="noStrike" u="none">
-                <a:solidFill>
-                  <a:srgbClr val="F0F0F0"/>
-                </a:solidFill>
-                <a:latin typeface="HK Grotesk Semi-Bold"/>
-                <a:ea typeface="HK Grotesk Semi-Bold"/>
-                <a:cs typeface="HK Grotesk Semi-Bold"/>
-                <a:sym typeface="HK Grotesk Semi-Bold"/>
-              </a:rPr>
-              <a:t>making it difficul</a:t>
-            </a:r>
-            <a:r>
-              <a:rPr lang="en-US" b="true" sz="2799" strike="noStrike" u="none">
-                <a:solidFill>
-                  <a:srgbClr val="F0F0F0"/>
-                </a:solidFill>
-                <a:latin typeface="HK Grotesk Semi-Bold"/>
-                <a:ea typeface="HK Grotesk Semi-Bold"/>
-                <a:cs typeface="HK Grotesk Semi-Bold"/>
-                <a:sym typeface="HK Grotesk Semi-Bold"/>
-              </a:rPr>
-              <a:t>t</a:t>
-            </a:r>
-            <a:r>
-              <a:rPr lang="en-US" b="true" sz="2799" strike="noStrike" u="none">
-                <a:solidFill>
-                  <a:srgbClr val="F0F0F0"/>
-                </a:solidFill>
-                <a:latin typeface="HK Grotesk Semi-Bold"/>
-                <a:ea typeface="HK Grotesk Semi-Bold"/>
-                <a:cs typeface="HK Grotesk Semi-Bold"/>
-                <a:sym typeface="HK Grotesk Semi-Bold"/>
-              </a:rPr>
-              <a:t> for f</a:t>
-            </a:r>
-            <a:r>
-              <a:rPr lang="en-US" b="true" sz="2799" strike="noStrike" u="none">
-                <a:solidFill>
-                  <a:srgbClr val="F0F0F0"/>
-                </a:solidFill>
-                <a:latin typeface="HK Grotesk Semi-Bold"/>
-                <a:ea typeface="HK Grotesk Semi-Bold"/>
-                <a:cs typeface="HK Grotesk Semi-Bold"/>
-                <a:sym typeface="HK Grotesk Semi-Bold"/>
-              </a:rPr>
-              <a:t>an</a:t>
-            </a:r>
-            <a:r>
-              <a:rPr lang="en-US" b="true" sz="2799" strike="noStrike" u="none">
-                <a:solidFill>
-                  <a:srgbClr val="F0F0F0"/>
-                </a:solidFill>
-                <a:latin typeface="HK Grotesk Semi-Bold"/>
-                <a:ea typeface="HK Grotesk Semi-Bold"/>
-                <a:cs typeface="HK Grotesk Semi-Bold"/>
-                <a:sym typeface="HK Grotesk Semi-Bold"/>
-              </a:rPr>
-              <a:t>s to quickly fin</a:t>
-            </a:r>
-            <a:r>
-              <a:rPr lang="en-US" b="true" sz="2799" strike="noStrike" u="none">
-                <a:solidFill>
-                  <a:srgbClr val="F0F0F0"/>
-                </a:solidFill>
-                <a:latin typeface="HK Grotesk Semi-Bold"/>
-                <a:ea typeface="HK Grotesk Semi-Bold"/>
-                <a:cs typeface="HK Grotesk Semi-Bold"/>
-                <a:sym typeface="HK Grotesk Semi-Bold"/>
-              </a:rPr>
-              <a:t>d</a:t>
-            </a:r>
-            <a:r>
-              <a:rPr lang="en-US" b="true" sz="2799" strike="noStrike" u="none">
-                <a:solidFill>
-                  <a:srgbClr val="F0F0F0"/>
-                </a:solidFill>
-                <a:latin typeface="HK Grotesk Semi-Bold"/>
-                <a:ea typeface="HK Grotesk Semi-Bold"/>
-                <a:cs typeface="HK Grotesk Semi-Bold"/>
-                <a:sym typeface="HK Grotesk Semi-Bold"/>
-              </a:rPr>
-              <a:t> rel</a:t>
-            </a:r>
-            <a:r>
-              <a:rPr lang="en-US" b="true" sz="2799" strike="noStrike" u="none">
-                <a:solidFill>
-                  <a:srgbClr val="F0F0F0"/>
-                </a:solidFill>
-                <a:latin typeface="HK Grotesk Semi-Bold"/>
-                <a:ea typeface="HK Grotesk Semi-Bold"/>
-                <a:cs typeface="HK Grotesk Semi-Bold"/>
-                <a:sym typeface="HK Grotesk Semi-Bold"/>
-              </a:rPr>
-              <a:t>i</a:t>
-            </a:r>
-            <a:r>
-              <a:rPr lang="en-US" b="true" sz="2799" strike="noStrike" u="none">
-                <a:solidFill>
-                  <a:srgbClr val="F0F0F0"/>
-                </a:solidFill>
-                <a:latin typeface="HK Grotesk Semi-Bold"/>
-                <a:ea typeface="HK Grotesk Semi-Bold"/>
-                <a:cs typeface="HK Grotesk Semi-Bold"/>
-                <a:sym typeface="HK Grotesk Semi-Bold"/>
-              </a:rPr>
-              <a:t>able a</a:t>
-            </a:r>
-            <a:r>
-              <a:rPr lang="en-US" b="true" sz="2799" strike="noStrike" u="none">
-                <a:solidFill>
-                  <a:srgbClr val="F0F0F0"/>
-                </a:solidFill>
-                <a:latin typeface="HK Grotesk Semi-Bold"/>
-                <a:ea typeface="HK Grotesk Semi-Bold"/>
-                <a:cs typeface="HK Grotesk Semi-Bold"/>
-                <a:sym typeface="HK Grotesk Semi-Bold"/>
-              </a:rPr>
-              <a:t>n</a:t>
-            </a:r>
-            <a:r>
-              <a:rPr lang="en-US" b="true" sz="2799" strike="noStrike" u="none">
-                <a:solidFill>
-                  <a:srgbClr val="F0F0F0"/>
-                </a:solidFill>
-                <a:latin typeface="HK Grotesk Semi-Bold"/>
-                <a:ea typeface="HK Grotesk Semi-Bold"/>
-                <a:cs typeface="HK Grotesk Semi-Bold"/>
-                <a:sym typeface="HK Grotesk Semi-Bold"/>
-              </a:rPr>
-              <a:t>d or</a:t>
-            </a:r>
-            <a:r>
-              <a:rPr lang="en-US" b="true" sz="2799" strike="noStrike" u="none">
-                <a:solidFill>
-                  <a:srgbClr val="F0F0F0"/>
-                </a:solidFill>
-                <a:latin typeface="HK Grotesk Semi-Bold"/>
-                <a:ea typeface="HK Grotesk Semi-Bold"/>
-                <a:cs typeface="HK Grotesk Semi-Bold"/>
-                <a:sym typeface="HK Grotesk Semi-Bold"/>
-              </a:rPr>
-              <a:t>g</a:t>
-            </a:r>
-            <a:r>
-              <a:rPr lang="en-US" b="true" sz="2799" strike="noStrike" u="none">
-                <a:solidFill>
-                  <a:srgbClr val="F0F0F0"/>
-                </a:solidFill>
-                <a:latin typeface="HK Grotesk Semi-Bold"/>
-                <a:ea typeface="HK Grotesk Semi-Bold"/>
-                <a:cs typeface="HK Grotesk Semi-Bold"/>
-                <a:sym typeface="HK Grotesk Semi-Bold"/>
-              </a:rPr>
-              <a:t>anized information</a:t>
-            </a:r>
-          </a:p>
-        </p:txBody>
-      </p:sp>
-      <p:sp>
-        <p:nvSpPr>
-          <p:cNvPr name="TextBox 3" id="3"/>
-          <p:cNvSpPr txBox="true"/>
+              <a:t>ross many different websites, making it difficult for fans to quickly find reliable and organized information</a:t>
+            </a:r>
+          </a:p>
+        </p:txBody>
+      </p:sp>
+      <p:sp>
+        <p:nvSpPr>
+          <p:cNvPr id="3" name="TextBox 3"/>
+          <p:cNvSpPr txBox="1"/>
           <p:nvPr/>
         </p:nvSpPr>
         <p:spPr>
-          <a:xfrm rot="0">
+          <a:xfrm>
             <a:off x="1028700" y="5505450"/>
             <a:ext cx="16592550" cy="838200"/>
           </a:xfrm>
@@ -3643,12 +3517,12 @@
           </a:prstGeom>
         </p:spPr>
         <p:txBody>
-          <a:bodyPr anchor="t" rtlCol="false" tIns="0" lIns="0" bIns="0" rIns="0">
+          <a:bodyPr lIns="0" tIns="0" rIns="0" bIns="0" rtlCol="0" anchor="t">
             <a:spAutoFit/>
           </a:bodyPr>
           <a:lstStyle/>
           <a:p>
-            <a:pPr algn="l" marL="604519" indent="-302260" lvl="1">
+            <a:pPr marL="604519" lvl="1" indent="-302260" algn="l">
               <a:lnSpc>
                 <a:spcPts val="3359"/>
               </a:lnSpc>
@@ -3656,7 +3530,7 @@
               <a:buChar char="•"/>
             </a:pPr>
             <a:r>
-              <a:rPr lang="en-US" b="true" sz="2799">
+              <a:rPr lang="en-US" sz="2799" b="1">
                 <a:solidFill>
                   <a:srgbClr val="F0F0F0"/>
                 </a:solidFill>
@@ -3668,7 +3542,7 @@
               <a:t>Fans want a simpl</a:t>
             </a:r>
             <a:r>
-              <a:rPr lang="en-US" b="true" sz="2799" strike="noStrike" u="none">
+              <a:rPr lang="en-US" sz="2799" b="1" u="none" strike="noStrike">
                 <a:solidFill>
                   <a:srgbClr val="F0F0F0"/>
                 </a:solidFill>
@@ -3677,127 +3551,19 @@
                 <a:cs typeface="HK Grotesk Semi-Bold"/>
                 <a:sym typeface="HK Grotesk Semi-Bold"/>
               </a:rPr>
-              <a:t>e</a:t>
-            </a:r>
-            <a:r>
-              <a:rPr lang="en-US" b="true" sz="2799" strike="noStrike" u="none">
-                <a:solidFill>
-                  <a:srgbClr val="F0F0F0"/>
-                </a:solidFill>
-                <a:latin typeface="HK Grotesk Semi-Bold"/>
-                <a:ea typeface="HK Grotesk Semi-Bold"/>
-                <a:cs typeface="HK Grotesk Semi-Bold"/>
-                <a:sym typeface="HK Grotesk Semi-Bold"/>
-              </a:rPr>
-              <a:t>, centr</a:t>
-            </a:r>
-            <a:r>
-              <a:rPr lang="en-US" b="true" sz="2799" strike="noStrike" u="none">
-                <a:solidFill>
-                  <a:srgbClr val="F0F0F0"/>
-                </a:solidFill>
-                <a:latin typeface="HK Grotesk Semi-Bold"/>
-                <a:ea typeface="HK Grotesk Semi-Bold"/>
-                <a:cs typeface="HK Grotesk Semi-Bold"/>
-                <a:sym typeface="HK Grotesk Semi-Bold"/>
-              </a:rPr>
-              <a:t>a</a:t>
-            </a:r>
-            <a:r>
-              <a:rPr lang="en-US" b="true" sz="2799" strike="noStrike" u="none">
-                <a:solidFill>
-                  <a:srgbClr val="F0F0F0"/>
-                </a:solidFill>
-                <a:latin typeface="HK Grotesk Semi-Bold"/>
-                <a:ea typeface="HK Grotesk Semi-Bold"/>
-                <a:cs typeface="HK Grotesk Semi-Bold"/>
-                <a:sym typeface="HK Grotesk Semi-Bold"/>
-              </a:rPr>
-              <a:t>lized platfor</a:t>
-            </a:r>
-            <a:r>
-              <a:rPr lang="en-US" b="true" sz="2799" strike="noStrike" u="none">
-                <a:solidFill>
-                  <a:srgbClr val="F0F0F0"/>
-                </a:solidFill>
-                <a:latin typeface="HK Grotesk Semi-Bold"/>
-                <a:ea typeface="HK Grotesk Semi-Bold"/>
-                <a:cs typeface="HK Grotesk Semi-Bold"/>
-                <a:sym typeface="HK Grotesk Semi-Bold"/>
-              </a:rPr>
-              <a:t>m </a:t>
-            </a:r>
-            <a:r>
-              <a:rPr lang="en-US" b="true" sz="2799" strike="noStrike" u="none">
-                <a:solidFill>
-                  <a:srgbClr val="F0F0F0"/>
-                </a:solidFill>
-                <a:latin typeface="HK Grotesk Semi-Bold"/>
-                <a:ea typeface="HK Grotesk Semi-Bold"/>
-                <a:cs typeface="HK Grotesk Semi-Bold"/>
-                <a:sym typeface="HK Grotesk Semi-Bold"/>
-              </a:rPr>
-              <a:t>where they can view driver st</a:t>
-            </a:r>
-            <a:r>
-              <a:rPr lang="en-US" b="true" sz="2799" strike="noStrike" u="none">
-                <a:solidFill>
-                  <a:srgbClr val="F0F0F0"/>
-                </a:solidFill>
-                <a:latin typeface="HK Grotesk Semi-Bold"/>
-                <a:ea typeface="HK Grotesk Semi-Bold"/>
-                <a:cs typeface="HK Grotesk Semi-Bold"/>
-                <a:sym typeface="HK Grotesk Semi-Bold"/>
-              </a:rPr>
-              <a:t>an</a:t>
-            </a:r>
-            <a:r>
-              <a:rPr lang="en-US" b="true" sz="2799" strike="noStrike" u="none">
-                <a:solidFill>
-                  <a:srgbClr val="F0F0F0"/>
-                </a:solidFill>
-                <a:latin typeface="HK Grotesk Semi-Bold"/>
-                <a:ea typeface="HK Grotesk Semi-Bold"/>
-                <a:cs typeface="HK Grotesk Semi-Bold"/>
-                <a:sym typeface="HK Grotesk Semi-Bold"/>
-              </a:rPr>
-              <a:t>d</a:t>
-            </a:r>
-            <a:r>
-              <a:rPr lang="en-US" b="true" sz="2799" strike="noStrike" u="none">
-                <a:solidFill>
-                  <a:srgbClr val="F0F0F0"/>
-                </a:solidFill>
-                <a:latin typeface="HK Grotesk Semi-Bold"/>
-                <a:ea typeface="HK Grotesk Semi-Bold"/>
-                <a:cs typeface="HK Grotesk Semi-Bold"/>
-                <a:sym typeface="HK Grotesk Semi-Bold"/>
-              </a:rPr>
-              <a:t>ings</a:t>
-            </a:r>
-            <a:r>
-              <a:rPr lang="en-US" b="true" sz="2799" strike="noStrike" u="none">
-                <a:solidFill>
-                  <a:srgbClr val="F0F0F0"/>
-                </a:solidFill>
-                <a:latin typeface="HK Grotesk Semi-Bold"/>
-                <a:ea typeface="HK Grotesk Semi-Bold"/>
-                <a:cs typeface="HK Grotesk Semi-Bold"/>
-                <a:sym typeface="HK Grotesk Semi-Bold"/>
-              </a:rPr>
-              <a:t>, race results, and team performance in one place</a:t>
-            </a:r>
-          </a:p>
-        </p:txBody>
-      </p:sp>
-      <p:sp>
-        <p:nvSpPr>
-          <p:cNvPr name="TextBox 4" id="4"/>
-          <p:cNvSpPr txBox="true"/>
+              <a:t>e, centralized platform where they can view driver standings, race results, and team performance in one place</a:t>
+            </a:r>
+          </a:p>
+        </p:txBody>
+      </p:sp>
+      <p:sp>
+        <p:nvSpPr>
+          <p:cNvPr id="4" name="TextBox 4"/>
+          <p:cNvSpPr txBox="1"/>
           <p:nvPr/>
         </p:nvSpPr>
         <p:spPr>
-          <a:xfrm rot="0">
+          <a:xfrm>
             <a:off x="1028700" y="6791325"/>
             <a:ext cx="16592550" cy="838200"/>
           </a:xfrm>
@@ -3806,12 +3572,12 @@
           </a:prstGeom>
         </p:spPr>
         <p:txBody>
-          <a:bodyPr anchor="t" rtlCol="false" tIns="0" lIns="0" bIns="0" rIns="0">
+          <a:bodyPr lIns="0" tIns="0" rIns="0" bIns="0" rtlCol="0" anchor="t">
             <a:spAutoFit/>
           </a:bodyPr>
           <a:lstStyle/>
           <a:p>
-            <a:pPr algn="l" marL="604519" indent="-302260" lvl="1">
+            <a:pPr marL="604519" lvl="1" indent="-302260" algn="l">
               <a:lnSpc>
                 <a:spcPts val="3359"/>
               </a:lnSpc>
@@ -3819,7 +3585,7 @@
               <a:buChar char="•"/>
             </a:pPr>
             <a:r>
-              <a:rPr lang="en-US" b="true" sz="2799">
+              <a:rPr lang="en-US" sz="2799" b="1">
                 <a:solidFill>
                   <a:srgbClr val="F0F0F0"/>
                 </a:solidFill>
@@ -3831,7 +3597,7 @@
               <a:t>Our </a:t>
             </a:r>
             <a:r>
-              <a:rPr lang="en-US" b="true" sz="2799" strike="noStrike" u="none">
+              <a:rPr lang="en-US" sz="2799" b="1" u="none" strike="noStrike">
                 <a:solidFill>
                   <a:srgbClr val="F0F0F0"/>
                 </a:solidFill>
@@ -3840,235 +3606,19 @@
                 <a:cs typeface="HK Grotesk Semi-Bold"/>
                 <a:sym typeface="HK Grotesk Semi-Bold"/>
               </a:rPr>
-              <a:t>a</a:t>
-            </a:r>
-            <a:r>
-              <a:rPr lang="en-US" b="true" sz="2799" strike="noStrike" u="none">
-                <a:solidFill>
-                  <a:srgbClr val="F0F0F0"/>
-                </a:solidFill>
-                <a:latin typeface="HK Grotesk Semi-Bold"/>
-                <a:ea typeface="HK Grotesk Semi-Bold"/>
-                <a:cs typeface="HK Grotesk Semi-Bold"/>
-                <a:sym typeface="HK Grotesk Semi-Bold"/>
-              </a:rPr>
-              <a:t>ppli</a:t>
-            </a:r>
-            <a:r>
-              <a:rPr lang="en-US" b="true" sz="2799" strike="noStrike" u="none">
-                <a:solidFill>
-                  <a:srgbClr val="F0F0F0"/>
-                </a:solidFill>
-                <a:latin typeface="HK Grotesk Semi-Bold"/>
-                <a:ea typeface="HK Grotesk Semi-Bold"/>
-                <a:cs typeface="HK Grotesk Semi-Bold"/>
-                <a:sym typeface="HK Grotesk Semi-Bold"/>
-              </a:rPr>
-              <a:t>c</a:t>
-            </a:r>
-            <a:r>
-              <a:rPr lang="en-US" b="true" sz="2799" strike="noStrike" u="none">
-                <a:solidFill>
-                  <a:srgbClr val="F0F0F0"/>
-                </a:solidFill>
-                <a:latin typeface="HK Grotesk Semi-Bold"/>
-                <a:ea typeface="HK Grotesk Semi-Bold"/>
-                <a:cs typeface="HK Grotesk Semi-Bold"/>
-                <a:sym typeface="HK Grotesk Semi-Bold"/>
-              </a:rPr>
-              <a:t>ation solv</a:t>
-            </a:r>
-            <a:r>
-              <a:rPr lang="en-US" b="true" sz="2799" strike="noStrike" u="none">
-                <a:solidFill>
-                  <a:srgbClr val="F0F0F0"/>
-                </a:solidFill>
-                <a:latin typeface="HK Grotesk Semi-Bold"/>
-                <a:ea typeface="HK Grotesk Semi-Bold"/>
-                <a:cs typeface="HK Grotesk Semi-Bold"/>
-                <a:sym typeface="HK Grotesk Semi-Bold"/>
-              </a:rPr>
-              <a:t>e</a:t>
-            </a:r>
-            <a:r>
-              <a:rPr lang="en-US" b="true" sz="2799" strike="noStrike" u="none">
-                <a:solidFill>
-                  <a:srgbClr val="F0F0F0"/>
-                </a:solidFill>
-                <a:latin typeface="HK Grotesk Semi-Bold"/>
-                <a:ea typeface="HK Grotesk Semi-Bold"/>
-                <a:cs typeface="HK Grotesk Semi-Bold"/>
-                <a:sym typeface="HK Grotesk Semi-Bold"/>
-              </a:rPr>
-              <a:t>s</a:t>
-            </a:r>
-            <a:r>
-              <a:rPr lang="en-US" b="true" sz="2799" strike="noStrike" u="none">
-                <a:solidFill>
-                  <a:srgbClr val="F0F0F0"/>
-                </a:solidFill>
-                <a:latin typeface="HK Grotesk Semi-Bold"/>
-                <a:ea typeface="HK Grotesk Semi-Bold"/>
-                <a:cs typeface="HK Grotesk Semi-Bold"/>
-                <a:sym typeface="HK Grotesk Semi-Bold"/>
-              </a:rPr>
-              <a:t> </a:t>
-            </a:r>
-            <a:r>
-              <a:rPr lang="en-US" b="true" sz="2799" strike="noStrike" u="none">
-                <a:solidFill>
-                  <a:srgbClr val="F0F0F0"/>
-                </a:solidFill>
-                <a:latin typeface="HK Grotesk Semi-Bold"/>
-                <a:ea typeface="HK Grotesk Semi-Bold"/>
-                <a:cs typeface="HK Grotesk Semi-Bold"/>
-                <a:sym typeface="HK Grotesk Semi-Bold"/>
-              </a:rPr>
-              <a:t>this by storing structur</a:t>
-            </a:r>
-            <a:r>
-              <a:rPr lang="en-US" b="true" sz="2799" strike="noStrike" u="none">
-                <a:solidFill>
-                  <a:srgbClr val="F0F0F0"/>
-                </a:solidFill>
-                <a:latin typeface="HK Grotesk Semi-Bold"/>
-                <a:ea typeface="HK Grotesk Semi-Bold"/>
-                <a:cs typeface="HK Grotesk Semi-Bold"/>
-                <a:sym typeface="HK Grotesk Semi-Bold"/>
-              </a:rPr>
-              <a:t>e</a:t>
-            </a:r>
-            <a:r>
-              <a:rPr lang="en-US" b="true" sz="2799" strike="noStrike" u="none">
-                <a:solidFill>
-                  <a:srgbClr val="F0F0F0"/>
-                </a:solidFill>
-                <a:latin typeface="HK Grotesk Semi-Bold"/>
-                <a:ea typeface="HK Grotesk Semi-Bold"/>
-                <a:cs typeface="HK Grotesk Semi-Bold"/>
-                <a:sym typeface="HK Grotesk Semi-Bold"/>
-              </a:rPr>
-              <a:t>d Formula 1 data in a databa</a:t>
-            </a:r>
-            <a:r>
-              <a:rPr lang="en-US" b="true" sz="2799" strike="noStrike" u="none">
-                <a:solidFill>
-                  <a:srgbClr val="F0F0F0"/>
-                </a:solidFill>
-                <a:latin typeface="HK Grotesk Semi-Bold"/>
-                <a:ea typeface="HK Grotesk Semi-Bold"/>
-                <a:cs typeface="HK Grotesk Semi-Bold"/>
-                <a:sym typeface="HK Grotesk Semi-Bold"/>
-              </a:rPr>
-              <a:t>s</a:t>
-            </a:r>
-            <a:r>
-              <a:rPr lang="en-US" b="true" sz="2799" strike="noStrike" u="none">
-                <a:solidFill>
-                  <a:srgbClr val="F0F0F0"/>
-                </a:solidFill>
-                <a:latin typeface="HK Grotesk Semi-Bold"/>
-                <a:ea typeface="HK Grotesk Semi-Bold"/>
-                <a:cs typeface="HK Grotesk Semi-Bold"/>
-                <a:sym typeface="HK Grotesk Semi-Bold"/>
-              </a:rPr>
-              <a:t>e and presenting it thro</a:t>
-            </a:r>
-            <a:r>
-              <a:rPr lang="en-US" b="true" sz="2799" strike="noStrike" u="none">
-                <a:solidFill>
-                  <a:srgbClr val="F0F0F0"/>
-                </a:solidFill>
-                <a:latin typeface="HK Grotesk Semi-Bold"/>
-                <a:ea typeface="HK Grotesk Semi-Bold"/>
-                <a:cs typeface="HK Grotesk Semi-Bold"/>
-                <a:sym typeface="HK Grotesk Semi-Bold"/>
-              </a:rPr>
-              <a:t>u</a:t>
-            </a:r>
-            <a:r>
-              <a:rPr lang="en-US" b="true" sz="2799" strike="noStrike" u="none">
-                <a:solidFill>
-                  <a:srgbClr val="F0F0F0"/>
-                </a:solidFill>
-                <a:latin typeface="HK Grotesk Semi-Bold"/>
-                <a:ea typeface="HK Grotesk Semi-Bold"/>
-                <a:cs typeface="HK Grotesk Semi-Bold"/>
-                <a:sym typeface="HK Grotesk Semi-Bold"/>
-              </a:rPr>
-              <a:t>gh c</a:t>
-            </a:r>
-            <a:r>
-              <a:rPr lang="en-US" b="true" sz="2799" strike="noStrike" u="none">
-                <a:solidFill>
-                  <a:srgbClr val="F0F0F0"/>
-                </a:solidFill>
-                <a:latin typeface="HK Grotesk Semi-Bold"/>
-                <a:ea typeface="HK Grotesk Semi-Bold"/>
-                <a:cs typeface="HK Grotesk Semi-Bold"/>
-                <a:sym typeface="HK Grotesk Semi-Bold"/>
-              </a:rPr>
-              <a:t>l</a:t>
-            </a:r>
-            <a:r>
-              <a:rPr lang="en-US" b="true" sz="2799" strike="noStrike" u="none">
-                <a:solidFill>
-                  <a:srgbClr val="F0F0F0"/>
-                </a:solidFill>
-                <a:latin typeface="HK Grotesk Semi-Bold"/>
-                <a:ea typeface="HK Grotesk Semi-Bold"/>
-                <a:cs typeface="HK Grotesk Semi-Bold"/>
-                <a:sym typeface="HK Grotesk Semi-Bold"/>
-              </a:rPr>
-              <a:t>ean </a:t>
-            </a:r>
-            <a:r>
-              <a:rPr lang="en-US" b="true" sz="2799" strike="noStrike" u="none">
-                <a:solidFill>
-                  <a:srgbClr val="F0F0F0"/>
-                </a:solidFill>
-                <a:latin typeface="HK Grotesk Semi-Bold"/>
-                <a:ea typeface="HK Grotesk Semi-Bold"/>
-                <a:cs typeface="HK Grotesk Semi-Bold"/>
-                <a:sym typeface="HK Grotesk Semi-Bold"/>
-              </a:rPr>
-              <a:t>t</a:t>
-            </a:r>
-            <a:r>
-              <a:rPr lang="en-US" b="true" sz="2799" strike="noStrike" u="none">
-                <a:solidFill>
-                  <a:srgbClr val="F0F0F0"/>
-                </a:solidFill>
-                <a:latin typeface="HK Grotesk Semi-Bold"/>
-                <a:ea typeface="HK Grotesk Semi-Bold"/>
-                <a:cs typeface="HK Grotesk Semi-Bold"/>
-                <a:sym typeface="HK Grotesk Semi-Bold"/>
-              </a:rPr>
-              <a:t>ables and dashboard</a:t>
-            </a:r>
-            <a:r>
-              <a:rPr lang="en-US" b="true" sz="2799" strike="noStrike" u="none">
-                <a:solidFill>
-                  <a:srgbClr val="F0F0F0"/>
-                </a:solidFill>
-                <a:latin typeface="HK Grotesk Semi-Bold"/>
-                <a:ea typeface="HK Grotesk Semi-Bold"/>
-                <a:cs typeface="HK Grotesk Semi-Bold"/>
-                <a:sym typeface="HK Grotesk Semi-Bold"/>
-              </a:rPr>
-              <a:t>s</a:t>
+              <a:t>application solves this by storing structured Formula 1 data in a database and presenting it through clean tables and dashboards</a:t>
             </a:r>
           </a:p>
         </p:txBody>
       </p:sp>
       <p:grpSp>
         <p:nvGrpSpPr>
-          <p:cNvPr name="Group 5" id="5"/>
+          <p:cNvPr id="5" name="Group 5"/>
           <p:cNvGrpSpPr/>
           <p:nvPr/>
         </p:nvGrpSpPr>
         <p:grpSpPr>
-          <a:xfrm rot="0">
+          <a:xfrm>
             <a:off x="666750" y="1562100"/>
             <a:ext cx="16954500" cy="2209800"/>
             <a:chOff x="0" y="0"/>
@@ -4077,12 +3627,12 @@
         </p:grpSpPr>
         <p:sp>
           <p:nvSpPr>
-            <p:cNvPr name="TextBox 6" id="6"/>
-            <p:cNvSpPr txBox="true"/>
+            <p:cNvPr id="6" name="TextBox 6"/>
+            <p:cNvSpPr txBox="1"/>
             <p:nvPr/>
           </p:nvSpPr>
           <p:spPr>
-            <a:xfrm rot="0">
+            <a:xfrm>
               <a:off x="0" y="180975"/>
               <a:ext cx="22606000" cy="1769745"/>
             </a:xfrm>
@@ -4091,12 +3641,12 @@
             </a:prstGeom>
           </p:spPr>
           <p:txBody>
-            <a:bodyPr anchor="t" rtlCol="false" tIns="0" lIns="0" bIns="0" rIns="0">
+            <a:bodyPr lIns="0" tIns="0" rIns="0" bIns="0" rtlCol="0" anchor="t">
               <a:spAutoFit/>
             </a:bodyPr>
             <a:lstStyle/>
             <a:p>
-              <a:pPr algn="l" marL="0" indent="0" lvl="0">
+              <a:pPr marL="0" lvl="0" indent="0" algn="l">
                 <a:lnSpc>
                   <a:spcPts val="9600"/>
                 </a:lnSpc>
@@ -4118,12 +3668,12 @@
         </p:sp>
         <p:sp>
           <p:nvSpPr>
-            <p:cNvPr name="TextBox 7" id="7"/>
-            <p:cNvSpPr txBox="true"/>
+            <p:cNvPr id="7" name="TextBox 7"/>
+            <p:cNvSpPr txBox="1"/>
             <p:nvPr/>
           </p:nvSpPr>
           <p:spPr>
-            <a:xfrm rot="0">
+            <a:xfrm>
               <a:off x="0" y="2387600"/>
               <a:ext cx="22606000" cy="558800"/>
             </a:xfrm>
@@ -4132,18 +3682,18 @@
             </a:prstGeom>
           </p:spPr>
           <p:txBody>
-            <a:bodyPr anchor="t" rtlCol="false" tIns="0" lIns="0" bIns="0" rIns="0">
+            <a:bodyPr lIns="0" tIns="0" rIns="0" bIns="0" rtlCol="0" anchor="t">
               <a:spAutoFit/>
             </a:bodyPr>
             <a:lstStyle/>
             <a:p>
-              <a:pPr algn="l" marL="0" indent="0" lvl="0">
+              <a:pPr marL="0" lvl="0" indent="0" algn="l">
                 <a:lnSpc>
                   <a:spcPts val="3359"/>
                 </a:lnSpc>
               </a:pPr>
               <a:r>
-                <a:rPr lang="en-US" b="true" sz="2799">
+                <a:rPr lang="en-US" sz="2799" b="1">
                   <a:solidFill>
                     <a:srgbClr val="F0F0F0"/>
                   </a:solidFill>
@@ -4155,7 +3705,7 @@
                 <a:t>Intuitive Formula 1 Sta</a:t>
               </a:r>
               <a:r>
-                <a:rPr lang="en-US" b="true" sz="2799" strike="noStrike" u="none">
+                <a:rPr lang="en-US" sz="2799" b="1" u="none" strike="noStrike">
                   <a:solidFill>
                     <a:srgbClr val="F0F0F0"/>
                   </a:solidFill>
@@ -4172,7 +3722,7 @@
       </p:grpSp>
       <p:sp>
         <p:nvSpPr>
-          <p:cNvPr name="AutoShape 8" id="8"/>
+          <p:cNvPr id="8" name="AutoShape 8"/>
           <p:cNvSpPr/>
           <p:nvPr/>
         </p:nvSpPr>
@@ -4184,19 +3734,26 @@
           <a:prstGeom prst="line">
             <a:avLst/>
           </a:prstGeom>
-          <a:ln cap="flat" w="19050">
+          <a:ln w="19050" cap="flat">
             <a:solidFill>
               <a:srgbClr val="F0F0F0"/>
             </a:solidFill>
             <a:prstDash val="solid"/>
-            <a:headEnd type="none" len="sm" w="sm"/>
-            <a:tailEnd type="none" len="sm" w="sm"/>
+            <a:headEnd type="none" w="sm" len="sm"/>
+            <a:tailEnd type="none" w="sm" len="sm"/>
           </a:ln>
         </p:spPr>
-      </p:sp>
-      <p:sp>
-        <p:nvSpPr>
-          <p:cNvPr name="AutoShape 9" id="9"/>
+        <p:txBody>
+          <a:bodyPr/>
+          <a:lstStyle/>
+          <a:p>
+            <a:endParaRPr lang="en-AE"/>
+          </a:p>
+        </p:txBody>
+      </p:sp>
+      <p:sp>
+        <p:nvSpPr>
+          <p:cNvPr id="9" name="AutoShape 9"/>
           <p:cNvSpPr/>
           <p:nvPr/>
         </p:nvSpPr>
@@ -4208,24 +3765,31 @@
           <a:prstGeom prst="line">
             <a:avLst/>
           </a:prstGeom>
-          <a:ln cap="flat" w="19050">
+          <a:ln w="19050" cap="flat">
             <a:solidFill>
               <a:srgbClr val="F0F0F0"/>
             </a:solidFill>
             <a:prstDash val="solid"/>
-            <a:headEnd type="none" len="sm" w="sm"/>
-            <a:tailEnd type="none" len="sm" w="sm"/>
+            <a:headEnd type="none" w="sm" len="sm"/>
+            <a:tailEnd type="none" w="sm" len="sm"/>
           </a:ln>
         </p:spPr>
-      </p:sp>
-      <p:sp>
-        <p:nvSpPr>
-          <p:cNvPr name="TextBox 10" id="10"/>
-          <p:cNvSpPr txBox="true"/>
+        <p:txBody>
+          <a:bodyPr/>
+          <a:lstStyle/>
+          <a:p>
+            <a:endParaRPr lang="en-AE"/>
+          </a:p>
+        </p:txBody>
+      </p:sp>
+      <p:sp>
+        <p:nvSpPr>
+          <p:cNvPr id="10" name="TextBox 10"/>
+          <p:cNvSpPr txBox="1"/>
           <p:nvPr/>
         </p:nvSpPr>
         <p:spPr>
-          <a:xfrm rot="0">
+          <a:xfrm>
             <a:off x="1028700" y="8077200"/>
             <a:ext cx="16592550" cy="419100"/>
           </a:xfrm>
@@ -4234,12 +3798,12 @@
           </a:prstGeom>
         </p:spPr>
         <p:txBody>
-          <a:bodyPr anchor="t" rtlCol="false" tIns="0" lIns="0" bIns="0" rIns="0">
+          <a:bodyPr lIns="0" tIns="0" rIns="0" bIns="0" rtlCol="0" anchor="t">
             <a:spAutoFit/>
           </a:bodyPr>
           <a:lstStyle/>
           <a:p>
-            <a:pPr algn="l" marL="604519" indent="-302260" lvl="1">
+            <a:pPr marL="604519" lvl="1" indent="-302260" algn="l">
               <a:lnSpc>
                 <a:spcPts val="3359"/>
               </a:lnSpc>
@@ -4247,7 +3811,7 @@
               <a:buChar char="•"/>
             </a:pPr>
             <a:r>
-              <a:rPr lang="en-US" b="true" sz="2799">
+              <a:rPr lang="en-US" sz="2799" b="1">
                 <a:solidFill>
                   <a:srgbClr val="F0F0F0"/>
                 </a:solidFill>
@@ -4259,7 +3823,7 @@
               <a:t>The system fo</a:t>
             </a:r>
             <a:r>
-              <a:rPr lang="en-US" b="true" sz="2799" strike="noStrike" u="none">
+              <a:rPr lang="en-US" sz="2799" b="1" u="none" strike="noStrike">
                 <a:solidFill>
                   <a:srgbClr val="F0F0F0"/>
                 </a:solidFill>
@@ -4268,199 +3832,7 @@
                 <a:cs typeface="HK Grotesk Semi-Bold"/>
                 <a:sym typeface="HK Grotesk Semi-Bold"/>
               </a:rPr>
-              <a:t>c</a:t>
-            </a:r>
-            <a:r>
-              <a:rPr lang="en-US" b="true" sz="2799" strike="noStrike" u="none">
-                <a:solidFill>
-                  <a:srgbClr val="F0F0F0"/>
-                </a:solidFill>
-                <a:latin typeface="HK Grotesk Semi-Bold"/>
-                <a:ea typeface="HK Grotesk Semi-Bold"/>
-                <a:cs typeface="HK Grotesk Semi-Bold"/>
-                <a:sym typeface="HK Grotesk Semi-Bold"/>
-              </a:rPr>
-              <a:t>us</a:t>
-            </a:r>
-            <a:r>
-              <a:rPr lang="en-US" b="true" sz="2799" strike="noStrike" u="none">
-                <a:solidFill>
-                  <a:srgbClr val="F0F0F0"/>
-                </a:solidFill>
-                <a:latin typeface="HK Grotesk Semi-Bold"/>
-                <a:ea typeface="HK Grotesk Semi-Bold"/>
-                <a:cs typeface="HK Grotesk Semi-Bold"/>
-                <a:sym typeface="HK Grotesk Semi-Bold"/>
-              </a:rPr>
-              <a:t>e</a:t>
-            </a:r>
-            <a:r>
-              <a:rPr lang="en-US" b="true" sz="2799" strike="noStrike" u="none">
-                <a:solidFill>
-                  <a:srgbClr val="F0F0F0"/>
-                </a:solidFill>
-                <a:latin typeface="HK Grotesk Semi-Bold"/>
-                <a:ea typeface="HK Grotesk Semi-Bold"/>
-                <a:cs typeface="HK Grotesk Semi-Bold"/>
-                <a:sym typeface="HK Grotesk Semi-Bold"/>
-              </a:rPr>
-              <a:t>s</a:t>
-            </a:r>
-            <a:r>
-              <a:rPr lang="en-US" b="true" sz="2799" strike="noStrike" u="none">
-                <a:solidFill>
-                  <a:srgbClr val="F0F0F0"/>
-                </a:solidFill>
-                <a:latin typeface="HK Grotesk Semi-Bold"/>
-                <a:ea typeface="HK Grotesk Semi-Bold"/>
-                <a:cs typeface="HK Grotesk Semi-Bold"/>
-                <a:sym typeface="HK Grotesk Semi-Bold"/>
-              </a:rPr>
-              <a:t> </a:t>
-            </a:r>
-            <a:r>
-              <a:rPr lang="en-US" b="true" sz="2799" strike="noStrike" u="none">
-                <a:solidFill>
-                  <a:srgbClr val="F0F0F0"/>
-                </a:solidFill>
-                <a:latin typeface="HK Grotesk Semi-Bold"/>
-                <a:ea typeface="HK Grotesk Semi-Bold"/>
-                <a:cs typeface="HK Grotesk Semi-Bold"/>
-                <a:sym typeface="HK Grotesk Semi-Bold"/>
-              </a:rPr>
-              <a:t>on clarity, </a:t>
-            </a:r>
-            <a:r>
-              <a:rPr lang="en-US" b="true" sz="2799" strike="noStrike" u="none">
-                <a:solidFill>
-                  <a:srgbClr val="F0F0F0"/>
-                </a:solidFill>
-                <a:latin typeface="HK Grotesk Semi-Bold"/>
-                <a:ea typeface="HK Grotesk Semi-Bold"/>
-                <a:cs typeface="HK Grotesk Semi-Bold"/>
-                <a:sym typeface="HK Grotesk Semi-Bold"/>
-              </a:rPr>
-              <a:t>e</a:t>
-            </a:r>
-            <a:r>
-              <a:rPr lang="en-US" b="true" sz="2799" strike="noStrike" u="none">
-                <a:solidFill>
-                  <a:srgbClr val="F0F0F0"/>
-                </a:solidFill>
-                <a:latin typeface="HK Grotesk Semi-Bold"/>
-                <a:ea typeface="HK Grotesk Semi-Bold"/>
-                <a:cs typeface="HK Grotesk Semi-Bold"/>
-                <a:sym typeface="HK Grotesk Semi-Bold"/>
-              </a:rPr>
-              <a:t>a</a:t>
-            </a:r>
-            <a:r>
-              <a:rPr lang="en-US" b="true" sz="2799" strike="noStrike" u="none">
-                <a:solidFill>
-                  <a:srgbClr val="F0F0F0"/>
-                </a:solidFill>
-                <a:latin typeface="HK Grotesk Semi-Bold"/>
-                <a:ea typeface="HK Grotesk Semi-Bold"/>
-                <a:cs typeface="HK Grotesk Semi-Bold"/>
-                <a:sym typeface="HK Grotesk Semi-Bold"/>
-              </a:rPr>
-              <a:t>s</a:t>
-            </a:r>
-            <a:r>
-              <a:rPr lang="en-US" b="true" sz="2799" strike="noStrike" u="none">
-                <a:solidFill>
-                  <a:srgbClr val="F0F0F0"/>
-                </a:solidFill>
-                <a:latin typeface="HK Grotesk Semi-Bold"/>
-                <a:ea typeface="HK Grotesk Semi-Bold"/>
-                <a:cs typeface="HK Grotesk Semi-Bold"/>
-                <a:sym typeface="HK Grotesk Semi-Bold"/>
-              </a:rPr>
-              <a:t>e of </a:t>
-            </a:r>
-            <a:r>
-              <a:rPr lang="en-US" b="true" sz="2799" strike="noStrike" u="none">
-                <a:solidFill>
-                  <a:srgbClr val="F0F0F0"/>
-                </a:solidFill>
-                <a:latin typeface="HK Grotesk Semi-Bold"/>
-                <a:ea typeface="HK Grotesk Semi-Bold"/>
-                <a:cs typeface="HK Grotesk Semi-Bold"/>
-                <a:sym typeface="HK Grotesk Semi-Bold"/>
-              </a:rPr>
-              <a:t>u</a:t>
-            </a:r>
-            <a:r>
-              <a:rPr lang="en-US" b="true" sz="2799" strike="noStrike" u="none">
-                <a:solidFill>
-                  <a:srgbClr val="F0F0F0"/>
-                </a:solidFill>
-                <a:latin typeface="HK Grotesk Semi-Bold"/>
-                <a:ea typeface="HK Grotesk Semi-Bold"/>
-                <a:cs typeface="HK Grotesk Semi-Bold"/>
-                <a:sym typeface="HK Grotesk Semi-Bold"/>
-              </a:rPr>
-              <a:t>se, and fast navigation rather than comp</a:t>
-            </a:r>
-            <a:r>
-              <a:rPr lang="en-US" b="true" sz="2799" strike="noStrike" u="none">
-                <a:solidFill>
-                  <a:srgbClr val="F0F0F0"/>
-                </a:solidFill>
-                <a:latin typeface="HK Grotesk Semi-Bold"/>
-                <a:ea typeface="HK Grotesk Semi-Bold"/>
-                <a:cs typeface="HK Grotesk Semi-Bold"/>
-                <a:sym typeface="HK Grotesk Semi-Bold"/>
-              </a:rPr>
-              <a:t>l</a:t>
-            </a:r>
-            <a:r>
-              <a:rPr lang="en-US" b="true" sz="2799" strike="noStrike" u="none">
-                <a:solidFill>
-                  <a:srgbClr val="F0F0F0"/>
-                </a:solidFill>
-                <a:latin typeface="HK Grotesk Semi-Bold"/>
-                <a:ea typeface="HK Grotesk Semi-Bold"/>
-                <a:cs typeface="HK Grotesk Semi-Bold"/>
-                <a:sym typeface="HK Grotesk Semi-Bold"/>
-              </a:rPr>
-              <a:t>ex analy</a:t>
-            </a:r>
-            <a:r>
-              <a:rPr lang="en-US" b="true" sz="2799" strike="noStrike" u="none">
-                <a:solidFill>
-                  <a:srgbClr val="F0F0F0"/>
-                </a:solidFill>
-                <a:latin typeface="HK Grotesk Semi-Bold"/>
-                <a:ea typeface="HK Grotesk Semi-Bold"/>
-                <a:cs typeface="HK Grotesk Semi-Bold"/>
-                <a:sym typeface="HK Grotesk Semi-Bold"/>
-              </a:rPr>
-              <a:t>t</a:t>
-            </a:r>
-            <a:r>
-              <a:rPr lang="en-US" b="true" sz="2799" strike="noStrike" u="none">
-                <a:solidFill>
-                  <a:srgbClr val="F0F0F0"/>
-                </a:solidFill>
-                <a:latin typeface="HK Grotesk Semi-Bold"/>
-                <a:ea typeface="HK Grotesk Semi-Bold"/>
-                <a:cs typeface="HK Grotesk Semi-Bold"/>
-                <a:sym typeface="HK Grotesk Semi-Bold"/>
-              </a:rPr>
-              <a:t>ic</a:t>
-            </a:r>
-            <a:r>
-              <a:rPr lang="en-US" b="true" sz="2799" strike="noStrike" u="none">
-                <a:solidFill>
-                  <a:srgbClr val="F0F0F0"/>
-                </a:solidFill>
-                <a:latin typeface="HK Grotesk Semi-Bold"/>
-                <a:ea typeface="HK Grotesk Semi-Bold"/>
-                <a:cs typeface="HK Grotesk Semi-Bold"/>
-                <a:sym typeface="HK Grotesk Semi-Bold"/>
-              </a:rPr>
-              <a:t>s</a:t>
+              <a:t>cuses on clarity, ease of use, and fast navigation rather than complex analytics</a:t>
             </a:r>
           </a:p>
         </p:txBody>
@@ -4474,13 +3846,14 @@
 </file>
 
 <file path=ppt/slides/slide3.xml><?xml version="1.0" encoding="utf-8"?>
-<p:sld xmlns:p="http://schemas.openxmlformats.org/presentationml/2006/main" xmlns:a="http://schemas.openxmlformats.org/drawingml/2006/main">
+<p:sld xmlns:a="http://schemas.openxmlformats.org/drawingml/2006/main" xmlns:r="http://schemas.openxmlformats.org/officeDocument/2006/relationships" xmlns:p="http://schemas.openxmlformats.org/presentationml/2006/main">
   <p:cSld>
     <p:bg>
       <p:bgPr>
         <a:solidFill>
           <a:srgbClr val="1B2A48"/>
         </a:solidFill>
+        <a:effectLst/>
       </p:bgPr>
     </p:bg>
     <p:spTree>
@@ -4499,12 +3872,12 @@
       </p:grpSpPr>
       <p:grpSp>
         <p:nvGrpSpPr>
-          <p:cNvPr name="Group 2" id="2"/>
+          <p:cNvPr id="2" name="Group 2"/>
           <p:cNvGrpSpPr/>
           <p:nvPr/>
         </p:nvGrpSpPr>
         <p:grpSpPr>
-          <a:xfrm rot="0">
+          <a:xfrm>
             <a:off x="666750" y="5172075"/>
             <a:ext cx="4010025" cy="3048000"/>
             <a:chOff x="0" y="0"/>
@@ -4513,12 +3886,12 @@
         </p:grpSpPr>
         <p:sp>
           <p:nvSpPr>
-            <p:cNvPr name="TextBox 3" id="3"/>
-            <p:cNvSpPr txBox="true"/>
+            <p:cNvPr id="3" name="TextBox 3"/>
+            <p:cNvSpPr txBox="1"/>
             <p:nvPr/>
           </p:nvSpPr>
           <p:spPr>
-            <a:xfrm rot="0">
+            <a:xfrm>
               <a:off x="0" y="0"/>
               <a:ext cx="5346700" cy="558800"/>
             </a:xfrm>
@@ -4527,12 +3900,12 @@
             </a:prstGeom>
           </p:spPr>
           <p:txBody>
-            <a:bodyPr anchor="t" rtlCol="false" tIns="0" lIns="0" bIns="0" rIns="0">
+            <a:bodyPr lIns="0" tIns="0" rIns="0" bIns="0" rtlCol="0" anchor="t">
               <a:spAutoFit/>
             </a:bodyPr>
             <a:lstStyle/>
             <a:p>
-              <a:pPr algn="l" marL="0" indent="0" lvl="0">
+              <a:pPr marL="0" lvl="0" indent="0" algn="l">
                 <a:lnSpc>
                   <a:spcPts val="3359"/>
                 </a:lnSpc>
@@ -4541,7 +3914,7 @@
                 </a:spcBef>
               </a:pPr>
               <a:r>
-                <a:rPr lang="en-US" b="true" sz="2799" strike="noStrike" u="none">
+                <a:rPr lang="en-US" sz="2799" b="1" u="none" strike="noStrike">
                   <a:solidFill>
                     <a:srgbClr val="F0F0F0"/>
                   </a:solidFill>
@@ -4557,12 +3930,12 @@
         </p:sp>
         <p:sp>
           <p:nvSpPr>
-            <p:cNvPr name="TextBox 4" id="4"/>
-            <p:cNvSpPr txBox="true"/>
+            <p:cNvPr id="4" name="TextBox 4"/>
+            <p:cNvSpPr txBox="1"/>
             <p:nvPr/>
           </p:nvSpPr>
           <p:spPr>
-            <a:xfrm rot="0">
+            <a:xfrm>
               <a:off x="0" y="1244600"/>
               <a:ext cx="5346700" cy="2819400"/>
             </a:xfrm>
@@ -4571,12 +3944,12 @@
             </a:prstGeom>
           </p:spPr>
           <p:txBody>
-            <a:bodyPr anchor="t" rtlCol="false" tIns="0" lIns="0" bIns="0" rIns="0">
+            <a:bodyPr lIns="0" tIns="0" rIns="0" bIns="0" rtlCol="0" anchor="t">
               <a:spAutoFit/>
             </a:bodyPr>
             <a:lstStyle/>
             <a:p>
-              <a:pPr algn="l" marL="0" indent="0" lvl="0">
+              <a:pPr marL="0" lvl="0" indent="0" algn="l">
                 <a:lnSpc>
                   <a:spcPts val="2844"/>
                 </a:lnSpc>
@@ -4585,7 +3958,7 @@
                 </a:spcBef>
               </a:pPr>
               <a:r>
-                <a:rPr lang="en-US" sz="2370" strike="noStrike" u="none">
+                <a:rPr lang="en-US" sz="2370" u="none" strike="noStrike">
                   <a:solidFill>
                     <a:srgbClr val="F0F0F0"/>
                   </a:solidFill>
@@ -4602,12 +3975,12 @@
       </p:grpSp>
       <p:grpSp>
         <p:nvGrpSpPr>
-          <p:cNvPr name="Group 5" id="5"/>
+          <p:cNvPr id="5" name="Group 5"/>
           <p:cNvGrpSpPr/>
           <p:nvPr/>
         </p:nvGrpSpPr>
         <p:grpSpPr>
-          <a:xfrm rot="0">
+          <a:xfrm>
             <a:off x="6419850" y="5172075"/>
             <a:ext cx="4010025" cy="3429000"/>
             <a:chOff x="0" y="0"/>
@@ -4616,12 +3989,12 @@
         </p:grpSpPr>
         <p:sp>
           <p:nvSpPr>
-            <p:cNvPr name="TextBox 6" id="6"/>
-            <p:cNvSpPr txBox="true"/>
+            <p:cNvPr id="6" name="TextBox 6"/>
+            <p:cNvSpPr txBox="1"/>
             <p:nvPr/>
           </p:nvSpPr>
           <p:spPr>
-            <a:xfrm rot="0">
+            <a:xfrm>
               <a:off x="0" y="0"/>
               <a:ext cx="5346700" cy="558800"/>
             </a:xfrm>
@@ -4630,12 +4003,12 @@
             </a:prstGeom>
           </p:spPr>
           <p:txBody>
-            <a:bodyPr anchor="t" rtlCol="false" tIns="0" lIns="0" bIns="0" rIns="0">
+            <a:bodyPr lIns="0" tIns="0" rIns="0" bIns="0" rtlCol="0" anchor="t">
               <a:spAutoFit/>
             </a:bodyPr>
             <a:lstStyle/>
             <a:p>
-              <a:pPr algn="l" marL="0" indent="0" lvl="0">
+              <a:pPr marL="0" lvl="0" indent="0" algn="l">
                 <a:lnSpc>
                   <a:spcPts val="3359"/>
                 </a:lnSpc>
@@ -4644,7 +4017,7 @@
                 </a:spcBef>
               </a:pPr>
               <a:r>
-                <a:rPr lang="en-US" b="true" sz="2799" strike="noStrike" u="none">
+                <a:rPr lang="en-US" sz="2799" b="1" u="none" strike="noStrike">
                   <a:solidFill>
                     <a:srgbClr val="F0F0F0"/>
                   </a:solidFill>
@@ -4660,12 +4033,12 @@
         </p:sp>
         <p:sp>
           <p:nvSpPr>
-            <p:cNvPr name="TextBox 7" id="7"/>
-            <p:cNvSpPr txBox="true"/>
+            <p:cNvPr id="7" name="TextBox 7"/>
+            <p:cNvSpPr txBox="1"/>
             <p:nvPr/>
           </p:nvSpPr>
           <p:spPr>
-            <a:xfrm rot="0">
+            <a:xfrm>
               <a:off x="0" y="1282700"/>
               <a:ext cx="5346700" cy="3289300"/>
             </a:xfrm>
@@ -4674,12 +4047,12 @@
             </a:prstGeom>
           </p:spPr>
           <p:txBody>
-            <a:bodyPr anchor="t" rtlCol="false" tIns="0" lIns="0" bIns="0" rIns="0">
+            <a:bodyPr lIns="0" tIns="0" rIns="0" bIns="0" rtlCol="0" anchor="t">
               <a:spAutoFit/>
             </a:bodyPr>
             <a:lstStyle/>
             <a:p>
-              <a:pPr algn="l" marL="0" indent="0" lvl="0">
+              <a:pPr marL="0" lvl="0" indent="0" algn="l">
                 <a:lnSpc>
                   <a:spcPts val="2844"/>
                 </a:lnSpc>
@@ -4688,7 +4061,7 @@
                 </a:spcBef>
               </a:pPr>
               <a:r>
-                <a:rPr lang="en-US" sz="2370" strike="noStrike" u="none">
+                <a:rPr lang="en-US" sz="2370" u="none" strike="noStrike">
                   <a:solidFill>
                     <a:srgbClr val="F0F0F0"/>
                   </a:solidFill>
@@ -4705,12 +4078,12 @@
       </p:grpSp>
       <p:grpSp>
         <p:nvGrpSpPr>
-          <p:cNvPr name="Group 8" id="8"/>
+          <p:cNvPr id="8" name="Group 8"/>
           <p:cNvGrpSpPr/>
           <p:nvPr/>
         </p:nvGrpSpPr>
         <p:grpSpPr>
-          <a:xfrm rot="0">
+          <a:xfrm>
             <a:off x="12172950" y="5143500"/>
             <a:ext cx="4010025" cy="3400425"/>
             <a:chOff x="0" y="0"/>
@@ -4719,12 +4092,12 @@
         </p:grpSpPr>
         <p:sp>
           <p:nvSpPr>
-            <p:cNvPr name="TextBox 9" id="9"/>
-            <p:cNvSpPr txBox="true"/>
+            <p:cNvPr id="9" name="TextBox 9"/>
+            <p:cNvSpPr txBox="1"/>
             <p:nvPr/>
           </p:nvSpPr>
           <p:spPr>
-            <a:xfrm rot="0">
+            <a:xfrm>
               <a:off x="0" y="0"/>
               <a:ext cx="5346700" cy="558800"/>
             </a:xfrm>
@@ -4733,12 +4106,12 @@
             </a:prstGeom>
           </p:spPr>
           <p:txBody>
-            <a:bodyPr anchor="t" rtlCol="false" tIns="0" lIns="0" bIns="0" rIns="0">
+            <a:bodyPr lIns="0" tIns="0" rIns="0" bIns="0" rtlCol="0" anchor="t">
               <a:spAutoFit/>
             </a:bodyPr>
             <a:lstStyle/>
             <a:p>
-              <a:pPr algn="l" marL="0" indent="0" lvl="0">
+              <a:pPr marL="0" lvl="0" indent="0" algn="l">
                 <a:lnSpc>
                   <a:spcPts val="3359"/>
                 </a:lnSpc>
@@ -4747,7 +4120,7 @@
                 </a:spcBef>
               </a:pPr>
               <a:r>
-                <a:rPr lang="en-US" b="true" sz="2799" strike="noStrike" u="none">
+                <a:rPr lang="en-US" sz="2799" b="1" u="none" strike="noStrike">
                   <a:solidFill>
                     <a:srgbClr val="F0F0F0"/>
                   </a:solidFill>
@@ -4763,12 +4136,12 @@
         </p:sp>
         <p:sp>
           <p:nvSpPr>
-            <p:cNvPr name="TextBox 10" id="10"/>
-            <p:cNvSpPr txBox="true"/>
+            <p:cNvPr id="10" name="TextBox 10"/>
+            <p:cNvSpPr txBox="1"/>
             <p:nvPr/>
           </p:nvSpPr>
           <p:spPr>
-            <a:xfrm rot="0">
+            <a:xfrm>
               <a:off x="0" y="1244600"/>
               <a:ext cx="5346700" cy="3289300"/>
             </a:xfrm>
@@ -4777,12 +4150,12 @@
             </a:prstGeom>
           </p:spPr>
           <p:txBody>
-            <a:bodyPr anchor="t" rtlCol="false" tIns="0" lIns="0" bIns="0" rIns="0">
+            <a:bodyPr lIns="0" tIns="0" rIns="0" bIns="0" rtlCol="0" anchor="t">
               <a:spAutoFit/>
             </a:bodyPr>
             <a:lstStyle/>
             <a:p>
-              <a:pPr algn="l" marL="0" indent="0" lvl="0">
+              <a:pPr marL="0" lvl="0" indent="0" algn="l">
                 <a:lnSpc>
                   <a:spcPts val="2844"/>
                 </a:lnSpc>
@@ -4791,7 +4164,7 @@
                 </a:spcBef>
               </a:pPr>
               <a:r>
-                <a:rPr lang="en-US" sz="2370" strike="noStrike" u="none">
+                <a:rPr lang="en-US" sz="2370" u="none" strike="noStrike">
                   <a:solidFill>
                     <a:srgbClr val="F0F0F0"/>
                   </a:solidFill>
@@ -4808,12 +4181,12 @@
       </p:grpSp>
       <p:grpSp>
         <p:nvGrpSpPr>
-          <p:cNvPr name="Group 11" id="11"/>
+          <p:cNvPr id="11" name="Group 11"/>
           <p:cNvGrpSpPr/>
           <p:nvPr/>
         </p:nvGrpSpPr>
         <p:grpSpPr>
-          <a:xfrm rot="0">
+          <a:xfrm>
             <a:off x="666750" y="1562100"/>
             <a:ext cx="16954500" cy="2209800"/>
             <a:chOff x="0" y="0"/>
@@ -4822,12 +4195,12 @@
         </p:grpSpPr>
         <p:sp>
           <p:nvSpPr>
-            <p:cNvPr name="TextBox 12" id="12"/>
-            <p:cNvSpPr txBox="true"/>
+            <p:cNvPr id="12" name="TextBox 12"/>
+            <p:cNvSpPr txBox="1"/>
             <p:nvPr/>
           </p:nvSpPr>
           <p:spPr>
-            <a:xfrm rot="0">
+            <a:xfrm>
               <a:off x="0" y="180975"/>
               <a:ext cx="22606000" cy="1769745"/>
             </a:xfrm>
@@ -4836,12 +4209,12 @@
             </a:prstGeom>
           </p:spPr>
           <p:txBody>
-            <a:bodyPr anchor="t" rtlCol="false" tIns="0" lIns="0" bIns="0" rIns="0">
+            <a:bodyPr lIns="0" tIns="0" rIns="0" bIns="0" rtlCol="0" anchor="t">
               <a:spAutoFit/>
             </a:bodyPr>
             <a:lstStyle/>
             <a:p>
-              <a:pPr algn="l" marL="0" indent="0" lvl="0">
+              <a:pPr marL="0" lvl="0" indent="0" algn="l">
                 <a:lnSpc>
                   <a:spcPts val="9600"/>
                 </a:lnSpc>
@@ -4863,12 +4236,12 @@
         </p:sp>
         <p:sp>
           <p:nvSpPr>
-            <p:cNvPr name="TextBox 13" id="13"/>
-            <p:cNvSpPr txBox="true"/>
+            <p:cNvPr id="13" name="TextBox 13"/>
+            <p:cNvSpPr txBox="1"/>
             <p:nvPr/>
           </p:nvSpPr>
           <p:spPr>
-            <a:xfrm rot="0">
+            <a:xfrm>
               <a:off x="0" y="2387600"/>
               <a:ext cx="22606000" cy="558800"/>
             </a:xfrm>
@@ -4877,18 +4250,18 @@
             </a:prstGeom>
           </p:spPr>
           <p:txBody>
-            <a:bodyPr anchor="t" rtlCol="false" tIns="0" lIns="0" bIns="0" rIns="0">
+            <a:bodyPr lIns="0" tIns="0" rIns="0" bIns="0" rtlCol="0" anchor="t">
               <a:spAutoFit/>
             </a:bodyPr>
             <a:lstStyle/>
             <a:p>
-              <a:pPr algn="l" marL="0" indent="0" lvl="0">
+              <a:pPr marL="0" lvl="0" indent="0" algn="l">
                 <a:lnSpc>
                   <a:spcPts val="3359"/>
                 </a:lnSpc>
               </a:pPr>
               <a:r>
-                <a:rPr lang="en-US" b="true" sz="2799">
+                <a:rPr lang="en-US" sz="2799" b="1">
                   <a:solidFill>
                     <a:srgbClr val="F0F0F0"/>
                   </a:solidFill>
@@ -4900,7 +4273,7 @@
                 <a:t>Wha</a:t>
               </a:r>
               <a:r>
-                <a:rPr lang="en-US" b="true" sz="2799" strike="noStrike" u="none">
+                <a:rPr lang="en-US" sz="2799" b="1" u="none" strike="noStrike">
                   <a:solidFill>
                     <a:srgbClr val="F0F0F0"/>
                   </a:solidFill>
@@ -4909,67 +4282,7 @@
                   <a:cs typeface="HK Grotesk Semi-Bold"/>
                   <a:sym typeface="HK Grotesk Semi-Bold"/>
                 </a:rPr>
-                <a:t>t</a:t>
-              </a:r>
-              <a:r>
-                <a:rPr lang="en-US" b="true" sz="2799" strike="noStrike" u="none">
-                  <a:solidFill>
-                    <a:srgbClr val="F0F0F0"/>
-                  </a:solidFill>
-                  <a:latin typeface="HK Grotesk Semi-Bold"/>
-                  <a:ea typeface="HK Grotesk Semi-Bold"/>
-                  <a:cs typeface="HK Grotesk Semi-Bold"/>
-                  <a:sym typeface="HK Grotesk Semi-Bold"/>
-                </a:rPr>
-                <a:t> </a:t>
-              </a:r>
-              <a:r>
-                <a:rPr lang="en-US" b="true" sz="2799" strike="noStrike" u="none">
-                  <a:solidFill>
-                    <a:srgbClr val="F0F0F0"/>
-                  </a:solidFill>
-                  <a:latin typeface="HK Grotesk Semi-Bold"/>
-                  <a:ea typeface="HK Grotesk Semi-Bold"/>
-                  <a:cs typeface="HK Grotesk Semi-Bold"/>
-                  <a:sym typeface="HK Grotesk Semi-Bold"/>
-                </a:rPr>
-                <a:t>t</a:t>
-              </a:r>
-              <a:r>
-                <a:rPr lang="en-US" b="true" sz="2799" strike="noStrike" u="none">
-                  <a:solidFill>
-                    <a:srgbClr val="F0F0F0"/>
-                  </a:solidFill>
-                  <a:latin typeface="HK Grotesk Semi-Bold"/>
-                  <a:ea typeface="HK Grotesk Semi-Bold"/>
-                  <a:cs typeface="HK Grotesk Semi-Bold"/>
-                  <a:sym typeface="HK Grotesk Semi-Bold"/>
-                </a:rPr>
-                <a:t>h</a:t>
-              </a:r>
-              <a:r>
-                <a:rPr lang="en-US" b="true" sz="2799" strike="noStrike" u="none">
-                  <a:solidFill>
-                    <a:srgbClr val="F0F0F0"/>
-                  </a:solidFill>
-                  <a:latin typeface="HK Grotesk Semi-Bold"/>
-                  <a:ea typeface="HK Grotesk Semi-Bold"/>
-                  <a:cs typeface="HK Grotesk Semi-Bold"/>
-                  <a:sym typeface="HK Grotesk Semi-Bold"/>
-                </a:rPr>
-                <a:t>e Platform</a:t>
-              </a:r>
-              <a:r>
-                <a:rPr lang="en-US" b="true" sz="2799" strike="noStrike" u="none">
-                  <a:solidFill>
-                    <a:srgbClr val="F0F0F0"/>
-                  </a:solidFill>
-                  <a:latin typeface="HK Grotesk Semi-Bold"/>
-                  <a:ea typeface="HK Grotesk Semi-Bold"/>
-                  <a:cs typeface="HK Grotesk Semi-Bold"/>
-                  <a:sym typeface="HK Grotesk Semi-Bold"/>
-                </a:rPr>
-                <a:t> Offers</a:t>
+                <a:t>t the Platform Offers</a:t>
               </a:r>
             </a:p>
           </p:txBody>
@@ -4977,7 +4290,7 @@
       </p:grpSp>
       <p:sp>
         <p:nvSpPr>
-          <p:cNvPr name="AutoShape 14" id="14"/>
+          <p:cNvPr id="14" name="AutoShape 14"/>
           <p:cNvSpPr/>
           <p:nvPr/>
         </p:nvSpPr>
@@ -4989,19 +4302,26 @@
           <a:prstGeom prst="line">
             <a:avLst/>
           </a:prstGeom>
-          <a:ln cap="flat" w="19050">
+          <a:ln w="19050" cap="flat">
             <a:solidFill>
               <a:srgbClr val="F0F0F0"/>
             </a:solidFill>
             <a:prstDash val="solid"/>
-            <a:headEnd type="none" len="sm" w="sm"/>
-            <a:tailEnd type="none" len="sm" w="sm"/>
+            <a:headEnd type="none" w="sm" len="sm"/>
+            <a:tailEnd type="none" w="sm" len="sm"/>
           </a:ln>
         </p:spPr>
-      </p:sp>
-      <p:sp>
-        <p:nvSpPr>
-          <p:cNvPr name="AutoShape 15" id="15"/>
+        <p:txBody>
+          <a:bodyPr/>
+          <a:lstStyle/>
+          <a:p>
+            <a:endParaRPr lang="en-AE"/>
+          </a:p>
+        </p:txBody>
+      </p:sp>
+      <p:sp>
+        <p:nvSpPr>
+          <p:cNvPr id="15" name="AutoShape 15"/>
           <p:cNvSpPr/>
           <p:nvPr/>
         </p:nvSpPr>
@@ -5013,15 +4333,22 @@
           <a:prstGeom prst="line">
             <a:avLst/>
           </a:prstGeom>
-          <a:ln cap="flat" w="19050">
+          <a:ln w="19050" cap="flat">
             <a:solidFill>
               <a:srgbClr val="F0F0F0"/>
             </a:solidFill>
             <a:prstDash val="solid"/>
-            <a:headEnd type="none" len="sm" w="sm"/>
-            <a:tailEnd type="none" len="sm" w="sm"/>
+            <a:headEnd type="none" w="sm" len="sm"/>
+            <a:tailEnd type="none" w="sm" len="sm"/>
           </a:ln>
         </p:spPr>
+        <p:txBody>
+          <a:bodyPr/>
+          <a:lstStyle/>
+          <a:p>
+            <a:endParaRPr lang="en-AE"/>
+          </a:p>
+        </p:txBody>
       </p:sp>
     </p:spTree>
   </p:cSld>
@@ -5032,13 +4359,14 @@
 </file>
 
 <file path=ppt/slides/slide4.xml><?xml version="1.0" encoding="utf-8"?>
-<p:sld xmlns:p="http://schemas.openxmlformats.org/presentationml/2006/main" xmlns:a="http://schemas.openxmlformats.org/drawingml/2006/main">
+<p:sld xmlns:a="http://schemas.openxmlformats.org/drawingml/2006/main" xmlns:r="http://schemas.openxmlformats.org/officeDocument/2006/relationships" xmlns:p="http://schemas.openxmlformats.org/presentationml/2006/main">
   <p:cSld>
     <p:bg>
       <p:bgPr>
         <a:solidFill>
           <a:srgbClr val="111520"/>
         </a:solidFill>
+        <a:effectLst/>
       </p:bgPr>
     </p:bg>
     <p:spTree>
@@ -5057,12 +4385,12 @@
       </p:grpSpPr>
       <p:grpSp>
         <p:nvGrpSpPr>
-          <p:cNvPr name="Group 2" id="2"/>
+          <p:cNvPr id="2" name="Group 2"/>
           <p:cNvGrpSpPr/>
           <p:nvPr/>
         </p:nvGrpSpPr>
         <p:grpSpPr>
-          <a:xfrm rot="0">
+          <a:xfrm>
             <a:off x="666750" y="5143500"/>
             <a:ext cx="4010025" cy="3333750"/>
             <a:chOff x="0" y="0"/>
@@ -5071,12 +4399,12 @@
         </p:grpSpPr>
         <p:sp>
           <p:nvSpPr>
-            <p:cNvPr name="TextBox 3" id="3"/>
-            <p:cNvSpPr txBox="true"/>
+            <p:cNvPr id="3" name="TextBox 3"/>
+            <p:cNvSpPr txBox="1"/>
             <p:nvPr/>
           </p:nvSpPr>
           <p:spPr>
-            <a:xfrm rot="0">
+            <a:xfrm>
               <a:off x="0" y="0"/>
               <a:ext cx="5346700" cy="558800"/>
             </a:xfrm>
@@ -5085,12 +4413,12 @@
             </a:prstGeom>
           </p:spPr>
           <p:txBody>
-            <a:bodyPr anchor="t" rtlCol="false" tIns="0" lIns="0" bIns="0" rIns="0">
+            <a:bodyPr lIns="0" tIns="0" rIns="0" bIns="0" rtlCol="0" anchor="t">
               <a:spAutoFit/>
             </a:bodyPr>
             <a:lstStyle/>
             <a:p>
-              <a:pPr algn="l" marL="0" indent="0" lvl="0">
+              <a:pPr marL="0" lvl="0" indent="0" algn="l">
                 <a:lnSpc>
                   <a:spcPts val="3359"/>
                 </a:lnSpc>
@@ -5099,7 +4427,7 @@
                 </a:spcBef>
               </a:pPr>
               <a:r>
-                <a:rPr lang="en-US" b="true" sz="2799" strike="noStrike" u="none">
+                <a:rPr lang="en-US" sz="2799" b="1" u="none" strike="noStrike">
                   <a:solidFill>
                     <a:srgbClr val="F0F0F0"/>
                   </a:solidFill>
@@ -5115,12 +4443,12 @@
         </p:sp>
         <p:sp>
           <p:nvSpPr>
-            <p:cNvPr name="TextBox 4" id="4"/>
-            <p:cNvSpPr txBox="true"/>
+            <p:cNvPr id="4" name="TextBox 4"/>
+            <p:cNvSpPr txBox="1"/>
             <p:nvPr/>
           </p:nvSpPr>
           <p:spPr>
-            <a:xfrm rot="0">
+            <a:xfrm>
               <a:off x="0" y="1235075"/>
               <a:ext cx="5346700" cy="3209925"/>
             </a:xfrm>
@@ -5129,12 +4457,12 @@
             </a:prstGeom>
           </p:spPr>
           <p:txBody>
-            <a:bodyPr anchor="t" rtlCol="false" tIns="0" lIns="0" bIns="0" rIns="0">
+            <a:bodyPr lIns="0" tIns="0" rIns="0" bIns="0" rtlCol="0" anchor="t">
               <a:spAutoFit/>
             </a:bodyPr>
             <a:lstStyle/>
             <a:p>
-              <a:pPr algn="l" marL="0" indent="0" lvl="0">
+              <a:pPr marL="0" lvl="0" indent="0" algn="l">
                 <a:lnSpc>
                   <a:spcPts val="2700"/>
                 </a:lnSpc>
@@ -5143,7 +4471,7 @@
                 </a:spcBef>
               </a:pPr>
               <a:r>
-                <a:rPr lang="en-US" sz="2250" strike="noStrike" u="none">
+                <a:rPr lang="en-US" sz="2250" u="none" strike="noStrike">
                   <a:solidFill>
                     <a:srgbClr val="F0F0F0"/>
                   </a:solidFill>
@@ -5155,7 +4483,7 @@
                 <a:t>The frontend utilizes </a:t>
               </a:r>
               <a:r>
-                <a:rPr lang="en-US" b="true" sz="2250" strike="noStrike" u="none">
+                <a:rPr lang="en-US" sz="2250" b="1" u="none" strike="noStrike">
                   <a:solidFill>
                     <a:srgbClr val="F0F0F0"/>
                   </a:solidFill>
@@ -5167,7 +4495,7 @@
                 <a:t>HTML, CSS, and JavaScript</a:t>
               </a:r>
               <a:r>
-                <a:rPr lang="en-US" sz="2250" strike="noStrike" u="none">
+                <a:rPr lang="en-US" sz="2250" u="none" strike="noStrike">
                   <a:solidFill>
                     <a:srgbClr val="F0F0F0"/>
                   </a:solidFill>
@@ -5184,12 +4512,12 @@
       </p:grpSp>
       <p:grpSp>
         <p:nvGrpSpPr>
-          <p:cNvPr name="Group 5" id="5"/>
+          <p:cNvPr id="5" name="Group 5"/>
           <p:cNvGrpSpPr/>
           <p:nvPr/>
         </p:nvGrpSpPr>
         <p:grpSpPr>
-          <a:xfrm rot="0">
+          <a:xfrm>
             <a:off x="6419850" y="5143500"/>
             <a:ext cx="4010025" cy="3362325"/>
             <a:chOff x="0" y="0"/>
@@ -5198,12 +4526,12 @@
         </p:grpSpPr>
         <p:sp>
           <p:nvSpPr>
-            <p:cNvPr name="TextBox 6" id="6"/>
-            <p:cNvSpPr txBox="true"/>
+            <p:cNvPr id="6" name="TextBox 6"/>
+            <p:cNvSpPr txBox="1"/>
             <p:nvPr/>
           </p:nvSpPr>
           <p:spPr>
-            <a:xfrm rot="0">
+            <a:xfrm>
               <a:off x="0" y="0"/>
               <a:ext cx="5346700" cy="558800"/>
             </a:xfrm>
@@ -5212,12 +4540,12 @@
             </a:prstGeom>
           </p:spPr>
           <p:txBody>
-            <a:bodyPr anchor="t" rtlCol="false" tIns="0" lIns="0" bIns="0" rIns="0">
+            <a:bodyPr lIns="0" tIns="0" rIns="0" bIns="0" rtlCol="0" anchor="t">
               <a:spAutoFit/>
             </a:bodyPr>
             <a:lstStyle/>
             <a:p>
-              <a:pPr algn="l" marL="0" indent="0" lvl="0">
+              <a:pPr marL="0" lvl="0" indent="0" algn="l">
                 <a:lnSpc>
                   <a:spcPts val="3359"/>
                 </a:lnSpc>
@@ -5226,7 +4554,7 @@
                 </a:spcBef>
               </a:pPr>
               <a:r>
-                <a:rPr lang="en-US" b="true" sz="2799" strike="noStrike" u="none">
+                <a:rPr lang="en-US" sz="2799" b="1" u="none" strike="noStrike">
                   <a:solidFill>
                     <a:srgbClr val="F0F0F0"/>
                   </a:solidFill>
@@ -5242,12 +4570,12 @@
         </p:sp>
         <p:sp>
           <p:nvSpPr>
-            <p:cNvPr name="TextBox 7" id="7"/>
-            <p:cNvSpPr txBox="true"/>
+            <p:cNvPr id="7" name="TextBox 7"/>
+            <p:cNvSpPr txBox="1"/>
             <p:nvPr/>
           </p:nvSpPr>
           <p:spPr>
-            <a:xfrm rot="0">
+            <a:xfrm>
               <a:off x="0" y="1273175"/>
               <a:ext cx="5346700" cy="3209925"/>
             </a:xfrm>
@@ -5256,12 +4584,12 @@
             </a:prstGeom>
           </p:spPr>
           <p:txBody>
-            <a:bodyPr anchor="t" rtlCol="false" tIns="0" lIns="0" bIns="0" rIns="0">
+            <a:bodyPr lIns="0" tIns="0" rIns="0" bIns="0" rtlCol="0" anchor="t">
               <a:spAutoFit/>
             </a:bodyPr>
             <a:lstStyle/>
             <a:p>
-              <a:pPr algn="l" marL="0" indent="0" lvl="0">
+              <a:pPr marL="0" lvl="0" indent="0" algn="l">
                 <a:lnSpc>
                   <a:spcPts val="2700"/>
                 </a:lnSpc>
@@ -5270,7 +4598,7 @@
                 </a:spcBef>
               </a:pPr>
               <a:r>
-                <a:rPr lang="en-US" sz="2250" strike="noStrike" u="none">
+                <a:rPr lang="en-US" sz="2250" u="none" strike="noStrike">
                   <a:solidFill>
                     <a:srgbClr val="F0F0F0"/>
                   </a:solidFill>
@@ -5282,7 +4610,7 @@
                 <a:t>A robust backend is powered by </a:t>
               </a:r>
               <a:r>
-                <a:rPr lang="en-US" b="true" sz="2250" strike="noStrike" u="none">
+                <a:rPr lang="en-US" sz="2250" b="1" u="none" strike="noStrike">
                   <a:solidFill>
                     <a:srgbClr val="F0F0F0"/>
                   </a:solidFill>
@@ -5294,7 +4622,7 @@
                 <a:t>Java Spring Boot</a:t>
               </a:r>
               <a:r>
-                <a:rPr lang="en-US" sz="2250" strike="noStrike" u="none">
+                <a:rPr lang="en-US" sz="2250" u="none" strike="noStrike">
                   <a:solidFill>
                     <a:srgbClr val="F0F0F0"/>
                   </a:solidFill>
@@ -5311,12 +4639,12 @@
       </p:grpSp>
       <p:grpSp>
         <p:nvGrpSpPr>
-          <p:cNvPr name="Group 8" id="8"/>
+          <p:cNvPr id="8" name="Group 8"/>
           <p:cNvGrpSpPr/>
           <p:nvPr/>
         </p:nvGrpSpPr>
         <p:grpSpPr>
-          <a:xfrm rot="0">
+          <a:xfrm>
             <a:off x="12172950" y="5172075"/>
             <a:ext cx="4010025" cy="3333750"/>
             <a:chOff x="0" y="0"/>
@@ -5325,12 +4653,12 @@
         </p:grpSpPr>
         <p:sp>
           <p:nvSpPr>
-            <p:cNvPr name="TextBox 9" id="9"/>
-            <p:cNvSpPr txBox="true"/>
+            <p:cNvPr id="9" name="TextBox 9"/>
+            <p:cNvSpPr txBox="1"/>
             <p:nvPr/>
           </p:nvSpPr>
           <p:spPr>
-            <a:xfrm rot="0">
+            <a:xfrm>
               <a:off x="0" y="0"/>
               <a:ext cx="5346700" cy="558800"/>
             </a:xfrm>
@@ -5339,12 +4667,12 @@
             </a:prstGeom>
           </p:spPr>
           <p:txBody>
-            <a:bodyPr anchor="t" rtlCol="false" tIns="0" lIns="0" bIns="0" rIns="0">
+            <a:bodyPr lIns="0" tIns="0" rIns="0" bIns="0" rtlCol="0" anchor="t">
               <a:spAutoFit/>
             </a:bodyPr>
             <a:lstStyle/>
             <a:p>
-              <a:pPr algn="l" marL="0" indent="0" lvl="0">
+              <a:pPr marL="0" lvl="0" indent="0" algn="l">
                 <a:lnSpc>
                   <a:spcPts val="3359"/>
                 </a:lnSpc>
@@ -5353,7 +4681,7 @@
                 </a:spcBef>
               </a:pPr>
               <a:r>
-                <a:rPr lang="en-US" b="true" sz="2799" strike="noStrike" u="none">
+                <a:rPr lang="en-US" sz="2799" b="1" u="none" strike="noStrike">
                   <a:solidFill>
                     <a:srgbClr val="F0F0F0"/>
                   </a:solidFill>
@@ -5369,12 +4697,12 @@
         </p:sp>
         <p:sp>
           <p:nvSpPr>
-            <p:cNvPr name="TextBox 10" id="10"/>
-            <p:cNvSpPr txBox="true"/>
+            <p:cNvPr id="10" name="TextBox 10"/>
+            <p:cNvSpPr txBox="1"/>
             <p:nvPr/>
           </p:nvSpPr>
           <p:spPr>
-            <a:xfrm rot="0">
+            <a:xfrm>
               <a:off x="0" y="1235075"/>
               <a:ext cx="5346700" cy="3209925"/>
             </a:xfrm>
@@ -5383,12 +4711,12 @@
             </a:prstGeom>
           </p:spPr>
           <p:txBody>
-            <a:bodyPr anchor="t" rtlCol="false" tIns="0" lIns="0" bIns="0" rIns="0">
+            <a:bodyPr lIns="0" tIns="0" rIns="0" bIns="0" rtlCol="0" anchor="t">
               <a:spAutoFit/>
             </a:bodyPr>
             <a:lstStyle/>
             <a:p>
-              <a:pPr algn="l" marL="0" indent="0" lvl="0">
+              <a:pPr marL="0" lvl="0" indent="0" algn="l">
                 <a:lnSpc>
                   <a:spcPts val="2700"/>
                 </a:lnSpc>
@@ -5397,7 +4725,7 @@
                 </a:spcBef>
               </a:pPr>
               <a:r>
-                <a:rPr lang="en-US" sz="2250" strike="noStrike" u="none">
+                <a:rPr lang="en-US" sz="2250" u="none" strike="noStrike">
                   <a:solidFill>
                     <a:srgbClr val="F0F0F0"/>
                   </a:solidFill>
@@ -5409,7 +4737,7 @@
                 <a:t>Data is managed using </a:t>
               </a:r>
               <a:r>
-                <a:rPr lang="en-US" b="true" sz="2250" strike="noStrike" u="none">
+                <a:rPr lang="en-US" sz="2250" b="1" u="none" strike="noStrike">
                   <a:solidFill>
                     <a:srgbClr val="F0F0F0"/>
                   </a:solidFill>
@@ -5421,7 +4749,7 @@
                 <a:t>MySQL</a:t>
               </a:r>
               <a:r>
-                <a:rPr lang="en-US" sz="2250" strike="noStrike" u="none">
+                <a:rPr lang="en-US" sz="2250" u="none" strike="noStrike">
                   <a:solidFill>
                     <a:srgbClr val="F0F0F0"/>
                   </a:solidFill>
@@ -5438,12 +4766,12 @@
       </p:grpSp>
       <p:grpSp>
         <p:nvGrpSpPr>
-          <p:cNvPr name="Group 11" id="11"/>
+          <p:cNvPr id="11" name="Group 11"/>
           <p:cNvGrpSpPr/>
           <p:nvPr/>
         </p:nvGrpSpPr>
         <p:grpSpPr>
-          <a:xfrm rot="0">
+          <a:xfrm>
             <a:off x="666750" y="1562100"/>
             <a:ext cx="16954500" cy="2209800"/>
             <a:chOff x="0" y="0"/>
@@ -5452,12 +4780,12 @@
         </p:grpSpPr>
         <p:sp>
           <p:nvSpPr>
-            <p:cNvPr name="TextBox 12" id="12"/>
-            <p:cNvSpPr txBox="true"/>
+            <p:cNvPr id="12" name="TextBox 12"/>
+            <p:cNvSpPr txBox="1"/>
             <p:nvPr/>
           </p:nvSpPr>
           <p:spPr>
-            <a:xfrm rot="0">
+            <a:xfrm>
               <a:off x="0" y="180975"/>
               <a:ext cx="22606000" cy="1769745"/>
             </a:xfrm>
@@ -5466,12 +4794,12 @@
             </a:prstGeom>
           </p:spPr>
           <p:txBody>
-            <a:bodyPr anchor="t" rtlCol="false" tIns="0" lIns="0" bIns="0" rIns="0">
+            <a:bodyPr lIns="0" tIns="0" rIns="0" bIns="0" rtlCol="0" anchor="t">
               <a:spAutoFit/>
             </a:bodyPr>
             <a:lstStyle/>
             <a:p>
-              <a:pPr algn="l" marL="0" indent="0" lvl="0">
+              <a:pPr marL="0" lvl="0" indent="0" algn="l">
                 <a:lnSpc>
                   <a:spcPts val="9600"/>
                 </a:lnSpc>
@@ -5493,12 +4821,12 @@
         </p:sp>
         <p:sp>
           <p:nvSpPr>
-            <p:cNvPr name="TextBox 13" id="13"/>
-            <p:cNvSpPr txBox="true"/>
+            <p:cNvPr id="13" name="TextBox 13"/>
+            <p:cNvSpPr txBox="1"/>
             <p:nvPr/>
           </p:nvSpPr>
           <p:spPr>
-            <a:xfrm rot="0">
+            <a:xfrm>
               <a:off x="0" y="2387600"/>
               <a:ext cx="22606000" cy="558800"/>
             </a:xfrm>
@@ -5507,18 +4835,18 @@
             </a:prstGeom>
           </p:spPr>
           <p:txBody>
-            <a:bodyPr anchor="t" rtlCol="false" tIns="0" lIns="0" bIns="0" rIns="0">
+            <a:bodyPr lIns="0" tIns="0" rIns="0" bIns="0" rtlCol="0" anchor="t">
               <a:spAutoFit/>
             </a:bodyPr>
             <a:lstStyle/>
             <a:p>
-              <a:pPr algn="l" marL="0" indent="0" lvl="0">
+              <a:pPr marL="0" lvl="0" indent="0" algn="l">
                 <a:lnSpc>
                   <a:spcPts val="3359"/>
                 </a:lnSpc>
               </a:pPr>
               <a:r>
-                <a:rPr lang="en-US" b="true" sz="2799" strike="noStrike" u="none">
+                <a:rPr lang="en-US" sz="2799" b="1" u="none" strike="noStrike">
                   <a:solidFill>
                     <a:srgbClr val="F0F0F0"/>
                   </a:solidFill>
@@ -5535,7 +4863,7 @@
       </p:grpSp>
       <p:sp>
         <p:nvSpPr>
-          <p:cNvPr name="AutoShape 14" id="14"/>
+          <p:cNvPr id="14" name="AutoShape 14"/>
           <p:cNvSpPr/>
           <p:nvPr/>
         </p:nvSpPr>
@@ -5547,19 +4875,26 @@
           <a:prstGeom prst="line">
             <a:avLst/>
           </a:prstGeom>
-          <a:ln cap="flat" w="19050">
+          <a:ln w="19050" cap="flat">
             <a:solidFill>
               <a:srgbClr val="F0F0F0"/>
             </a:solidFill>
             <a:prstDash val="solid"/>
-            <a:headEnd type="none" len="sm" w="sm"/>
-            <a:tailEnd type="none" len="sm" w="sm"/>
+            <a:headEnd type="none" w="sm" len="sm"/>
+            <a:tailEnd type="none" w="sm" len="sm"/>
           </a:ln>
         </p:spPr>
-      </p:sp>
-      <p:sp>
-        <p:nvSpPr>
-          <p:cNvPr name="AutoShape 15" id="15"/>
+        <p:txBody>
+          <a:bodyPr/>
+          <a:lstStyle/>
+          <a:p>
+            <a:endParaRPr lang="en-AE"/>
+          </a:p>
+        </p:txBody>
+      </p:sp>
+      <p:sp>
+        <p:nvSpPr>
+          <p:cNvPr id="15" name="AutoShape 15"/>
           <p:cNvSpPr/>
           <p:nvPr/>
         </p:nvSpPr>
@@ -5571,15 +4906,22 @@
           <a:prstGeom prst="line">
             <a:avLst/>
           </a:prstGeom>
-          <a:ln cap="flat" w="19050">
+          <a:ln w="19050" cap="flat">
             <a:solidFill>
               <a:srgbClr val="F0F0F0"/>
             </a:solidFill>
             <a:prstDash val="solid"/>
-            <a:headEnd type="none" len="sm" w="sm"/>
-            <a:tailEnd type="none" len="sm" w="sm"/>
+            <a:headEnd type="none" w="sm" len="sm"/>
+            <a:tailEnd type="none" w="sm" len="sm"/>
           </a:ln>
         </p:spPr>
+        <p:txBody>
+          <a:bodyPr/>
+          <a:lstStyle/>
+          <a:p>
+            <a:endParaRPr lang="en-AE"/>
+          </a:p>
+        </p:txBody>
       </p:sp>
     </p:spTree>
   </p:cSld>
@@ -5590,13 +4932,14 @@
 </file>
 
 <file path=ppt/slides/slide5.xml><?xml version="1.0" encoding="utf-8"?>
-<p:sld xmlns:p="http://schemas.openxmlformats.org/presentationml/2006/main" xmlns:a="http://schemas.openxmlformats.org/drawingml/2006/main">
+<p:sld xmlns:a="http://schemas.openxmlformats.org/drawingml/2006/main" xmlns:r="http://schemas.openxmlformats.org/officeDocument/2006/relationships" xmlns:p="http://schemas.openxmlformats.org/presentationml/2006/main">
   <p:cSld>
     <p:bg>
       <p:bgPr>
         <a:solidFill>
           <a:srgbClr val="111520"/>
         </a:solidFill>
+        <a:effectLst/>
       </p:bgPr>
     </p:bg>
     <p:spTree>
@@ -5615,12 +4958,12 @@
       </p:grpSpPr>
       <p:sp>
         <p:nvSpPr>
-          <p:cNvPr name="TextBox 2" id="2"/>
-          <p:cNvSpPr txBox="true"/>
+          <p:cNvPr id="2" name="TextBox 2"/>
+          <p:cNvSpPr txBox="1"/>
           <p:nvPr/>
         </p:nvSpPr>
         <p:spPr>
-          <a:xfrm rot="0">
+          <a:xfrm>
             <a:off x="1028700" y="4207323"/>
             <a:ext cx="16954500" cy="838200"/>
           </a:xfrm>
@@ -5629,12 +4972,12 @@
           </a:prstGeom>
         </p:spPr>
         <p:txBody>
-          <a:bodyPr anchor="t" rtlCol="false" tIns="0" lIns="0" bIns="0" rIns="0">
+          <a:bodyPr lIns="0" tIns="0" rIns="0" bIns="0" rtlCol="0" anchor="t">
             <a:spAutoFit/>
           </a:bodyPr>
           <a:lstStyle/>
           <a:p>
-            <a:pPr algn="l" marL="604519" indent="-302260" lvl="1">
+            <a:pPr marL="604519" lvl="1" indent="-302260" algn="l">
               <a:lnSpc>
                 <a:spcPts val="3359"/>
               </a:lnSpc>
@@ -5642,7 +4985,7 @@
               <a:buChar char="•"/>
             </a:pPr>
             <a:r>
-              <a:rPr lang="en-US" b="true" sz="2799">
+              <a:rPr lang="en-US" sz="2799" b="1">
                 <a:solidFill>
                   <a:srgbClr val="F0F0F0"/>
                 </a:solidFill>
@@ -5654,7 +4997,7 @@
               <a:t>The inte</a:t>
             </a:r>
             <a:r>
-              <a:rPr lang="en-US" b="true" sz="2799" strike="noStrike" u="none">
+              <a:rPr lang="en-US" sz="2799" b="1" u="none" strike="noStrike">
                 <a:solidFill>
                   <a:srgbClr val="F0F0F0"/>
                 </a:solidFill>
@@ -5663,199 +5006,19 @@
                 <a:cs typeface="HK Grotesk Semi-Bold"/>
                 <a:sym typeface="HK Grotesk Semi-Bold"/>
               </a:rPr>
-              <a:t>r</a:t>
-            </a:r>
-            <a:r>
-              <a:rPr lang="en-US" b="true" sz="2799" strike="noStrike" u="none">
-                <a:solidFill>
-                  <a:srgbClr val="F0F0F0"/>
-                </a:solidFill>
-                <a:latin typeface="HK Grotesk Semi-Bold"/>
-                <a:ea typeface="HK Grotesk Semi-Bold"/>
-                <a:cs typeface="HK Grotesk Semi-Bold"/>
-                <a:sym typeface="HK Grotesk Semi-Bold"/>
-              </a:rPr>
-              <a:t>face will use a clea</a:t>
-            </a:r>
-            <a:r>
-              <a:rPr lang="en-US" b="true" sz="2799" strike="noStrike" u="none">
-                <a:solidFill>
-                  <a:srgbClr val="F0F0F0"/>
-                </a:solidFill>
-                <a:latin typeface="HK Grotesk Semi-Bold"/>
-                <a:ea typeface="HK Grotesk Semi-Bold"/>
-                <a:cs typeface="HK Grotesk Semi-Bold"/>
-                <a:sym typeface="HK Grotesk Semi-Bold"/>
-              </a:rPr>
-              <a:t>n</a:t>
-            </a:r>
-            <a:r>
-              <a:rPr lang="en-US" b="true" sz="2799" strike="noStrike" u="none">
-                <a:solidFill>
-                  <a:srgbClr val="F0F0F0"/>
-                </a:solidFill>
-                <a:latin typeface="HK Grotesk Semi-Bold"/>
-                <a:ea typeface="HK Grotesk Semi-Bold"/>
-                <a:cs typeface="HK Grotesk Semi-Bold"/>
-                <a:sym typeface="HK Grotesk Semi-Bold"/>
-              </a:rPr>
-              <a:t>, mo</a:t>
-            </a:r>
-            <a:r>
-              <a:rPr lang="en-US" b="true" sz="2799" strike="noStrike" u="none">
-                <a:solidFill>
-                  <a:srgbClr val="F0F0F0"/>
-                </a:solidFill>
-                <a:latin typeface="HK Grotesk Semi-Bold"/>
-                <a:ea typeface="HK Grotesk Semi-Bold"/>
-                <a:cs typeface="HK Grotesk Semi-Bold"/>
-                <a:sym typeface="HK Grotesk Semi-Bold"/>
-              </a:rPr>
-              <a:t>t</a:t>
-            </a:r>
-            <a:r>
-              <a:rPr lang="en-US" b="true" sz="2799" strike="noStrike" u="none">
-                <a:solidFill>
-                  <a:srgbClr val="F0F0F0"/>
-                </a:solidFill>
-                <a:latin typeface="HK Grotesk Semi-Bold"/>
-                <a:ea typeface="HK Grotesk Semi-Bold"/>
-                <a:cs typeface="HK Grotesk Semi-Bold"/>
-                <a:sym typeface="HK Grotesk Semi-Bold"/>
-              </a:rPr>
-              <a:t>orsport-inspir</a:t>
-            </a:r>
-            <a:r>
-              <a:rPr lang="en-US" b="true" sz="2799" strike="noStrike" u="none">
-                <a:solidFill>
-                  <a:srgbClr val="F0F0F0"/>
-                </a:solidFill>
-                <a:latin typeface="HK Grotesk Semi-Bold"/>
-                <a:ea typeface="HK Grotesk Semi-Bold"/>
-                <a:cs typeface="HK Grotesk Semi-Bold"/>
-                <a:sym typeface="HK Grotesk Semi-Bold"/>
-              </a:rPr>
-              <a:t>e</a:t>
-            </a:r>
-            <a:r>
-              <a:rPr lang="en-US" b="true" sz="2799" strike="noStrike" u="none">
-                <a:solidFill>
-                  <a:srgbClr val="F0F0F0"/>
-                </a:solidFill>
-                <a:latin typeface="HK Grotesk Semi-Bold"/>
-                <a:ea typeface="HK Grotesk Semi-Bold"/>
-                <a:cs typeface="HK Grotesk Semi-Bold"/>
-                <a:sym typeface="HK Grotesk Semi-Bold"/>
-              </a:rPr>
-              <a:t>d color scheme a</a:t>
-            </a:r>
-            <a:r>
-              <a:rPr lang="en-US" b="true" sz="2799" strike="noStrike" u="none">
-                <a:solidFill>
-                  <a:srgbClr val="F0F0F0"/>
-                </a:solidFill>
-                <a:latin typeface="HK Grotesk Semi-Bold"/>
-                <a:ea typeface="HK Grotesk Semi-Bold"/>
-                <a:cs typeface="HK Grotesk Semi-Bold"/>
-                <a:sym typeface="HK Grotesk Semi-Bold"/>
-              </a:rPr>
-              <a:t>nd </a:t>
-            </a:r>
-            <a:r>
-              <a:rPr lang="en-US" b="true" sz="2799" strike="noStrike" u="none">
-                <a:solidFill>
-                  <a:srgbClr val="F0F0F0"/>
-                </a:solidFill>
-                <a:latin typeface="HK Grotesk Semi-Bold"/>
-                <a:ea typeface="HK Grotesk Semi-Bold"/>
-                <a:cs typeface="HK Grotesk Semi-Bold"/>
-                <a:sym typeface="HK Grotesk Semi-Bold"/>
-              </a:rPr>
-              <a:t>layout </a:t>
-            </a:r>
-            <a:r>
-              <a:rPr lang="en-US" b="true" sz="2799" strike="noStrike" u="none">
-                <a:solidFill>
-                  <a:srgbClr val="F0F0F0"/>
-                </a:solidFill>
-                <a:latin typeface="HK Grotesk Semi-Bold"/>
-                <a:ea typeface="HK Grotesk Semi-Bold"/>
-                <a:cs typeface="HK Grotesk Semi-Bold"/>
-                <a:sym typeface="HK Grotesk Semi-Bold"/>
-              </a:rPr>
-              <a:t>t</a:t>
-            </a:r>
-            <a:r>
-              <a:rPr lang="en-US" b="true" sz="2799" strike="noStrike" u="none">
-                <a:solidFill>
-                  <a:srgbClr val="F0F0F0"/>
-                </a:solidFill>
-                <a:latin typeface="HK Grotesk Semi-Bold"/>
-                <a:ea typeface="HK Grotesk Semi-Bold"/>
-                <a:cs typeface="HK Grotesk Semi-Bold"/>
-                <a:sym typeface="HK Grotesk Semi-Bold"/>
-              </a:rPr>
-              <a:t>o m</a:t>
-            </a:r>
-            <a:r>
-              <a:rPr lang="en-US" b="true" sz="2799" strike="noStrike" u="none">
-                <a:solidFill>
-                  <a:srgbClr val="F0F0F0"/>
-                </a:solidFill>
-                <a:latin typeface="HK Grotesk Semi-Bold"/>
-                <a:ea typeface="HK Grotesk Semi-Bold"/>
-                <a:cs typeface="HK Grotesk Semi-Bold"/>
-                <a:sym typeface="HK Grotesk Semi-Bold"/>
-              </a:rPr>
-              <a:t>a</a:t>
-            </a:r>
-            <a:r>
-              <a:rPr lang="en-US" b="true" sz="2799" strike="noStrike" u="none">
-                <a:solidFill>
-                  <a:srgbClr val="F0F0F0"/>
-                </a:solidFill>
-                <a:latin typeface="HK Grotesk Semi-Bold"/>
-                <a:ea typeface="HK Grotesk Semi-Bold"/>
-                <a:cs typeface="HK Grotesk Semi-Bold"/>
-                <a:sym typeface="HK Grotesk Semi-Bold"/>
-              </a:rPr>
-              <a:t>t</a:t>
-            </a:r>
-            <a:r>
-              <a:rPr lang="en-US" b="true" sz="2799" strike="noStrike" u="none">
-                <a:solidFill>
-                  <a:srgbClr val="F0F0F0"/>
-                </a:solidFill>
-                <a:latin typeface="HK Grotesk Semi-Bold"/>
-                <a:ea typeface="HK Grotesk Semi-Bold"/>
-                <a:cs typeface="HK Grotesk Semi-Bold"/>
-                <a:sym typeface="HK Grotesk Semi-Bold"/>
-              </a:rPr>
-              <a:t>c</a:t>
-            </a:r>
-            <a:r>
-              <a:rPr lang="en-US" b="true" sz="2799" strike="noStrike" u="none">
-                <a:solidFill>
-                  <a:srgbClr val="F0F0F0"/>
-                </a:solidFill>
-                <a:latin typeface="HK Grotesk Semi-Bold"/>
-                <a:ea typeface="HK Grotesk Semi-Bold"/>
-                <a:cs typeface="HK Grotesk Semi-Bold"/>
-                <a:sym typeface="HK Grotesk Semi-Bold"/>
-              </a:rPr>
-              <a:t>h the Formula 1 theme while maintaining strong readability</a:t>
-            </a:r>
-          </a:p>
-        </p:txBody>
-      </p:sp>
-      <p:sp>
-        <p:nvSpPr>
-          <p:cNvPr name="TextBox 3" id="3"/>
-          <p:cNvSpPr txBox="true"/>
+              <a:t>rface will use a clean, motorsport-inspired color scheme and layout to match the Formula 1 theme while maintaining strong readability</a:t>
+            </a:r>
+          </a:p>
+        </p:txBody>
+      </p:sp>
+      <p:sp>
+        <p:nvSpPr>
+          <p:cNvPr id="3" name="TextBox 3"/>
+          <p:cNvSpPr txBox="1"/>
           <p:nvPr/>
         </p:nvSpPr>
         <p:spPr>
-          <a:xfrm rot="0">
+          <a:xfrm>
             <a:off x="1028700" y="5490996"/>
             <a:ext cx="16592550" cy="838200"/>
           </a:xfrm>
@@ -5864,12 +5027,12 @@
           </a:prstGeom>
         </p:spPr>
         <p:txBody>
-          <a:bodyPr anchor="t" rtlCol="false" tIns="0" lIns="0" bIns="0" rIns="0">
+          <a:bodyPr lIns="0" tIns="0" rIns="0" bIns="0" rtlCol="0" anchor="t">
             <a:spAutoFit/>
           </a:bodyPr>
           <a:lstStyle/>
           <a:p>
-            <a:pPr algn="l" marL="604519" indent="-302260" lvl="1">
+            <a:pPr marL="604519" lvl="1" indent="-302260" algn="l">
               <a:lnSpc>
                 <a:spcPts val="3359"/>
               </a:lnSpc>
@@ -5877,7 +5040,7 @@
               <a:buChar char="•"/>
             </a:pPr>
             <a:r>
-              <a:rPr lang="en-US" b="true" sz="2799">
+              <a:rPr lang="en-US" sz="2799" b="1">
                 <a:solidFill>
                   <a:srgbClr val="F0F0F0"/>
                 </a:solidFill>
@@ -5889,7 +5052,7 @@
               <a:t>A dashbo</a:t>
             </a:r>
             <a:r>
-              <a:rPr lang="en-US" b="true" sz="2799" strike="noStrike" u="none">
+              <a:rPr lang="en-US" sz="2799" b="1" u="none" strike="noStrike">
                 <a:solidFill>
                   <a:srgbClr val="F0F0F0"/>
                 </a:solidFill>
@@ -5898,223 +5061,19 @@
                 <a:cs typeface="HK Grotesk Semi-Bold"/>
                 <a:sym typeface="HK Grotesk Semi-Bold"/>
               </a:rPr>
-              <a:t>a</a:t>
-            </a:r>
-            <a:r>
-              <a:rPr lang="en-US" b="true" sz="2799" strike="noStrike" u="none">
-                <a:solidFill>
-                  <a:srgbClr val="F0F0F0"/>
-                </a:solidFill>
-                <a:latin typeface="HK Grotesk Semi-Bold"/>
-                <a:ea typeface="HK Grotesk Semi-Bold"/>
-                <a:cs typeface="HK Grotesk Semi-Bold"/>
-                <a:sym typeface="HK Grotesk Semi-Bold"/>
-              </a:rPr>
-              <a:t>rd-style homepage will provide users with qui</a:t>
-            </a:r>
-            <a:r>
-              <a:rPr lang="en-US" b="true" sz="2799" strike="noStrike" u="none">
-                <a:solidFill>
-                  <a:srgbClr val="F0F0F0"/>
-                </a:solidFill>
-                <a:latin typeface="HK Grotesk Semi-Bold"/>
-                <a:ea typeface="HK Grotesk Semi-Bold"/>
-                <a:cs typeface="HK Grotesk Semi-Bold"/>
-                <a:sym typeface="HK Grotesk Semi-Bold"/>
-              </a:rPr>
-              <a:t>ck</a:t>
-            </a:r>
-            <a:r>
-              <a:rPr lang="en-US" b="true" sz="2799" strike="noStrike" u="none">
-                <a:solidFill>
-                  <a:srgbClr val="F0F0F0"/>
-                </a:solidFill>
-                <a:latin typeface="HK Grotesk Semi-Bold"/>
-                <a:ea typeface="HK Grotesk Semi-Bold"/>
-                <a:cs typeface="HK Grotesk Semi-Bold"/>
-                <a:sym typeface="HK Grotesk Semi-Bold"/>
-              </a:rPr>
-              <a:t> acc</a:t>
-            </a:r>
-            <a:r>
-              <a:rPr lang="en-US" b="true" sz="2799" strike="noStrike" u="none">
-                <a:solidFill>
-                  <a:srgbClr val="F0F0F0"/>
-                </a:solidFill>
-                <a:latin typeface="HK Grotesk Semi-Bold"/>
-                <a:ea typeface="HK Grotesk Semi-Bold"/>
-                <a:cs typeface="HK Grotesk Semi-Bold"/>
-                <a:sym typeface="HK Grotesk Semi-Bold"/>
-              </a:rPr>
-              <a:t>e</a:t>
-            </a:r>
-            <a:r>
-              <a:rPr lang="en-US" b="true" sz="2799" strike="noStrike" u="none">
-                <a:solidFill>
-                  <a:srgbClr val="F0F0F0"/>
-                </a:solidFill>
-                <a:latin typeface="HK Grotesk Semi-Bold"/>
-                <a:ea typeface="HK Grotesk Semi-Bold"/>
-                <a:cs typeface="HK Grotesk Semi-Bold"/>
-                <a:sym typeface="HK Grotesk Semi-Bold"/>
-              </a:rPr>
-              <a:t>ss to sta</a:t>
-            </a:r>
-            <a:r>
-              <a:rPr lang="en-US" b="true" sz="2799" strike="noStrike" u="none">
-                <a:solidFill>
-                  <a:srgbClr val="F0F0F0"/>
-                </a:solidFill>
-                <a:latin typeface="HK Grotesk Semi-Bold"/>
-                <a:ea typeface="HK Grotesk Semi-Bold"/>
-                <a:cs typeface="HK Grotesk Semi-Bold"/>
-                <a:sym typeface="HK Grotesk Semi-Bold"/>
-              </a:rPr>
-              <a:t>nd</a:t>
-            </a:r>
-            <a:r>
-              <a:rPr lang="en-US" b="true" sz="2799" strike="noStrike" u="none">
-                <a:solidFill>
-                  <a:srgbClr val="F0F0F0"/>
-                </a:solidFill>
-                <a:latin typeface="HK Grotesk Semi-Bold"/>
-                <a:ea typeface="HK Grotesk Semi-Bold"/>
-                <a:cs typeface="HK Grotesk Semi-Bold"/>
-                <a:sym typeface="HK Grotesk Semi-Bold"/>
-              </a:rPr>
-              <a:t>ings,</a:t>
-            </a:r>
-            <a:r>
-              <a:rPr lang="en-US" b="true" sz="2799" strike="noStrike" u="none">
-                <a:solidFill>
-                  <a:srgbClr val="F0F0F0"/>
-                </a:solidFill>
-                <a:latin typeface="HK Grotesk Semi-Bold"/>
-                <a:ea typeface="HK Grotesk Semi-Bold"/>
-                <a:cs typeface="HK Grotesk Semi-Bold"/>
-                <a:sym typeface="HK Grotesk Semi-Bold"/>
-              </a:rPr>
-              <a:t> ra</a:t>
-            </a:r>
-            <a:r>
-              <a:rPr lang="en-US" b="true" sz="2799" strike="noStrike" u="none">
-                <a:solidFill>
-                  <a:srgbClr val="F0F0F0"/>
-                </a:solidFill>
-                <a:latin typeface="HK Grotesk Semi-Bold"/>
-                <a:ea typeface="HK Grotesk Semi-Bold"/>
-                <a:cs typeface="HK Grotesk Semi-Bold"/>
-                <a:sym typeface="HK Grotesk Semi-Bold"/>
-              </a:rPr>
-              <a:t>ce results, and k</a:t>
-            </a:r>
-            <a:r>
-              <a:rPr lang="en-US" b="true" sz="2799" strike="noStrike" u="none">
-                <a:solidFill>
-                  <a:srgbClr val="F0F0F0"/>
-                </a:solidFill>
-                <a:latin typeface="HK Grotesk Semi-Bold"/>
-                <a:ea typeface="HK Grotesk Semi-Bold"/>
-                <a:cs typeface="HK Grotesk Semi-Bold"/>
-                <a:sym typeface="HK Grotesk Semi-Bold"/>
-              </a:rPr>
-              <a:t>e</a:t>
-            </a:r>
-            <a:r>
-              <a:rPr lang="en-US" b="true" sz="2799" strike="noStrike" u="none">
-                <a:solidFill>
-                  <a:srgbClr val="F0F0F0"/>
-                </a:solidFill>
-                <a:latin typeface="HK Grotesk Semi-Bold"/>
-                <a:ea typeface="HK Grotesk Semi-Bold"/>
-                <a:cs typeface="HK Grotesk Semi-Bold"/>
-                <a:sym typeface="HK Grotesk Semi-Bold"/>
-              </a:rPr>
-              <a:t>y statistics </a:t>
-            </a:r>
-            <a:r>
-              <a:rPr lang="en-US" b="true" sz="2799" strike="noStrike" u="none">
-                <a:solidFill>
-                  <a:srgbClr val="F0F0F0"/>
-                </a:solidFill>
-                <a:latin typeface="HK Grotesk Semi-Bold"/>
-                <a:ea typeface="HK Grotesk Semi-Bold"/>
-                <a:cs typeface="HK Grotesk Semi-Bold"/>
-                <a:sym typeface="HK Grotesk Semi-Bold"/>
-              </a:rPr>
-              <a:t>w</a:t>
-            </a:r>
-            <a:r>
-              <a:rPr lang="en-US" b="true" sz="2799" strike="noStrike" u="none">
-                <a:solidFill>
-                  <a:srgbClr val="F0F0F0"/>
-                </a:solidFill>
-                <a:latin typeface="HK Grotesk Semi-Bold"/>
-                <a:ea typeface="HK Grotesk Semi-Bold"/>
-                <a:cs typeface="HK Grotesk Semi-Bold"/>
-                <a:sym typeface="HK Grotesk Semi-Bold"/>
-              </a:rPr>
-              <a:t>ith</a:t>
-            </a:r>
-            <a:r>
-              <a:rPr lang="en-US" b="true" sz="2799" strike="noStrike" u="none">
-                <a:solidFill>
-                  <a:srgbClr val="F0F0F0"/>
-                </a:solidFill>
-                <a:latin typeface="HK Grotesk Semi-Bold"/>
-                <a:ea typeface="HK Grotesk Semi-Bold"/>
-                <a:cs typeface="HK Grotesk Semi-Bold"/>
-                <a:sym typeface="HK Grotesk Semi-Bold"/>
-              </a:rPr>
-              <a:t>o</a:t>
-            </a:r>
-            <a:r>
-              <a:rPr lang="en-US" b="true" sz="2799" strike="noStrike" u="none">
-                <a:solidFill>
-                  <a:srgbClr val="F0F0F0"/>
-                </a:solidFill>
-                <a:latin typeface="HK Grotesk Semi-Bold"/>
-                <a:ea typeface="HK Grotesk Semi-Bold"/>
-                <a:cs typeface="HK Grotesk Semi-Bold"/>
-                <a:sym typeface="HK Grotesk Semi-Bold"/>
-              </a:rPr>
-              <a:t>ut ove</a:t>
-            </a:r>
-            <a:r>
-              <a:rPr lang="en-US" b="true" sz="2799" strike="noStrike" u="none">
-                <a:solidFill>
-                  <a:srgbClr val="F0F0F0"/>
-                </a:solidFill>
-                <a:latin typeface="HK Grotesk Semi-Bold"/>
-                <a:ea typeface="HK Grotesk Semi-Bold"/>
-                <a:cs typeface="HK Grotesk Semi-Bold"/>
-                <a:sym typeface="HK Grotesk Semi-Bold"/>
-              </a:rPr>
-              <a:t>r</a:t>
-            </a:r>
-            <a:r>
-              <a:rPr lang="en-US" b="true" sz="2799" strike="noStrike" u="none">
-                <a:solidFill>
-                  <a:srgbClr val="F0F0F0"/>
-                </a:solidFill>
-                <a:latin typeface="HK Grotesk Semi-Bold"/>
-                <a:ea typeface="HK Grotesk Semi-Bold"/>
-                <a:cs typeface="HK Grotesk Semi-Bold"/>
-                <a:sym typeface="HK Grotesk Semi-Bold"/>
-              </a:rPr>
-              <a:t>whelming the screen</a:t>
-            </a:r>
-          </a:p>
-        </p:txBody>
-      </p:sp>
-      <p:sp>
-        <p:nvSpPr>
-          <p:cNvPr name="TextBox 4" id="4"/>
-          <p:cNvSpPr txBox="true"/>
+              <a:t>ard-style homepage will provide users with quick access to standings, race results, and key statistics without overwhelming the screen</a:t>
+            </a:r>
+          </a:p>
+        </p:txBody>
+      </p:sp>
+      <p:sp>
+        <p:nvSpPr>
+          <p:cNvPr id="4" name="TextBox 4"/>
+          <p:cNvSpPr txBox="1"/>
           <p:nvPr/>
         </p:nvSpPr>
         <p:spPr>
-          <a:xfrm rot="0">
+          <a:xfrm>
             <a:off x="1028700" y="6776871"/>
             <a:ext cx="16592550" cy="838200"/>
           </a:xfrm>
@@ -6123,12 +5082,12 @@
           </a:prstGeom>
         </p:spPr>
         <p:txBody>
-          <a:bodyPr anchor="t" rtlCol="false" tIns="0" lIns="0" bIns="0" rIns="0">
+          <a:bodyPr lIns="0" tIns="0" rIns="0" bIns="0" rtlCol="0" anchor="t">
             <a:spAutoFit/>
           </a:bodyPr>
           <a:lstStyle/>
           <a:p>
-            <a:pPr algn="l" marL="604519" indent="-302260" lvl="1">
+            <a:pPr marL="604519" lvl="1" indent="-302260" algn="l">
               <a:lnSpc>
                 <a:spcPts val="3359"/>
               </a:lnSpc>
@@ -6136,7 +5095,7 @@
               <a:buChar char="•"/>
             </a:pPr>
             <a:r>
-              <a:rPr lang="en-US" b="true" sz="2799" strike="noStrike" u="none">
+              <a:rPr lang="en-US" sz="2799" b="1" u="none" strike="noStrike">
                 <a:solidFill>
                   <a:srgbClr val="F0F0F0"/>
                 </a:solidFill>
@@ -6152,12 +5111,12 @@
       </p:sp>
       <p:grpSp>
         <p:nvGrpSpPr>
-          <p:cNvPr name="Group 5" id="5"/>
+          <p:cNvPr id="5" name="Group 5"/>
           <p:cNvGrpSpPr/>
           <p:nvPr/>
         </p:nvGrpSpPr>
         <p:grpSpPr>
-          <a:xfrm rot="0">
+          <a:xfrm>
             <a:off x="666750" y="1562100"/>
             <a:ext cx="16954500" cy="2209800"/>
             <a:chOff x="0" y="0"/>
@@ -6166,12 +5125,12 @@
         </p:grpSpPr>
         <p:sp>
           <p:nvSpPr>
-            <p:cNvPr name="TextBox 6" id="6"/>
-            <p:cNvSpPr txBox="true"/>
+            <p:cNvPr id="6" name="TextBox 6"/>
+            <p:cNvSpPr txBox="1"/>
             <p:nvPr/>
           </p:nvSpPr>
           <p:spPr>
-            <a:xfrm rot="0">
+            <a:xfrm>
               <a:off x="0" y="180975"/>
               <a:ext cx="22606000" cy="1769745"/>
             </a:xfrm>
@@ -6180,12 +5139,12 @@
             </a:prstGeom>
           </p:spPr>
           <p:txBody>
-            <a:bodyPr anchor="t" rtlCol="false" tIns="0" lIns="0" bIns="0" rIns="0">
+            <a:bodyPr lIns="0" tIns="0" rIns="0" bIns="0" rtlCol="0" anchor="t">
               <a:spAutoFit/>
             </a:bodyPr>
             <a:lstStyle/>
             <a:p>
-              <a:pPr algn="l" marL="0" indent="0" lvl="0">
+              <a:pPr marL="0" lvl="0" indent="0" algn="l">
                 <a:lnSpc>
                   <a:spcPts val="9600"/>
                 </a:lnSpc>
@@ -6207,12 +5166,12 @@
         </p:sp>
         <p:sp>
           <p:nvSpPr>
-            <p:cNvPr name="TextBox 7" id="7"/>
-            <p:cNvSpPr txBox="true"/>
+            <p:cNvPr id="7" name="TextBox 7"/>
+            <p:cNvSpPr txBox="1"/>
             <p:nvPr/>
           </p:nvSpPr>
           <p:spPr>
-            <a:xfrm rot="0">
+            <a:xfrm>
               <a:off x="0" y="2387600"/>
               <a:ext cx="22606000" cy="558800"/>
             </a:xfrm>
@@ -6221,18 +5180,18 @@
             </a:prstGeom>
           </p:spPr>
           <p:txBody>
-            <a:bodyPr anchor="t" rtlCol="false" tIns="0" lIns="0" bIns="0" rIns="0">
+            <a:bodyPr lIns="0" tIns="0" rIns="0" bIns="0" rtlCol="0" anchor="t">
               <a:spAutoFit/>
             </a:bodyPr>
             <a:lstStyle/>
             <a:p>
-              <a:pPr algn="l" marL="0" indent="0" lvl="0">
+              <a:pPr marL="0" lvl="0" indent="0" algn="l">
                 <a:lnSpc>
                   <a:spcPts val="3359"/>
                 </a:lnSpc>
               </a:pPr>
               <a:r>
-                <a:rPr lang="en-US" b="true" sz="2799">
+                <a:rPr lang="en-US" sz="2799" b="1">
                   <a:solidFill>
                     <a:srgbClr val="F0F0F0"/>
                   </a:solidFill>
@@ -6244,7 +5203,7 @@
                 <a:t>Us</a:t>
               </a:r>
               <a:r>
-                <a:rPr lang="en-US" b="true" sz="2799" strike="noStrike" u="none">
+                <a:rPr lang="en-US" sz="2799" b="1" u="none" strike="noStrike">
                   <a:solidFill>
                     <a:srgbClr val="F0F0F0"/>
                   </a:solidFill>
@@ -6253,187 +5212,7 @@
                   <a:cs typeface="HK Grotesk Semi-Bold"/>
                   <a:sym typeface="HK Grotesk Semi-Bold"/>
                 </a:rPr>
-                <a:t>e</a:t>
-              </a:r>
-              <a:r>
-                <a:rPr lang="en-US" b="true" sz="2799" strike="noStrike" u="none">
-                  <a:solidFill>
-                    <a:srgbClr val="F0F0F0"/>
-                  </a:solidFill>
-                  <a:latin typeface="HK Grotesk Semi-Bold"/>
-                  <a:ea typeface="HK Grotesk Semi-Bold"/>
-                  <a:cs typeface="HK Grotesk Semi-Bold"/>
-                  <a:sym typeface="HK Grotesk Semi-Bold"/>
-                </a:rPr>
-                <a:t>r</a:t>
-              </a:r>
-              <a:r>
-                <a:rPr lang="en-US" b="true" sz="2799" strike="noStrike" u="none">
-                  <a:solidFill>
-                    <a:srgbClr val="F0F0F0"/>
-                  </a:solidFill>
-                  <a:latin typeface="HK Grotesk Semi-Bold"/>
-                  <a:ea typeface="HK Grotesk Semi-Bold"/>
-                  <a:cs typeface="HK Grotesk Semi-Bold"/>
-                  <a:sym typeface="HK Grotesk Semi-Bold"/>
-                </a:rPr>
-                <a:t> </a:t>
-              </a:r>
-              <a:r>
-                <a:rPr lang="en-US" b="true" sz="2799" strike="noStrike" u="none">
-                  <a:solidFill>
-                    <a:srgbClr val="F0F0F0"/>
-                  </a:solidFill>
-                  <a:latin typeface="HK Grotesk Semi-Bold"/>
-                  <a:ea typeface="HK Grotesk Semi-Bold"/>
-                  <a:cs typeface="HK Grotesk Semi-Bold"/>
-                  <a:sym typeface="HK Grotesk Semi-Bold"/>
-                </a:rPr>
-                <a:t>I</a:t>
-              </a:r>
-              <a:r>
-                <a:rPr lang="en-US" b="true" sz="2799" strike="noStrike" u="none">
-                  <a:solidFill>
-                    <a:srgbClr val="F0F0F0"/>
-                  </a:solidFill>
-                  <a:latin typeface="HK Grotesk Semi-Bold"/>
-                  <a:ea typeface="HK Grotesk Semi-Bold"/>
-                  <a:cs typeface="HK Grotesk Semi-Bold"/>
-                  <a:sym typeface="HK Grotesk Semi-Bold"/>
-                </a:rPr>
-                <a:t>n</a:t>
-              </a:r>
-              <a:r>
-                <a:rPr lang="en-US" b="true" sz="2799" strike="noStrike" u="none">
-                  <a:solidFill>
-                    <a:srgbClr val="F0F0F0"/>
-                  </a:solidFill>
-                  <a:latin typeface="HK Grotesk Semi-Bold"/>
-                  <a:ea typeface="HK Grotesk Semi-Bold"/>
-                  <a:cs typeface="HK Grotesk Semi-Bold"/>
-                  <a:sym typeface="HK Grotesk Semi-Bold"/>
-                </a:rPr>
-                <a:t>t</a:t>
-              </a:r>
-              <a:r>
-                <a:rPr lang="en-US" b="true" sz="2799" strike="noStrike" u="none">
-                  <a:solidFill>
-                    <a:srgbClr val="F0F0F0"/>
-                  </a:solidFill>
-                  <a:latin typeface="HK Grotesk Semi-Bold"/>
-                  <a:ea typeface="HK Grotesk Semi-Bold"/>
-                  <a:cs typeface="HK Grotesk Semi-Bold"/>
-                  <a:sym typeface="HK Grotesk Semi-Bold"/>
-                </a:rPr>
-                <a:t>e</a:t>
-              </a:r>
-              <a:r>
-                <a:rPr lang="en-US" b="true" sz="2799" strike="noStrike" u="none">
-                  <a:solidFill>
-                    <a:srgbClr val="F0F0F0"/>
-                  </a:solidFill>
-                  <a:latin typeface="HK Grotesk Semi-Bold"/>
-                  <a:ea typeface="HK Grotesk Semi-Bold"/>
-                  <a:cs typeface="HK Grotesk Semi-Bold"/>
-                  <a:sym typeface="HK Grotesk Semi-Bold"/>
-                </a:rPr>
-                <a:t>rface &amp;</a:t>
-              </a:r>
-              <a:r>
-                <a:rPr lang="en-US" b="true" sz="2799" strike="noStrike" u="none">
-                  <a:solidFill>
-                    <a:srgbClr val="F0F0F0"/>
-                  </a:solidFill>
-                  <a:latin typeface="HK Grotesk Semi-Bold"/>
-                  <a:ea typeface="HK Grotesk Semi-Bold"/>
-                  <a:cs typeface="HK Grotesk Semi-Bold"/>
-                  <a:sym typeface="HK Grotesk Semi-Bold"/>
-                </a:rPr>
-                <a:t> </a:t>
-              </a:r>
-              <a:r>
-                <a:rPr lang="en-US" b="true" sz="2799" strike="noStrike" u="none">
-                  <a:solidFill>
-                    <a:srgbClr val="F0F0F0"/>
-                  </a:solidFill>
-                  <a:latin typeface="HK Grotesk Semi-Bold"/>
-                  <a:ea typeface="HK Grotesk Semi-Bold"/>
-                  <a:cs typeface="HK Grotesk Semi-Bold"/>
-                  <a:sym typeface="HK Grotesk Semi-Bold"/>
-                </a:rPr>
-                <a:t>Experie</a:t>
-              </a:r>
-              <a:r>
-                <a:rPr lang="en-US" b="true" sz="2799" strike="noStrike" u="none">
-                  <a:solidFill>
-                    <a:srgbClr val="F0F0F0"/>
-                  </a:solidFill>
-                  <a:latin typeface="HK Grotesk Semi-Bold"/>
-                  <a:ea typeface="HK Grotesk Semi-Bold"/>
-                  <a:cs typeface="HK Grotesk Semi-Bold"/>
-                  <a:sym typeface="HK Grotesk Semi-Bold"/>
-                </a:rPr>
-                <a:t>n</a:t>
-              </a:r>
-              <a:r>
-                <a:rPr lang="en-US" b="true" sz="2799" strike="noStrike" u="none">
-                  <a:solidFill>
-                    <a:srgbClr val="F0F0F0"/>
-                  </a:solidFill>
-                  <a:latin typeface="HK Grotesk Semi-Bold"/>
-                  <a:ea typeface="HK Grotesk Semi-Bold"/>
-                  <a:cs typeface="HK Grotesk Semi-Bold"/>
-                  <a:sym typeface="HK Grotesk Semi-Bold"/>
-                </a:rPr>
-                <a:t>ce</a:t>
-              </a:r>
-              <a:r>
-                <a:rPr lang="en-US" b="true" sz="2799" strike="noStrike" u="none">
-                  <a:solidFill>
-                    <a:srgbClr val="F0F0F0"/>
-                  </a:solidFill>
-                  <a:latin typeface="HK Grotesk Semi-Bold"/>
-                  <a:ea typeface="HK Grotesk Semi-Bold"/>
-                  <a:cs typeface="HK Grotesk Semi-Bold"/>
-                  <a:sym typeface="HK Grotesk Semi-Bold"/>
-                </a:rPr>
-                <a:t> </a:t>
-              </a:r>
-              <a:r>
-                <a:rPr lang="en-US" b="true" sz="2799" strike="noStrike" u="none">
-                  <a:solidFill>
-                    <a:srgbClr val="F0F0F0"/>
-                  </a:solidFill>
-                  <a:latin typeface="HK Grotesk Semi-Bold"/>
-                  <a:ea typeface="HK Grotesk Semi-Bold"/>
-                  <a:cs typeface="HK Grotesk Semi-Bold"/>
-                  <a:sym typeface="HK Grotesk Semi-Bold"/>
-                </a:rPr>
-                <a:t>St</a:t>
-              </a:r>
-              <a:r>
-                <a:rPr lang="en-US" b="true" sz="2799" strike="noStrike" u="none">
-                  <a:solidFill>
-                    <a:srgbClr val="F0F0F0"/>
-                  </a:solidFill>
-                  <a:latin typeface="HK Grotesk Semi-Bold"/>
-                  <a:ea typeface="HK Grotesk Semi-Bold"/>
-                  <a:cs typeface="HK Grotesk Semi-Bold"/>
-                  <a:sym typeface="HK Grotesk Semi-Bold"/>
-                </a:rPr>
-                <a:t>ra</a:t>
-              </a:r>
-              <a:r>
-                <a:rPr lang="en-US" b="true" sz="2799" strike="noStrike" u="none">
-                  <a:solidFill>
-                    <a:srgbClr val="F0F0F0"/>
-                  </a:solidFill>
-                  <a:latin typeface="HK Grotesk Semi-Bold"/>
-                  <a:ea typeface="HK Grotesk Semi-Bold"/>
-                  <a:cs typeface="HK Grotesk Semi-Bold"/>
-                  <a:sym typeface="HK Grotesk Semi-Bold"/>
-                </a:rPr>
-                <a:t>tegy</a:t>
+                <a:t>er Interface &amp; Experience Strategy</a:t>
               </a:r>
             </a:p>
           </p:txBody>
@@ -6441,7 +5220,7 @@
       </p:grpSp>
       <p:sp>
         <p:nvSpPr>
-          <p:cNvPr name="AutoShape 8" id="8"/>
+          <p:cNvPr id="8" name="AutoShape 8"/>
           <p:cNvSpPr/>
           <p:nvPr/>
         </p:nvSpPr>
@@ -6453,19 +5232,26 @@
           <a:prstGeom prst="line">
             <a:avLst/>
           </a:prstGeom>
-          <a:ln cap="flat" w="19050">
+          <a:ln w="19050" cap="flat">
             <a:solidFill>
               <a:srgbClr val="F0F0F0"/>
             </a:solidFill>
             <a:prstDash val="solid"/>
-            <a:headEnd type="none" len="sm" w="sm"/>
-            <a:tailEnd type="none" len="sm" w="sm"/>
+            <a:headEnd type="none" w="sm" len="sm"/>
+            <a:tailEnd type="none" w="sm" len="sm"/>
           </a:ln>
         </p:spPr>
-      </p:sp>
-      <p:sp>
-        <p:nvSpPr>
-          <p:cNvPr name="AutoShape 9" id="9"/>
+        <p:txBody>
+          <a:bodyPr/>
+          <a:lstStyle/>
+          <a:p>
+            <a:endParaRPr lang="en-AE"/>
+          </a:p>
+        </p:txBody>
+      </p:sp>
+      <p:sp>
+        <p:nvSpPr>
+          <p:cNvPr id="9" name="AutoShape 9"/>
           <p:cNvSpPr/>
           <p:nvPr/>
         </p:nvSpPr>
@@ -6477,24 +5263,31 @@
           <a:prstGeom prst="line">
             <a:avLst/>
           </a:prstGeom>
-          <a:ln cap="flat" w="19050">
+          <a:ln w="19050" cap="flat">
             <a:solidFill>
               <a:srgbClr val="F0F0F0"/>
             </a:solidFill>
             <a:prstDash val="solid"/>
-            <a:headEnd type="none" len="sm" w="sm"/>
-            <a:tailEnd type="none" len="sm" w="sm"/>
+            <a:headEnd type="none" w="sm" len="sm"/>
+            <a:tailEnd type="none" w="sm" len="sm"/>
           </a:ln>
         </p:spPr>
-      </p:sp>
-      <p:sp>
-        <p:nvSpPr>
-          <p:cNvPr name="TextBox 10" id="10"/>
-          <p:cNvSpPr txBox="true"/>
+        <p:txBody>
+          <a:bodyPr/>
+          <a:lstStyle/>
+          <a:p>
+            <a:endParaRPr lang="en-AE"/>
+          </a:p>
+        </p:txBody>
+      </p:sp>
+      <p:sp>
+        <p:nvSpPr>
+          <p:cNvPr id="10" name="TextBox 10"/>
+          <p:cNvSpPr txBox="1"/>
           <p:nvPr/>
         </p:nvSpPr>
         <p:spPr>
-          <a:xfrm rot="0">
+          <a:xfrm>
             <a:off x="1028700" y="8062746"/>
             <a:ext cx="16592550" cy="838200"/>
           </a:xfrm>
@@ -6503,12 +5296,12 @@
           </a:prstGeom>
         </p:spPr>
         <p:txBody>
-          <a:bodyPr anchor="t" rtlCol="false" tIns="0" lIns="0" bIns="0" rIns="0">
+          <a:bodyPr lIns="0" tIns="0" rIns="0" bIns="0" rtlCol="0" anchor="t">
             <a:spAutoFit/>
           </a:bodyPr>
           <a:lstStyle/>
           <a:p>
-            <a:pPr algn="l" marL="604519" indent="-302260" lvl="1">
+            <a:pPr marL="604519" lvl="1" indent="-302260" algn="l">
               <a:lnSpc>
                 <a:spcPts val="3359"/>
               </a:lnSpc>
@@ -6516,7 +5309,7 @@
               <a:buChar char="•"/>
             </a:pPr>
             <a:r>
-              <a:rPr lang="en-US" b="true" sz="2799">
+              <a:rPr lang="en-US" sz="2799" b="1">
                 <a:solidFill>
                   <a:srgbClr val="F0F0F0"/>
                 </a:solidFill>
@@ -6528,7 +5321,7 @@
               <a:t>Nav</a:t>
             </a:r>
             <a:r>
-              <a:rPr lang="en-US" b="true" sz="2799" strike="noStrike" u="none">
+              <a:rPr lang="en-US" sz="2799" b="1" u="none" strike="noStrike">
                 <a:solidFill>
                   <a:srgbClr val="F0F0F0"/>
                 </a:solidFill>
@@ -6537,667 +5330,7 @@
                 <a:cs typeface="HK Grotesk Semi-Bold"/>
                 <a:sym typeface="HK Grotesk Semi-Bold"/>
               </a:rPr>
-              <a:t>i</a:t>
-            </a:r>
-            <a:r>
-              <a:rPr lang="en-US" b="true" sz="2799" strike="noStrike" u="none">
-                <a:solidFill>
-                  <a:srgbClr val="F0F0F0"/>
-                </a:solidFill>
-                <a:latin typeface="HK Grotesk Semi-Bold"/>
-                <a:ea typeface="HK Grotesk Semi-Bold"/>
-                <a:cs typeface="HK Grotesk Semi-Bold"/>
-                <a:sym typeface="HK Grotesk Semi-Bold"/>
-              </a:rPr>
-              <a:t>ga</a:t>
-            </a:r>
-            <a:r>
-              <a:rPr lang="en-US" b="true" sz="2799" strike="noStrike" u="none">
-                <a:solidFill>
-                  <a:srgbClr val="F0F0F0"/>
-                </a:solidFill>
-                <a:latin typeface="HK Grotesk Semi-Bold"/>
-                <a:ea typeface="HK Grotesk Semi-Bold"/>
-                <a:cs typeface="HK Grotesk Semi-Bold"/>
-                <a:sym typeface="HK Grotesk Semi-Bold"/>
-              </a:rPr>
-              <a:t>t</a:t>
-            </a:r>
-            <a:r>
-              <a:rPr lang="en-US" b="true" sz="2799" strike="noStrike" u="none">
-                <a:solidFill>
-                  <a:srgbClr val="F0F0F0"/>
-                </a:solidFill>
-                <a:latin typeface="HK Grotesk Semi-Bold"/>
-                <a:ea typeface="HK Grotesk Semi-Bold"/>
-                <a:cs typeface="HK Grotesk Semi-Bold"/>
-                <a:sym typeface="HK Grotesk Semi-Bold"/>
-              </a:rPr>
-              <a:t>ion</a:t>
-            </a:r>
-            <a:r>
-              <a:rPr lang="en-US" b="true" sz="2799" strike="noStrike" u="none">
-                <a:solidFill>
-                  <a:srgbClr val="F0F0F0"/>
-                </a:solidFill>
-                <a:latin typeface="HK Grotesk Semi-Bold"/>
-                <a:ea typeface="HK Grotesk Semi-Bold"/>
-                <a:cs typeface="HK Grotesk Semi-Bold"/>
-                <a:sym typeface="HK Grotesk Semi-Bold"/>
-              </a:rPr>
-              <a:t> will be </a:t>
-            </a:r>
-            <a:r>
-              <a:rPr lang="en-US" b="true" sz="2799" strike="noStrike" u="none">
-                <a:solidFill>
-                  <a:srgbClr val="F0F0F0"/>
-                </a:solidFill>
-                <a:latin typeface="HK Grotesk Semi-Bold"/>
-                <a:ea typeface="HK Grotesk Semi-Bold"/>
-                <a:cs typeface="HK Grotesk Semi-Bold"/>
-                <a:sym typeface="HK Grotesk Semi-Bold"/>
-              </a:rPr>
-              <a:t>simp</a:t>
-            </a:r>
-            <a:r>
-              <a:rPr lang="en-US" b="true" sz="2799" strike="noStrike" u="none">
-                <a:solidFill>
-                  <a:srgbClr val="F0F0F0"/>
-                </a:solidFill>
-                <a:latin typeface="HK Grotesk Semi-Bold"/>
-                <a:ea typeface="HK Grotesk Semi-Bold"/>
-                <a:cs typeface="HK Grotesk Semi-Bold"/>
-                <a:sym typeface="HK Grotesk Semi-Bold"/>
-              </a:rPr>
-              <a:t>l</a:t>
-            </a:r>
-            <a:r>
-              <a:rPr lang="en-US" b="true" sz="2799" strike="noStrike" u="none">
-                <a:solidFill>
-                  <a:srgbClr val="F0F0F0"/>
-                </a:solidFill>
-                <a:latin typeface="HK Grotesk Semi-Bold"/>
-                <a:ea typeface="HK Grotesk Semi-Bold"/>
-                <a:cs typeface="HK Grotesk Semi-Bold"/>
-                <a:sym typeface="HK Grotesk Semi-Bold"/>
-              </a:rPr>
-              <a:t>e and</a:t>
-            </a:r>
-            <a:r>
-              <a:rPr lang="en-US" b="true" sz="2799" strike="noStrike" u="none">
-                <a:solidFill>
-                  <a:srgbClr val="F0F0F0"/>
-                </a:solidFill>
-                <a:latin typeface="HK Grotesk Semi-Bold"/>
-                <a:ea typeface="HK Grotesk Semi-Bold"/>
-                <a:cs typeface="HK Grotesk Semi-Bold"/>
-                <a:sym typeface="HK Grotesk Semi-Bold"/>
-              </a:rPr>
-              <a:t> </a:t>
-            </a:r>
-            <a:r>
-              <a:rPr lang="en-US" b="true" sz="2799" strike="noStrike" u="none">
-                <a:solidFill>
-                  <a:srgbClr val="F0F0F0"/>
-                </a:solidFill>
-                <a:latin typeface="HK Grotesk Semi-Bold"/>
-                <a:ea typeface="HK Grotesk Semi-Bold"/>
-                <a:cs typeface="HK Grotesk Semi-Bold"/>
-                <a:sym typeface="HK Grotesk Semi-Bold"/>
-              </a:rPr>
-              <a:t>c</a:t>
-            </a:r>
-            <a:r>
-              <a:rPr lang="en-US" b="true" sz="2799" strike="noStrike" u="none">
-                <a:solidFill>
-                  <a:srgbClr val="F0F0F0"/>
-                </a:solidFill>
-                <a:latin typeface="HK Grotesk Semi-Bold"/>
-                <a:ea typeface="HK Grotesk Semi-Bold"/>
-                <a:cs typeface="HK Grotesk Semi-Bold"/>
-                <a:sym typeface="HK Grotesk Semi-Bold"/>
-              </a:rPr>
-              <a:t>onsi</a:t>
-            </a:r>
-            <a:r>
-              <a:rPr lang="en-US" b="true" sz="2799" strike="noStrike" u="none">
-                <a:solidFill>
-                  <a:srgbClr val="F0F0F0"/>
-                </a:solidFill>
-                <a:latin typeface="HK Grotesk Semi-Bold"/>
-                <a:ea typeface="HK Grotesk Semi-Bold"/>
-                <a:cs typeface="HK Grotesk Semi-Bold"/>
-                <a:sym typeface="HK Grotesk Semi-Bold"/>
-              </a:rPr>
-              <a:t>st</a:t>
-            </a:r>
-            <a:r>
-              <a:rPr lang="en-US" b="true" sz="2799" strike="noStrike" u="none">
-                <a:solidFill>
-                  <a:srgbClr val="F0F0F0"/>
-                </a:solidFill>
-                <a:latin typeface="HK Grotesk Semi-Bold"/>
-                <a:ea typeface="HK Grotesk Semi-Bold"/>
-                <a:cs typeface="HK Grotesk Semi-Bold"/>
-                <a:sym typeface="HK Grotesk Semi-Bold"/>
-              </a:rPr>
-              <a:t>e</a:t>
-            </a:r>
-            <a:r>
-              <a:rPr lang="en-US" b="true" sz="2799" strike="noStrike" u="none">
-                <a:solidFill>
-                  <a:srgbClr val="F0F0F0"/>
-                </a:solidFill>
-                <a:latin typeface="HK Grotesk Semi-Bold"/>
-                <a:ea typeface="HK Grotesk Semi-Bold"/>
-                <a:cs typeface="HK Grotesk Semi-Bold"/>
-                <a:sym typeface="HK Grotesk Semi-Bold"/>
-              </a:rPr>
-              <a:t>nt</a:t>
-            </a:r>
-            <a:r>
-              <a:rPr lang="en-US" b="true" sz="2799" strike="noStrike" u="none">
-                <a:solidFill>
-                  <a:srgbClr val="F0F0F0"/>
-                </a:solidFill>
-                <a:latin typeface="HK Grotesk Semi-Bold"/>
-                <a:ea typeface="HK Grotesk Semi-Bold"/>
-                <a:cs typeface="HK Grotesk Semi-Bold"/>
-                <a:sym typeface="HK Grotesk Semi-Bold"/>
-              </a:rPr>
-              <a:t>, </a:t>
-            </a:r>
-            <a:r>
-              <a:rPr lang="en-US" b="true" sz="2799" strike="noStrike" u="none">
-                <a:solidFill>
-                  <a:srgbClr val="F0F0F0"/>
-                </a:solidFill>
-                <a:latin typeface="HK Grotesk Semi-Bold"/>
-                <a:ea typeface="HK Grotesk Semi-Bold"/>
-                <a:cs typeface="HK Grotesk Semi-Bold"/>
-                <a:sym typeface="HK Grotesk Semi-Bold"/>
-              </a:rPr>
-              <a:t>with cl</a:t>
-            </a:r>
-            <a:r>
-              <a:rPr lang="en-US" b="true" sz="2799" strike="noStrike" u="none">
-                <a:solidFill>
-                  <a:srgbClr val="F0F0F0"/>
-                </a:solidFill>
-                <a:latin typeface="HK Grotesk Semi-Bold"/>
-                <a:ea typeface="HK Grotesk Semi-Bold"/>
-                <a:cs typeface="HK Grotesk Semi-Bold"/>
-                <a:sym typeface="HK Grotesk Semi-Bold"/>
-              </a:rPr>
-              <a:t>e</a:t>
-            </a:r>
-            <a:r>
-              <a:rPr lang="en-US" b="true" sz="2799" strike="noStrike" u="none">
-                <a:solidFill>
-                  <a:srgbClr val="F0F0F0"/>
-                </a:solidFill>
-                <a:latin typeface="HK Grotesk Semi-Bold"/>
-                <a:ea typeface="HK Grotesk Semi-Bold"/>
-                <a:cs typeface="HK Grotesk Semi-Bold"/>
-                <a:sym typeface="HK Grotesk Semi-Bold"/>
-              </a:rPr>
-              <a:t>a</a:t>
-            </a:r>
-            <a:r>
-              <a:rPr lang="en-US" b="true" sz="2799" strike="noStrike" u="none">
-                <a:solidFill>
-                  <a:srgbClr val="F0F0F0"/>
-                </a:solidFill>
-                <a:latin typeface="HK Grotesk Semi-Bold"/>
-                <a:ea typeface="HK Grotesk Semi-Bold"/>
-                <a:cs typeface="HK Grotesk Semi-Bold"/>
-                <a:sym typeface="HK Grotesk Semi-Bold"/>
-              </a:rPr>
-              <a:t>r</a:t>
-            </a:r>
-            <a:r>
-              <a:rPr lang="en-US" b="true" sz="2799" strike="noStrike" u="none">
-                <a:solidFill>
-                  <a:srgbClr val="F0F0F0"/>
-                </a:solidFill>
-                <a:latin typeface="HK Grotesk Semi-Bold"/>
-                <a:ea typeface="HK Grotesk Semi-Bold"/>
-                <a:cs typeface="HK Grotesk Semi-Bold"/>
-                <a:sym typeface="HK Grotesk Semi-Bold"/>
-              </a:rPr>
-              <a:t> sect</a:t>
-            </a:r>
-            <a:r>
-              <a:rPr lang="en-US" b="true" sz="2799" strike="noStrike" u="none">
-                <a:solidFill>
-                  <a:srgbClr val="F0F0F0"/>
-                </a:solidFill>
-                <a:latin typeface="HK Grotesk Semi-Bold"/>
-                <a:ea typeface="HK Grotesk Semi-Bold"/>
-                <a:cs typeface="HK Grotesk Semi-Bold"/>
-                <a:sym typeface="HK Grotesk Semi-Bold"/>
-              </a:rPr>
-              <a:t>i</a:t>
-            </a:r>
-            <a:r>
-              <a:rPr lang="en-US" b="true" sz="2799" strike="noStrike" u="none">
-                <a:solidFill>
-                  <a:srgbClr val="F0F0F0"/>
-                </a:solidFill>
-                <a:latin typeface="HK Grotesk Semi-Bold"/>
-                <a:ea typeface="HK Grotesk Semi-Bold"/>
-                <a:cs typeface="HK Grotesk Semi-Bold"/>
-                <a:sym typeface="HK Grotesk Semi-Bold"/>
-              </a:rPr>
-              <a:t>o</a:t>
-            </a:r>
-            <a:r>
-              <a:rPr lang="en-US" b="true" sz="2799" strike="noStrike" u="none">
-                <a:solidFill>
-                  <a:srgbClr val="F0F0F0"/>
-                </a:solidFill>
-                <a:latin typeface="HK Grotesk Semi-Bold"/>
-                <a:ea typeface="HK Grotesk Semi-Bold"/>
-                <a:cs typeface="HK Grotesk Semi-Bold"/>
-                <a:sym typeface="HK Grotesk Semi-Bold"/>
-              </a:rPr>
-              <a:t>n</a:t>
-            </a:r>
-            <a:r>
-              <a:rPr lang="en-US" b="true" sz="2799" strike="noStrike" u="none">
-                <a:solidFill>
-                  <a:srgbClr val="F0F0F0"/>
-                </a:solidFill>
-                <a:latin typeface="HK Grotesk Semi-Bold"/>
-                <a:ea typeface="HK Grotesk Semi-Bold"/>
-                <a:cs typeface="HK Grotesk Semi-Bold"/>
-                <a:sym typeface="HK Grotesk Semi-Bold"/>
-              </a:rPr>
-              <a:t>s</a:t>
-            </a:r>
-            <a:r>
-              <a:rPr lang="en-US" b="true" sz="2799" strike="noStrike" u="none">
-                <a:solidFill>
-                  <a:srgbClr val="F0F0F0"/>
-                </a:solidFill>
-                <a:latin typeface="HK Grotesk Semi-Bold"/>
-                <a:ea typeface="HK Grotesk Semi-Bold"/>
-                <a:cs typeface="HK Grotesk Semi-Bold"/>
-                <a:sym typeface="HK Grotesk Semi-Bold"/>
-              </a:rPr>
-              <a:t> </a:t>
-            </a:r>
-            <a:r>
-              <a:rPr lang="en-US" b="true" sz="2799" strike="noStrike" u="none">
-                <a:solidFill>
-                  <a:srgbClr val="F0F0F0"/>
-                </a:solidFill>
-                <a:latin typeface="HK Grotesk Semi-Bold"/>
-                <a:ea typeface="HK Grotesk Semi-Bold"/>
-                <a:cs typeface="HK Grotesk Semi-Bold"/>
-                <a:sym typeface="HK Grotesk Semi-Bold"/>
-              </a:rPr>
-              <a:t>f</a:t>
-            </a:r>
-            <a:r>
-              <a:rPr lang="en-US" b="true" sz="2799" strike="noStrike" u="none">
-                <a:solidFill>
-                  <a:srgbClr val="F0F0F0"/>
-                </a:solidFill>
-                <a:latin typeface="HK Grotesk Semi-Bold"/>
-                <a:ea typeface="HK Grotesk Semi-Bold"/>
-                <a:cs typeface="HK Grotesk Semi-Bold"/>
-                <a:sym typeface="HK Grotesk Semi-Bold"/>
-              </a:rPr>
-              <a:t>o</a:t>
-            </a:r>
-            <a:r>
-              <a:rPr lang="en-US" b="true" sz="2799" strike="noStrike" u="none">
-                <a:solidFill>
-                  <a:srgbClr val="F0F0F0"/>
-                </a:solidFill>
-                <a:latin typeface="HK Grotesk Semi-Bold"/>
-                <a:ea typeface="HK Grotesk Semi-Bold"/>
-                <a:cs typeface="HK Grotesk Semi-Bold"/>
-                <a:sym typeface="HK Grotesk Semi-Bold"/>
-              </a:rPr>
-              <a:t>r</a:t>
-            </a:r>
-            <a:r>
-              <a:rPr lang="en-US" b="true" sz="2799" strike="noStrike" u="none">
-                <a:solidFill>
-                  <a:srgbClr val="F0F0F0"/>
-                </a:solidFill>
-                <a:latin typeface="HK Grotesk Semi-Bold"/>
-                <a:ea typeface="HK Grotesk Semi-Bold"/>
-                <a:cs typeface="HK Grotesk Semi-Bold"/>
-                <a:sym typeface="HK Grotesk Semi-Bold"/>
-              </a:rPr>
-              <a:t> </a:t>
-            </a:r>
-            <a:r>
-              <a:rPr lang="en-US" b="true" sz="2799" strike="noStrike" u="none">
-                <a:solidFill>
-                  <a:srgbClr val="F0F0F0"/>
-                </a:solidFill>
-                <a:latin typeface="HK Grotesk Semi-Bold"/>
-                <a:ea typeface="HK Grotesk Semi-Bold"/>
-                <a:cs typeface="HK Grotesk Semi-Bold"/>
-                <a:sym typeface="HK Grotesk Semi-Bold"/>
-              </a:rPr>
-              <a:t>Dr</a:t>
-            </a:r>
-            <a:r>
-              <a:rPr lang="en-US" b="true" sz="2799" strike="noStrike" u="none">
-                <a:solidFill>
-                  <a:srgbClr val="F0F0F0"/>
-                </a:solidFill>
-                <a:latin typeface="HK Grotesk Semi-Bold"/>
-                <a:ea typeface="HK Grotesk Semi-Bold"/>
-                <a:cs typeface="HK Grotesk Semi-Bold"/>
-                <a:sym typeface="HK Grotesk Semi-Bold"/>
-              </a:rPr>
-              <a:t>i</a:t>
-            </a:r>
-            <a:r>
-              <a:rPr lang="en-US" b="true" sz="2799" strike="noStrike" u="none">
-                <a:solidFill>
-                  <a:srgbClr val="F0F0F0"/>
-                </a:solidFill>
-                <a:latin typeface="HK Grotesk Semi-Bold"/>
-                <a:ea typeface="HK Grotesk Semi-Bold"/>
-                <a:cs typeface="HK Grotesk Semi-Bold"/>
-                <a:sym typeface="HK Grotesk Semi-Bold"/>
-              </a:rPr>
-              <a:t>ve</a:t>
-            </a:r>
-            <a:r>
-              <a:rPr lang="en-US" b="true" sz="2799" strike="noStrike" u="none">
-                <a:solidFill>
-                  <a:srgbClr val="F0F0F0"/>
-                </a:solidFill>
-                <a:latin typeface="HK Grotesk Semi-Bold"/>
-                <a:ea typeface="HK Grotesk Semi-Bold"/>
-                <a:cs typeface="HK Grotesk Semi-Bold"/>
-                <a:sym typeface="HK Grotesk Semi-Bold"/>
-              </a:rPr>
-              <a:t>rs</a:t>
-            </a:r>
-            <a:r>
-              <a:rPr lang="en-US" b="true" sz="2799" strike="noStrike" u="none">
-                <a:solidFill>
-                  <a:srgbClr val="F0F0F0"/>
-                </a:solidFill>
-                <a:latin typeface="HK Grotesk Semi-Bold"/>
-                <a:ea typeface="HK Grotesk Semi-Bold"/>
-                <a:cs typeface="HK Grotesk Semi-Bold"/>
-                <a:sym typeface="HK Grotesk Semi-Bold"/>
-              </a:rPr>
-              <a:t>,</a:t>
-            </a:r>
-            <a:r>
-              <a:rPr lang="en-US" b="true" sz="2799" strike="noStrike" u="none">
-                <a:solidFill>
-                  <a:srgbClr val="F0F0F0"/>
-                </a:solidFill>
-                <a:latin typeface="HK Grotesk Semi-Bold"/>
-                <a:ea typeface="HK Grotesk Semi-Bold"/>
-                <a:cs typeface="HK Grotesk Semi-Bold"/>
-                <a:sym typeface="HK Grotesk Semi-Bold"/>
-              </a:rPr>
-              <a:t> </a:t>
-            </a:r>
-            <a:r>
-              <a:rPr lang="en-US" b="true" sz="2799" strike="noStrike" u="none">
-                <a:solidFill>
-                  <a:srgbClr val="F0F0F0"/>
-                </a:solidFill>
-                <a:latin typeface="HK Grotesk Semi-Bold"/>
-                <a:ea typeface="HK Grotesk Semi-Bold"/>
-                <a:cs typeface="HK Grotesk Semi-Bold"/>
-                <a:sym typeface="HK Grotesk Semi-Bold"/>
-              </a:rPr>
-              <a:t>T</a:t>
-            </a:r>
-            <a:r>
-              <a:rPr lang="en-US" b="true" sz="2799" strike="noStrike" u="none">
-                <a:solidFill>
-                  <a:srgbClr val="F0F0F0"/>
-                </a:solidFill>
-                <a:latin typeface="HK Grotesk Semi-Bold"/>
-                <a:ea typeface="HK Grotesk Semi-Bold"/>
-                <a:cs typeface="HK Grotesk Semi-Bold"/>
-                <a:sym typeface="HK Grotesk Semi-Bold"/>
-              </a:rPr>
-              <a:t>e</a:t>
-            </a:r>
-            <a:r>
-              <a:rPr lang="en-US" b="true" sz="2799" strike="noStrike" u="none">
-                <a:solidFill>
-                  <a:srgbClr val="F0F0F0"/>
-                </a:solidFill>
-                <a:latin typeface="HK Grotesk Semi-Bold"/>
-                <a:ea typeface="HK Grotesk Semi-Bold"/>
-                <a:cs typeface="HK Grotesk Semi-Bold"/>
-                <a:sym typeface="HK Grotesk Semi-Bold"/>
-              </a:rPr>
-              <a:t>am</a:t>
-            </a:r>
-            <a:r>
-              <a:rPr lang="en-US" b="true" sz="2799" strike="noStrike" u="none">
-                <a:solidFill>
-                  <a:srgbClr val="F0F0F0"/>
-                </a:solidFill>
-                <a:latin typeface="HK Grotesk Semi-Bold"/>
-                <a:ea typeface="HK Grotesk Semi-Bold"/>
-                <a:cs typeface="HK Grotesk Semi-Bold"/>
-                <a:sym typeface="HK Grotesk Semi-Bold"/>
-              </a:rPr>
-              <a:t>s, </a:t>
-            </a:r>
-            <a:r>
-              <a:rPr lang="en-US" b="true" sz="2799" strike="noStrike" u="none">
-                <a:solidFill>
-                  <a:srgbClr val="F0F0F0"/>
-                </a:solidFill>
-                <a:latin typeface="HK Grotesk Semi-Bold"/>
-                <a:ea typeface="HK Grotesk Semi-Bold"/>
-                <a:cs typeface="HK Grotesk Semi-Bold"/>
-                <a:sym typeface="HK Grotesk Semi-Bold"/>
-              </a:rPr>
-              <a:t>R</a:t>
-            </a:r>
-            <a:r>
-              <a:rPr lang="en-US" b="true" sz="2799" strike="noStrike" u="none">
-                <a:solidFill>
-                  <a:srgbClr val="F0F0F0"/>
-                </a:solidFill>
-                <a:latin typeface="HK Grotesk Semi-Bold"/>
-                <a:ea typeface="HK Grotesk Semi-Bold"/>
-                <a:cs typeface="HK Grotesk Semi-Bold"/>
-                <a:sym typeface="HK Grotesk Semi-Bold"/>
-              </a:rPr>
-              <a:t>a</a:t>
-            </a:r>
-            <a:r>
-              <a:rPr lang="en-US" b="true" sz="2799" strike="noStrike" u="none">
-                <a:solidFill>
-                  <a:srgbClr val="F0F0F0"/>
-                </a:solidFill>
-                <a:latin typeface="HK Grotesk Semi-Bold"/>
-                <a:ea typeface="HK Grotesk Semi-Bold"/>
-                <a:cs typeface="HK Grotesk Semi-Bold"/>
-                <a:sym typeface="HK Grotesk Semi-Bold"/>
-              </a:rPr>
-              <a:t>c</a:t>
-            </a:r>
-            <a:r>
-              <a:rPr lang="en-US" b="true" sz="2799" strike="noStrike" u="none">
-                <a:solidFill>
-                  <a:srgbClr val="F0F0F0"/>
-                </a:solidFill>
-                <a:latin typeface="HK Grotesk Semi-Bold"/>
-                <a:ea typeface="HK Grotesk Semi-Bold"/>
-                <a:cs typeface="HK Grotesk Semi-Bold"/>
-                <a:sym typeface="HK Grotesk Semi-Bold"/>
-              </a:rPr>
-              <a:t>e</a:t>
-            </a:r>
-            <a:r>
-              <a:rPr lang="en-US" b="true" sz="2799" strike="noStrike" u="none">
-                <a:solidFill>
-                  <a:srgbClr val="F0F0F0"/>
-                </a:solidFill>
-                <a:latin typeface="HK Grotesk Semi-Bold"/>
-                <a:ea typeface="HK Grotesk Semi-Bold"/>
-                <a:cs typeface="HK Grotesk Semi-Bold"/>
-                <a:sym typeface="HK Grotesk Semi-Bold"/>
-              </a:rPr>
-              <a:t>s</a:t>
-            </a:r>
-            <a:r>
-              <a:rPr lang="en-US" b="true" sz="2799" strike="noStrike" u="none">
-                <a:solidFill>
-                  <a:srgbClr val="F0F0F0"/>
-                </a:solidFill>
-                <a:latin typeface="HK Grotesk Semi-Bold"/>
-                <a:ea typeface="HK Grotesk Semi-Bold"/>
-                <a:cs typeface="HK Grotesk Semi-Bold"/>
-                <a:sym typeface="HK Grotesk Semi-Bold"/>
-              </a:rPr>
-              <a:t>, and </a:t>
-            </a:r>
-            <a:r>
-              <a:rPr lang="en-US" b="true" sz="2799" strike="noStrike" u="none">
-                <a:solidFill>
-                  <a:srgbClr val="F0F0F0"/>
-                </a:solidFill>
-                <a:latin typeface="HK Grotesk Semi-Bold"/>
-                <a:ea typeface="HK Grotesk Semi-Bold"/>
-                <a:cs typeface="HK Grotesk Semi-Bold"/>
-                <a:sym typeface="HK Grotesk Semi-Bold"/>
-              </a:rPr>
-              <a:t>Dashboard to </a:t>
-            </a:r>
-            <a:r>
-              <a:rPr lang="en-US" b="true" sz="2799" strike="noStrike" u="none">
-                <a:solidFill>
-                  <a:srgbClr val="F0F0F0"/>
-                </a:solidFill>
-                <a:latin typeface="HK Grotesk Semi-Bold"/>
-                <a:ea typeface="HK Grotesk Semi-Bold"/>
-                <a:cs typeface="HK Grotesk Semi-Bold"/>
-                <a:sym typeface="HK Grotesk Semi-Bold"/>
-              </a:rPr>
-              <a:t>mi</a:t>
-            </a:r>
-            <a:r>
-              <a:rPr lang="en-US" b="true" sz="2799" strike="noStrike" u="none">
-                <a:solidFill>
-                  <a:srgbClr val="F0F0F0"/>
-                </a:solidFill>
-                <a:latin typeface="HK Grotesk Semi-Bold"/>
-                <a:ea typeface="HK Grotesk Semi-Bold"/>
-                <a:cs typeface="HK Grotesk Semi-Bold"/>
-                <a:sym typeface="HK Grotesk Semi-Bold"/>
-              </a:rPr>
-              <a:t>nimiz</a:t>
-            </a:r>
-            <a:r>
-              <a:rPr lang="en-US" b="true" sz="2799" strike="noStrike" u="none">
-                <a:solidFill>
-                  <a:srgbClr val="F0F0F0"/>
-                </a:solidFill>
-                <a:latin typeface="HK Grotesk Semi-Bold"/>
-                <a:ea typeface="HK Grotesk Semi-Bold"/>
-                <a:cs typeface="HK Grotesk Semi-Bold"/>
-                <a:sym typeface="HK Grotesk Semi-Bold"/>
-              </a:rPr>
-              <a:t>e </a:t>
-            </a:r>
-            <a:r>
-              <a:rPr lang="en-US" b="true" sz="2799" strike="noStrike" u="none">
-                <a:solidFill>
-                  <a:srgbClr val="F0F0F0"/>
-                </a:solidFill>
-                <a:latin typeface="HK Grotesk Semi-Bold"/>
-                <a:ea typeface="HK Grotesk Semi-Bold"/>
-                <a:cs typeface="HK Grotesk Semi-Bold"/>
-                <a:sym typeface="HK Grotesk Semi-Bold"/>
-              </a:rPr>
-              <a:t>us</a:t>
-            </a:r>
-            <a:r>
-              <a:rPr lang="en-US" b="true" sz="2799" strike="noStrike" u="none">
-                <a:solidFill>
-                  <a:srgbClr val="F0F0F0"/>
-                </a:solidFill>
-                <a:latin typeface="HK Grotesk Semi-Bold"/>
-                <a:ea typeface="HK Grotesk Semi-Bold"/>
-                <a:cs typeface="HK Grotesk Semi-Bold"/>
-                <a:sym typeface="HK Grotesk Semi-Bold"/>
-              </a:rPr>
-              <a:t>e</a:t>
-            </a:r>
-            <a:r>
-              <a:rPr lang="en-US" b="true" sz="2799" strike="noStrike" u="none">
-                <a:solidFill>
-                  <a:srgbClr val="F0F0F0"/>
-                </a:solidFill>
-                <a:latin typeface="HK Grotesk Semi-Bold"/>
-                <a:ea typeface="HK Grotesk Semi-Bold"/>
-                <a:cs typeface="HK Grotesk Semi-Bold"/>
-                <a:sym typeface="HK Grotesk Semi-Bold"/>
-              </a:rPr>
-              <a:t>r </a:t>
-            </a:r>
-            <a:r>
-              <a:rPr lang="en-US" b="true" sz="2799" strike="noStrike" u="none">
-                <a:solidFill>
-                  <a:srgbClr val="F0F0F0"/>
-                </a:solidFill>
-                <a:latin typeface="HK Grotesk Semi-Bold"/>
-                <a:ea typeface="HK Grotesk Semi-Bold"/>
-                <a:cs typeface="HK Grotesk Semi-Bold"/>
-                <a:sym typeface="HK Grotesk Semi-Bold"/>
-              </a:rPr>
-              <a:t>c</a:t>
-            </a:r>
-            <a:r>
-              <a:rPr lang="en-US" b="true" sz="2799" strike="noStrike" u="none">
-                <a:solidFill>
-                  <a:srgbClr val="F0F0F0"/>
-                </a:solidFill>
-                <a:latin typeface="HK Grotesk Semi-Bold"/>
-                <a:ea typeface="HK Grotesk Semi-Bold"/>
-                <a:cs typeface="HK Grotesk Semi-Bold"/>
-                <a:sym typeface="HK Grotesk Semi-Bold"/>
-              </a:rPr>
-              <a:t>onfu</a:t>
-            </a:r>
-            <a:r>
-              <a:rPr lang="en-US" b="true" sz="2799" strike="noStrike" u="none">
-                <a:solidFill>
-                  <a:srgbClr val="F0F0F0"/>
-                </a:solidFill>
-                <a:latin typeface="HK Grotesk Semi-Bold"/>
-                <a:ea typeface="HK Grotesk Semi-Bold"/>
-                <a:cs typeface="HK Grotesk Semi-Bold"/>
-                <a:sym typeface="HK Grotesk Semi-Bold"/>
-              </a:rPr>
-              <a:t>s</a:t>
-            </a:r>
-            <a:r>
-              <a:rPr lang="en-US" b="true" sz="2799" strike="noStrike" u="none">
-                <a:solidFill>
-                  <a:srgbClr val="F0F0F0"/>
-                </a:solidFill>
-                <a:latin typeface="HK Grotesk Semi-Bold"/>
-                <a:ea typeface="HK Grotesk Semi-Bold"/>
-                <a:cs typeface="HK Grotesk Semi-Bold"/>
-                <a:sym typeface="HK Grotesk Semi-Bold"/>
-              </a:rPr>
-              <a:t>ion</a:t>
+              <a:t>igation will be simple and consistent, with clear sections for Drivers, Teams, Races, and Dashboard to minimize user confusion</a:t>
             </a:r>
           </a:p>
         </p:txBody>
@@ -7211,13 +5344,14 @@
 </file>
 
 <file path=ppt/slides/slide6.xml><?xml version="1.0" encoding="utf-8"?>
-<p:sld xmlns:p="http://schemas.openxmlformats.org/presentationml/2006/main" xmlns:a="http://schemas.openxmlformats.org/drawingml/2006/main">
+<p:sld xmlns:a="http://schemas.openxmlformats.org/drawingml/2006/main" xmlns:r="http://schemas.openxmlformats.org/officeDocument/2006/relationships" xmlns:p="http://schemas.openxmlformats.org/presentationml/2006/main">
   <p:cSld>
     <p:bg>
       <p:bgPr>
         <a:solidFill>
           <a:srgbClr val="1B2A48"/>
         </a:solidFill>
+        <a:effectLst/>
       </p:bgPr>
     </p:bg>
     <p:spTree>
@@ -7236,12 +5370,12 @@
       </p:grpSpPr>
       <p:grpSp>
         <p:nvGrpSpPr>
-          <p:cNvPr name="Group 2" id="2"/>
+          <p:cNvPr id="2" name="Group 2"/>
           <p:cNvGrpSpPr/>
           <p:nvPr/>
         </p:nvGrpSpPr>
         <p:grpSpPr>
-          <a:xfrm rot="0">
+          <a:xfrm>
             <a:off x="4829175" y="3489960"/>
             <a:ext cx="8629650" cy="3307080"/>
             <a:chOff x="0" y="0"/>
@@ -7250,12 +5384,12 @@
         </p:grpSpPr>
         <p:sp>
           <p:nvSpPr>
-            <p:cNvPr name="TextBox 3" id="3"/>
-            <p:cNvSpPr txBox="true"/>
+            <p:cNvPr id="3" name="TextBox 3"/>
+            <p:cNvSpPr txBox="1"/>
             <p:nvPr/>
           </p:nvSpPr>
           <p:spPr>
-            <a:xfrm rot="0">
+            <a:xfrm>
               <a:off x="0" y="3850640"/>
               <a:ext cx="11506200" cy="558800"/>
             </a:xfrm>
@@ -7264,12 +5398,12 @@
             </a:prstGeom>
           </p:spPr>
           <p:txBody>
-            <a:bodyPr anchor="t" rtlCol="false" tIns="0" lIns="0" bIns="0" rIns="0">
+            <a:bodyPr lIns="0" tIns="0" rIns="0" bIns="0" rtlCol="0" anchor="t">
               <a:spAutoFit/>
             </a:bodyPr>
             <a:lstStyle/>
             <a:p>
-              <a:pPr algn="ctr" marL="0" indent="0" lvl="0">
+              <a:pPr marL="0" lvl="0" indent="0" algn="ctr">
                 <a:lnSpc>
                   <a:spcPts val="3359"/>
                 </a:lnSpc>
@@ -7278,7 +5412,7 @@
                 </a:spcBef>
               </a:pPr>
               <a:r>
-                <a:rPr lang="en-US" b="true" sz="2799">
+                <a:rPr lang="en-US" sz="2799" b="1">
                   <a:solidFill>
                     <a:srgbClr val="F0F0F0"/>
                   </a:solidFill>
@@ -7294,12 +5428,12 @@
         </p:sp>
         <p:sp>
           <p:nvSpPr>
-            <p:cNvPr name="TextBox 4" id="4"/>
-            <p:cNvSpPr txBox="true"/>
+            <p:cNvPr id="4" name="TextBox 4"/>
+            <p:cNvSpPr txBox="1"/>
             <p:nvPr/>
           </p:nvSpPr>
           <p:spPr>
-            <a:xfrm rot="0">
+            <a:xfrm>
               <a:off x="0" y="266700"/>
               <a:ext cx="11506200" cy="2659380"/>
             </a:xfrm>
@@ -7308,12 +5442,12 @@
             </a:prstGeom>
           </p:spPr>
           <p:txBody>
-            <a:bodyPr anchor="t" rtlCol="false" tIns="0" lIns="0" bIns="0" rIns="0">
+            <a:bodyPr lIns="0" tIns="0" rIns="0" bIns="0" rtlCol="0" anchor="t">
               <a:spAutoFit/>
             </a:bodyPr>
             <a:lstStyle/>
             <a:p>
-              <a:pPr algn="ctr" marL="0" indent="0" lvl="0">
+              <a:pPr marL="0" lvl="0" indent="0" algn="ctr">
                 <a:lnSpc>
                   <a:spcPts val="14400"/>
                 </a:lnSpc>
@@ -7339,7 +5473,7 @@
       </p:grpSp>
       <p:sp>
         <p:nvSpPr>
-          <p:cNvPr name="AutoShape 5" id="5"/>
+          <p:cNvPr id="5" name="AutoShape 5"/>
           <p:cNvSpPr/>
           <p:nvPr/>
         </p:nvSpPr>
@@ -7351,19 +5485,26 @@
           <a:prstGeom prst="line">
             <a:avLst/>
           </a:prstGeom>
-          <a:ln cap="flat" w="19050">
+          <a:ln w="19050" cap="flat">
             <a:solidFill>
               <a:srgbClr val="F0F0F0"/>
             </a:solidFill>
             <a:prstDash val="solid"/>
-            <a:headEnd type="none" len="sm" w="sm"/>
-            <a:tailEnd type="none" len="sm" w="sm"/>
+            <a:headEnd type="none" w="sm" len="sm"/>
+            <a:tailEnd type="none" w="sm" len="sm"/>
           </a:ln>
         </p:spPr>
-      </p:sp>
-      <p:sp>
-        <p:nvSpPr>
-          <p:cNvPr name="AutoShape 6" id="6"/>
+        <p:txBody>
+          <a:bodyPr/>
+          <a:lstStyle/>
+          <a:p>
+            <a:endParaRPr lang="en-AE"/>
+          </a:p>
+        </p:txBody>
+      </p:sp>
+      <p:sp>
+        <p:nvSpPr>
+          <p:cNvPr id="6" name="AutoShape 6"/>
           <p:cNvSpPr/>
           <p:nvPr/>
         </p:nvSpPr>
@@ -7375,15 +5516,22 @@
           <a:prstGeom prst="line">
             <a:avLst/>
           </a:prstGeom>
-          <a:ln cap="flat" w="19050">
+          <a:ln w="19050" cap="flat">
             <a:solidFill>
               <a:srgbClr val="F0F0F0"/>
             </a:solidFill>
             <a:prstDash val="solid"/>
-            <a:headEnd type="none" len="sm" w="sm"/>
-            <a:tailEnd type="none" len="sm" w="sm"/>
+            <a:headEnd type="none" w="sm" len="sm"/>
+            <a:tailEnd type="none" w="sm" len="sm"/>
           </a:ln>
         </p:spPr>
+        <p:txBody>
+          <a:bodyPr/>
+          <a:lstStyle/>
+          <a:p>
+            <a:endParaRPr lang="en-AE"/>
+          </a:p>
+        </p:txBody>
       </p:sp>
     </p:spTree>
   </p:cSld>
